--- a/api/templates/sales.pptx
+++ b/api/templates/sales.pptx
@@ -2,7 +2,7 @@
 <file path=ppt/presentation.xml><?xml version="1.0" encoding="utf-8"?>
 <p:presentation xmlns:a="http://schemas.openxmlformats.org/drawingml/2006/main" xmlns:r="http://schemas.openxmlformats.org/officeDocument/2006/relationships" xmlns:p="http://schemas.openxmlformats.org/presentationml/2006/main" saveSubsetFonts="1">
   <p:sldMasterIdLst>
-    <p:sldMasterId id="2147483648" r:id="rId1"/>
+    <p:sldMasterId id="2147483652" r:id="rId1"/>
   </p:sldMasterIdLst>
   <p:sldIdLst>
     <p:sldId id="256" r:id="rId2"/>
@@ -15,7 +15,7 @@
     <a:defPPr>
       <a:defRPr lang="en-US"/>
     </a:defPPr>
-    <a:lvl1pPr marL="0" algn="l" defTabSz="914400" rtl="0" eaLnBrk="1" latinLnBrk="0" hangingPunct="1">
+    <a:lvl1pPr marL="0" algn="l" defTabSz="457200" rtl="0" eaLnBrk="1" latinLnBrk="0" hangingPunct="1">
       <a:defRPr sz="1800" kern="1200">
         <a:solidFill>
           <a:schemeClr val="tx1"/>
@@ -25,7 +25,7 @@
         <a:cs typeface="+mn-cs"/>
       </a:defRPr>
     </a:lvl1pPr>
-    <a:lvl2pPr marL="457200" algn="l" defTabSz="914400" rtl="0" eaLnBrk="1" latinLnBrk="0" hangingPunct="1">
+    <a:lvl2pPr marL="457200" algn="l" defTabSz="457200" rtl="0" eaLnBrk="1" latinLnBrk="0" hangingPunct="1">
       <a:defRPr sz="1800" kern="1200">
         <a:solidFill>
           <a:schemeClr val="tx1"/>
@@ -35,7 +35,7 @@
         <a:cs typeface="+mn-cs"/>
       </a:defRPr>
     </a:lvl2pPr>
-    <a:lvl3pPr marL="914400" algn="l" defTabSz="914400" rtl="0" eaLnBrk="1" latinLnBrk="0" hangingPunct="1">
+    <a:lvl3pPr marL="914400" algn="l" defTabSz="457200" rtl="0" eaLnBrk="1" latinLnBrk="0" hangingPunct="1">
       <a:defRPr sz="1800" kern="1200">
         <a:solidFill>
           <a:schemeClr val="tx1"/>
@@ -45,7 +45,7 @@
         <a:cs typeface="+mn-cs"/>
       </a:defRPr>
     </a:lvl3pPr>
-    <a:lvl4pPr marL="1371600" algn="l" defTabSz="914400" rtl="0" eaLnBrk="1" latinLnBrk="0" hangingPunct="1">
+    <a:lvl4pPr marL="1371600" algn="l" defTabSz="457200" rtl="0" eaLnBrk="1" latinLnBrk="0" hangingPunct="1">
       <a:defRPr sz="1800" kern="1200">
         <a:solidFill>
           <a:schemeClr val="tx1"/>
@@ -55,7 +55,7 @@
         <a:cs typeface="+mn-cs"/>
       </a:defRPr>
     </a:lvl4pPr>
-    <a:lvl5pPr marL="1828800" algn="l" defTabSz="914400" rtl="0" eaLnBrk="1" latinLnBrk="0" hangingPunct="1">
+    <a:lvl5pPr marL="1828800" algn="l" defTabSz="457200" rtl="0" eaLnBrk="1" latinLnBrk="0" hangingPunct="1">
       <a:defRPr sz="1800" kern="1200">
         <a:solidFill>
           <a:schemeClr val="tx1"/>
@@ -65,7 +65,7 @@
         <a:cs typeface="+mn-cs"/>
       </a:defRPr>
     </a:lvl5pPr>
-    <a:lvl6pPr marL="2286000" algn="l" defTabSz="914400" rtl="0" eaLnBrk="1" latinLnBrk="0" hangingPunct="1">
+    <a:lvl6pPr marL="2286000" algn="l" defTabSz="457200" rtl="0" eaLnBrk="1" latinLnBrk="0" hangingPunct="1">
       <a:defRPr sz="1800" kern="1200">
         <a:solidFill>
           <a:schemeClr val="tx1"/>
@@ -75,7 +75,7 @@
         <a:cs typeface="+mn-cs"/>
       </a:defRPr>
     </a:lvl6pPr>
-    <a:lvl7pPr marL="2743200" algn="l" defTabSz="914400" rtl="0" eaLnBrk="1" latinLnBrk="0" hangingPunct="1">
+    <a:lvl7pPr marL="2743200" algn="l" defTabSz="457200" rtl="0" eaLnBrk="1" latinLnBrk="0" hangingPunct="1">
       <a:defRPr sz="1800" kern="1200">
         <a:solidFill>
           <a:schemeClr val="tx1"/>
@@ -85,7 +85,7 @@
         <a:cs typeface="+mn-cs"/>
       </a:defRPr>
     </a:lvl7pPr>
-    <a:lvl8pPr marL="3200400" algn="l" defTabSz="914400" rtl="0" eaLnBrk="1" latinLnBrk="0" hangingPunct="1">
+    <a:lvl8pPr marL="3200400" algn="l" defTabSz="457200" rtl="0" eaLnBrk="1" latinLnBrk="0" hangingPunct="1">
       <a:defRPr sz="1800" kern="1200">
         <a:solidFill>
           <a:schemeClr val="tx1"/>
@@ -95,7 +95,7 @@
         <a:cs typeface="+mn-cs"/>
       </a:defRPr>
     </a:lvl8pPr>
-    <a:lvl9pPr marL="3657600" algn="l" defTabSz="914400" rtl="0" eaLnBrk="1" latinLnBrk="0" hangingPunct="1">
+    <a:lvl9pPr marL="3657600" algn="l" defTabSz="457200" rtl="0" eaLnBrk="1" latinLnBrk="0" hangingPunct="1">
       <a:defRPr sz="1800" kern="1200">
         <a:solidFill>
           <a:schemeClr val="tx1"/>
@@ -115,7 +115,7 @@
 </file>
 
 <file path=ppt/slideLayouts/slideLayout1.xml><?xml version="1.0" encoding="utf-8"?>
-<p:sldLayout xmlns:a="http://schemas.openxmlformats.org/drawingml/2006/main" xmlns:r="http://schemas.openxmlformats.org/officeDocument/2006/relationships" xmlns:p="http://schemas.openxmlformats.org/presentationml/2006/main" type="title" preserve="1">
+<p:sldLayout xmlns:a="http://schemas.openxmlformats.org/drawingml/2006/main" xmlns:r="http://schemas.openxmlformats.org/officeDocument/2006/relationships" xmlns:p="http://schemas.openxmlformats.org/presentationml/2006/main" showMasterSp="0" type="title" preserve="1">
   <p:cSld name="Title Slide">
     <p:spTree>
       <p:nvGrpSpPr>
@@ -131,12 +131,3456 @@
           <a:chExt cx="0" cy="0"/>
         </a:xfrm>
       </p:grpSpPr>
+      <p:pic>
+        <p:nvPicPr>
+          <p:cNvPr id="7" name="Picture 6" descr="Brickwork-HD-R1a.jpg"/>
+          <p:cNvPicPr>
+            <a:picLocks noChangeAspect="1"/>
+          </p:cNvPicPr>
+          <p:nvPr/>
+        </p:nvPicPr>
+        <p:blipFill>
+          <a:blip r:embed="rId2">
+            <a:extLst>
+              <a:ext uri="{28A0092B-C50C-407E-A947-70E740481C1C}">
+                <a14:useLocalDpi xmlns:a14="http://schemas.microsoft.com/office/drawing/2010/main" val="0"/>
+              </a:ext>
+            </a:extLst>
+          </a:blip>
+          <a:stretch>
+            <a:fillRect/>
+          </a:stretch>
+        </p:blipFill>
+        <p:spPr>
+          <a:xfrm>
+            <a:off x="0" y="0"/>
+            <a:ext cx="12192000" cy="6858000"/>
+          </a:xfrm>
+          <a:prstGeom prst="rect">
+            <a:avLst/>
+          </a:prstGeom>
+        </p:spPr>
+      </p:pic>
+      <p:sp useBgFill="1">
+        <p:nvSpPr>
+          <p:cNvPr id="12" name="Freeform 11"/>
+          <p:cNvSpPr/>
+          <p:nvPr/>
+        </p:nvSpPr>
+        <p:spPr>
+          <a:xfrm>
+            <a:off x="-15875" y="0"/>
+            <a:ext cx="11683810" cy="6588125"/>
+          </a:xfrm>
+          <a:custGeom>
+            <a:avLst/>
+            <a:gdLst/>
+            <a:ahLst/>
+            <a:cxnLst/>
+            <a:rect l="l" t="t" r="r" b="b"/>
+            <a:pathLst>
+              <a:path w="11683810" h="6588125">
+                <a:moveTo>
+                  <a:pt x="0" y="0"/>
+                </a:moveTo>
+                <a:lnTo>
+                  <a:pt x="11318691" y="0"/>
+                </a:lnTo>
+                <a:lnTo>
+                  <a:pt x="11683810" y="5976938"/>
+                </a:lnTo>
+                <a:lnTo>
+                  <a:pt x="15875" y="6588125"/>
+                </a:lnTo>
+                <a:cubicBezTo>
+                  <a:pt x="10583" y="4386792"/>
+                  <a:pt x="5292" y="2185458"/>
+                  <a:pt x="0" y="0"/>
+                </a:cubicBezTo>
+                <a:close/>
+              </a:path>
+            </a:pathLst>
+          </a:custGeom>
+          <a:ln>
+            <a:noFill/>
+          </a:ln>
+          <a:effectLst>
+            <a:outerShdw blurRad="101600" dist="152400" dir="4380000" algn="tl" rotWithShape="0">
+              <a:srgbClr val="000000">
+                <a:alpha val="43000"/>
+              </a:srgbClr>
+            </a:outerShdw>
+          </a:effectLst>
+        </p:spPr>
+        <p:style>
+          <a:lnRef idx="1">
+            <a:schemeClr val="accent1"/>
+          </a:lnRef>
+          <a:fillRef idx="3">
+            <a:schemeClr val="accent1"/>
+          </a:fillRef>
+          <a:effectRef idx="2">
+            <a:schemeClr val="accent1"/>
+          </a:effectRef>
+          <a:fontRef idx="minor">
+            <a:schemeClr val="lt1"/>
+          </a:fontRef>
+        </p:style>
+      </p:sp>
+      <p:sp>
+        <p:nvSpPr>
+          <p:cNvPr id="14" name="Freeform 13"/>
+          <p:cNvSpPr/>
+          <p:nvPr/>
+        </p:nvSpPr>
+        <p:spPr>
+          <a:xfrm>
+            <a:off x="0" y="4282257"/>
+            <a:ext cx="11329257" cy="2028845"/>
+          </a:xfrm>
+          <a:custGeom>
+            <a:avLst/>
+            <a:gdLst/>
+            <a:ahLst/>
+            <a:cxnLst/>
+            <a:rect l="l" t="t" r="r" b="b"/>
+            <a:pathLst>
+              <a:path w="11329257" h="2028845">
+                <a:moveTo>
+                  <a:pt x="0" y="588520"/>
+                </a:moveTo>
+                <a:lnTo>
+                  <a:pt x="11244075" y="0"/>
+                </a:lnTo>
+                <a:lnTo>
+                  <a:pt x="11329257" y="1424838"/>
+                </a:lnTo>
+                <a:lnTo>
+                  <a:pt x="0" y="2028845"/>
+                </a:lnTo>
+                <a:lnTo>
+                  <a:pt x="0" y="588520"/>
+                </a:lnTo>
+                <a:close/>
+              </a:path>
+            </a:pathLst>
+          </a:custGeom>
+          <a:gradFill flip="none" rotWithShape="1">
+            <a:gsLst>
+              <a:gs pos="34000">
+                <a:schemeClr val="accent1"/>
+              </a:gs>
+              <a:gs pos="100000">
+                <a:schemeClr val="accent1">
+                  <a:lumMod val="50000"/>
+                </a:schemeClr>
+              </a:gs>
+            </a:gsLst>
+            <a:path path="circle">
+              <a:fillToRect l="50000" t="50000" r="50000" b="50000"/>
+            </a:path>
+            <a:tileRect/>
+          </a:gradFill>
+          <a:ln>
+            <a:noFill/>
+          </a:ln>
+        </p:spPr>
+        <p:style>
+          <a:lnRef idx="1">
+            <a:schemeClr val="accent1"/>
+          </a:lnRef>
+          <a:fillRef idx="3">
+            <a:schemeClr val="accent1"/>
+          </a:fillRef>
+          <a:effectRef idx="2">
+            <a:schemeClr val="accent1"/>
+          </a:effectRef>
+          <a:fontRef idx="minor">
+            <a:schemeClr val="lt1"/>
+          </a:fontRef>
+        </p:style>
+      </p:sp>
+      <p:sp>
+        <p:nvSpPr>
+          <p:cNvPr id="26" name="Freeform 25"/>
+          <p:cNvSpPr/>
+          <p:nvPr/>
+        </p:nvSpPr>
+        <p:spPr>
+          <a:xfrm>
+            <a:off x="0" y="0"/>
+            <a:ext cx="8719579" cy="456877"/>
+          </a:xfrm>
+          <a:custGeom>
+            <a:avLst/>
+            <a:gdLst/>
+            <a:ahLst/>
+            <a:cxnLst/>
+            <a:rect l="l" t="t" r="r" b="b"/>
+            <a:pathLst>
+              <a:path w="8719579" h="456877">
+                <a:moveTo>
+                  <a:pt x="0" y="0"/>
+                </a:moveTo>
+                <a:lnTo>
+                  <a:pt x="8719579" y="0"/>
+                </a:lnTo>
+                <a:lnTo>
+                  <a:pt x="0" y="456877"/>
+                </a:lnTo>
+                <a:lnTo>
+                  <a:pt x="0" y="0"/>
+                </a:lnTo>
+                <a:close/>
+              </a:path>
+            </a:pathLst>
+          </a:custGeom>
+          <a:gradFill flip="none" rotWithShape="1">
+            <a:gsLst>
+              <a:gs pos="34000">
+                <a:schemeClr val="accent1"/>
+              </a:gs>
+              <a:gs pos="100000">
+                <a:schemeClr val="accent1">
+                  <a:lumMod val="50000"/>
+                </a:schemeClr>
+              </a:gs>
+            </a:gsLst>
+            <a:path path="circle">
+              <a:fillToRect l="50000" t="50000" r="50000" b="50000"/>
+            </a:path>
+            <a:tileRect/>
+          </a:gradFill>
+          <a:ln>
+            <a:noFill/>
+          </a:ln>
+        </p:spPr>
+        <p:style>
+          <a:lnRef idx="1">
+            <a:schemeClr val="accent1"/>
+          </a:lnRef>
+          <a:fillRef idx="3">
+            <a:schemeClr val="accent1"/>
+          </a:fillRef>
+          <a:effectRef idx="2">
+            <a:schemeClr val="accent1"/>
+          </a:effectRef>
+          <a:fontRef idx="minor">
+            <a:schemeClr val="lt1"/>
+          </a:fontRef>
+        </p:style>
+      </p:sp>
+      <p:sp>
+        <p:nvSpPr>
+          <p:cNvPr id="15" name="Freeform 14"/>
+          <p:cNvSpPr/>
+          <p:nvPr/>
+        </p:nvSpPr>
+        <p:spPr>
+          <a:xfrm rot="21420000">
+            <a:off x="-161800" y="293317"/>
+            <a:ext cx="11367116" cy="5751804"/>
+          </a:xfrm>
+          <a:custGeom>
+            <a:avLst/>
+            <a:gdLst/>
+            <a:ahLst/>
+            <a:cxnLst/>
+            <a:rect l="l" t="t" r="r" b="b"/>
+            <a:pathLst>
+              <a:path w="11367116" h="5751804">
+                <a:moveTo>
+                  <a:pt x="11346705" y="0"/>
+                </a:moveTo>
+                <a:cubicBezTo>
+                  <a:pt x="11353509" y="1915114"/>
+                  <a:pt x="11360312" y="3830229"/>
+                  <a:pt x="11367116" y="5745343"/>
+                </a:cubicBezTo>
+                <a:lnTo>
+                  <a:pt x="0" y="5751804"/>
+                </a:lnTo>
+              </a:path>
+            </a:pathLst>
+          </a:custGeom>
+          <a:ln w="82550">
+            <a:solidFill>
+              <a:schemeClr val="tx1">
+                <a:lumMod val="50000"/>
+                <a:lumOff val="50000"/>
+              </a:schemeClr>
+            </a:solidFill>
+            <a:miter lim="800000"/>
+          </a:ln>
+        </p:spPr>
+        <p:style>
+          <a:lnRef idx="2">
+            <a:schemeClr val="accent1"/>
+          </a:lnRef>
+          <a:fillRef idx="0">
+            <a:schemeClr val="accent1"/>
+          </a:fillRef>
+          <a:effectRef idx="1">
+            <a:schemeClr val="accent1"/>
+          </a:effectRef>
+          <a:fontRef idx="minor">
+            <a:schemeClr val="tx1"/>
+          </a:fontRef>
+        </p:style>
+      </p:sp>
+      <p:sp>
+        <p:nvSpPr>
+          <p:cNvPr id="2" name="Title 1"/>
+          <p:cNvSpPr>
+            <a:spLocks noGrp="1"/>
+          </p:cNvSpPr>
+          <p:nvPr>
+            <p:ph type="ctrTitle"/>
+          </p:nvPr>
+        </p:nvSpPr>
+        <p:spPr>
+          <a:xfrm rot="21420000">
+            <a:off x="891201" y="662656"/>
+            <a:ext cx="9755187" cy="2766528"/>
+          </a:xfrm>
+        </p:spPr>
+        <p:txBody>
+          <a:bodyPr anchor="b">
+            <a:normAutofit/>
+          </a:bodyPr>
+          <a:lstStyle>
+            <a:lvl1pPr algn="r">
+              <a:defRPr sz="8000"/>
+            </a:lvl1pPr>
+          </a:lstStyle>
+          <a:p>
+            <a:r>
+              <a:rPr lang="en-US"/>
+              <a:t>Click to edit Master title style</a:t>
+            </a:r>
+            <a:endParaRPr lang="en-US" dirty="0"/>
+          </a:p>
+        </p:txBody>
+      </p:sp>
+      <p:sp>
+        <p:nvSpPr>
+          <p:cNvPr id="3" name="Subtitle 2"/>
+          <p:cNvSpPr>
+            <a:spLocks noGrp="1"/>
+          </p:cNvSpPr>
+          <p:nvPr>
+            <p:ph type="subTitle" idx="1"/>
+          </p:nvPr>
+        </p:nvSpPr>
+        <p:spPr>
+          <a:xfrm rot="21420000">
+            <a:off x="983062" y="3505209"/>
+            <a:ext cx="9755187" cy="550333"/>
+          </a:xfrm>
+        </p:spPr>
+        <p:txBody>
+          <a:bodyPr anchor="t">
+            <a:noAutofit/>
+          </a:bodyPr>
+          <a:lstStyle>
+            <a:lvl1pPr marL="0" indent="0" algn="r">
+              <a:buNone/>
+              <a:defRPr sz="2800">
+                <a:solidFill>
+                  <a:schemeClr val="bg1">
+                    <a:lumMod val="50000"/>
+                  </a:schemeClr>
+                </a:solidFill>
+              </a:defRPr>
+            </a:lvl1pPr>
+            <a:lvl2pPr marL="457200" indent="0" algn="ctr">
+              <a:buNone/>
+              <a:defRPr sz="2000"/>
+            </a:lvl2pPr>
+            <a:lvl3pPr marL="914400" indent="0" algn="ctr">
+              <a:buNone/>
+              <a:defRPr sz="1800"/>
+            </a:lvl3pPr>
+            <a:lvl4pPr marL="1371600" indent="0" algn="ctr">
+              <a:buNone/>
+              <a:defRPr sz="1600"/>
+            </a:lvl4pPr>
+            <a:lvl5pPr marL="1828800" indent="0" algn="ctr">
+              <a:buNone/>
+              <a:defRPr sz="1600"/>
+            </a:lvl5pPr>
+            <a:lvl6pPr marL="2286000" indent="0" algn="ctr">
+              <a:buNone/>
+              <a:defRPr sz="1600"/>
+            </a:lvl6pPr>
+            <a:lvl7pPr marL="2743200" indent="0" algn="ctr">
+              <a:buNone/>
+              <a:defRPr sz="1600"/>
+            </a:lvl7pPr>
+            <a:lvl8pPr marL="3200400" indent="0" algn="ctr">
+              <a:buNone/>
+              <a:defRPr sz="1600"/>
+            </a:lvl8pPr>
+            <a:lvl9pPr marL="3657600" indent="0" algn="ctr">
+              <a:buNone/>
+              <a:defRPr sz="1600"/>
+            </a:lvl9pPr>
+          </a:lstStyle>
+          <a:p>
+            <a:r>
+              <a:rPr lang="en-US"/>
+              <a:t>Click to edit Master subtitle style</a:t>
+            </a:r>
+            <a:endParaRPr lang="en-US" dirty="0"/>
+          </a:p>
+        </p:txBody>
+      </p:sp>
+      <p:sp>
+        <p:nvSpPr>
+          <p:cNvPr id="4" name="Date Placeholder 3"/>
+          <p:cNvSpPr>
+            <a:spLocks noGrp="1"/>
+          </p:cNvSpPr>
+          <p:nvPr>
+            <p:ph type="dt" sz="half" idx="10"/>
+          </p:nvPr>
+        </p:nvSpPr>
+        <p:spPr>
+          <a:xfrm rot="21420000">
+            <a:off x="4948541" y="4578463"/>
+            <a:ext cx="6143653" cy="1163112"/>
+          </a:xfrm>
+        </p:spPr>
+        <p:txBody>
+          <a:bodyPr/>
+          <a:lstStyle>
+            <a:lvl1pPr algn="ctr">
+              <a:defRPr sz="5400">
+                <a:solidFill>
+                  <a:schemeClr val="accent1">
+                    <a:lumMod val="50000"/>
+                  </a:schemeClr>
+                </a:solidFill>
+              </a:defRPr>
+            </a:lvl1pPr>
+          </a:lstStyle>
+          <a:p>
+            <a:fld id="{F7AFFB9B-9FB8-469E-96F9-4D32314110B6}" type="datetimeFigureOut">
+              <a:rPr lang="en-US" dirty="0"/>
+              <a:t>6/5/2026</a:t>
+            </a:fld>
+            <a:endParaRPr lang="en-US" dirty="0"/>
+          </a:p>
+        </p:txBody>
+      </p:sp>
+      <p:sp>
+        <p:nvSpPr>
+          <p:cNvPr id="5" name="Footer Placeholder 4"/>
+          <p:cNvSpPr>
+            <a:spLocks noGrp="1"/>
+          </p:cNvSpPr>
+          <p:nvPr>
+            <p:ph type="ftr" sz="quarter" idx="11"/>
+          </p:nvPr>
+        </p:nvSpPr>
+        <p:spPr>
+          <a:xfrm rot="21420000">
+            <a:off x="-5560" y="4883024"/>
+            <a:ext cx="4047239" cy="1195538"/>
+          </a:xfrm>
+        </p:spPr>
+        <p:txBody>
+          <a:bodyPr vert="horz" lIns="91440" tIns="45720" rIns="91440" bIns="45720" rtlCol="0" anchor="ctr"/>
+          <a:lstStyle>
+            <a:lvl1pPr algn="r">
+              <a:defRPr lang="en-US" sz="5400" dirty="0"/>
+            </a:lvl1pPr>
+          </a:lstStyle>
+          <a:p>
+            <a:endParaRPr lang="en-US" dirty="0"/>
+          </a:p>
+        </p:txBody>
+      </p:sp>
+      <p:sp>
+        <p:nvSpPr>
+          <p:cNvPr id="6" name="Slide Number Placeholder 5"/>
+          <p:cNvSpPr>
+            <a:spLocks noGrp="1"/>
+          </p:cNvSpPr>
+          <p:nvPr>
+            <p:ph type="sldNum" sz="quarter" idx="12"/>
+          </p:nvPr>
+        </p:nvSpPr>
+        <p:spPr>
+          <a:xfrm rot="21420000">
+            <a:off x="9851758" y="3832648"/>
+            <a:ext cx="907186" cy="498470"/>
+          </a:xfrm>
+        </p:spPr>
+        <p:txBody>
+          <a:bodyPr/>
+          <a:lstStyle>
+            <a:lvl1pPr>
+              <a:defRPr sz="2400">
+                <a:solidFill>
+                  <a:schemeClr val="tx1">
+                    <a:lumMod val="75000"/>
+                    <a:lumOff val="25000"/>
+                  </a:schemeClr>
+                </a:solidFill>
+              </a:defRPr>
+            </a:lvl1pPr>
+          </a:lstStyle>
+          <a:p>
+            <a:fld id="{6D22F896-40B5-4ADD-8801-0D06FADFA095}" type="slidenum">
+              <a:rPr lang="en-US" dirty="0"/>
+              <a:pPr/>
+              <a:t>‹#›</a:t>
+            </a:fld>
+            <a:endParaRPr lang="en-US" dirty="0"/>
+          </a:p>
+        </p:txBody>
+      </p:sp>
+      <p:sp>
+        <p:nvSpPr>
+          <p:cNvPr id="25" name="5-Point Star 24"/>
+          <p:cNvSpPr/>
+          <p:nvPr/>
+        </p:nvSpPr>
+        <p:spPr>
+          <a:xfrm rot="21420000">
+            <a:off x="4221385" y="5111356"/>
+            <a:ext cx="515386" cy="515386"/>
+          </a:xfrm>
+          <a:prstGeom prst="star5">
+            <a:avLst>
+              <a:gd name="adj" fmla="val 26693"/>
+              <a:gd name="hf" fmla="val 105146"/>
+              <a:gd name="vf" fmla="val 110557"/>
+            </a:avLst>
+          </a:prstGeom>
+          <a:solidFill>
+            <a:schemeClr val="tx1">
+              <a:alpha val="40000"/>
+            </a:schemeClr>
+          </a:solidFill>
+          <a:ln>
+            <a:noFill/>
+          </a:ln>
+        </p:spPr>
+        <p:style>
+          <a:lnRef idx="1">
+            <a:schemeClr val="accent1"/>
+          </a:lnRef>
+          <a:fillRef idx="3">
+            <a:schemeClr val="accent1"/>
+          </a:fillRef>
+          <a:effectRef idx="2">
+            <a:schemeClr val="accent1"/>
+          </a:effectRef>
+          <a:fontRef idx="minor">
+            <a:schemeClr val="lt1"/>
+          </a:fontRef>
+        </p:style>
+      </p:sp>
+    </p:spTree>
+    <p:extLst>
+      <p:ext uri="{BB962C8B-B14F-4D97-AF65-F5344CB8AC3E}">
+        <p14:creationId xmlns:p14="http://schemas.microsoft.com/office/powerpoint/2010/main" val="863372627"/>
+      </p:ext>
+    </p:extLst>
+  </p:cSld>
+  <p:clrMapOvr>
+    <a:masterClrMapping/>
+  </p:clrMapOvr>
+</p:sldLayout>
+</file>
+
+<file path=ppt/slideLayouts/slideLayout10.xml><?xml version="1.0" encoding="utf-8"?>
+<p:sldLayout xmlns:a="http://schemas.openxmlformats.org/drawingml/2006/main" xmlns:r="http://schemas.openxmlformats.org/officeDocument/2006/relationships" xmlns:p="http://schemas.openxmlformats.org/presentationml/2006/main" preserve="1">
+  <p:cSld name="Panoramic Picture with Caption">
+    <p:spTree>
+      <p:nvGrpSpPr>
+        <p:cNvPr id="1" name=""/>
+        <p:cNvGrpSpPr/>
+        <p:nvPr/>
+      </p:nvGrpSpPr>
+      <p:grpSpPr>
+        <a:xfrm>
+          <a:off x="0" y="0"/>
+          <a:ext cx="0" cy="0"/>
+          <a:chOff x="0" y="0"/>
+          <a:chExt cx="0" cy="0"/>
+        </a:xfrm>
+      </p:grpSpPr>
+      <p:sp>
+        <p:nvSpPr>
+          <p:cNvPr id="2" name="Title 1"/>
+          <p:cNvSpPr>
+            <a:spLocks noGrp="1"/>
+          </p:cNvSpPr>
+          <p:nvPr>
+            <p:ph type="title"/>
+          </p:nvPr>
+        </p:nvSpPr>
+        <p:spPr>
+          <a:xfrm>
+            <a:off x="685800" y="4106333"/>
+            <a:ext cx="10394708" cy="588846"/>
+          </a:xfrm>
+        </p:spPr>
+        <p:txBody>
+          <a:bodyPr anchor="b"/>
+          <a:lstStyle>
+            <a:lvl1pPr>
+              <a:defRPr sz="3200"/>
+            </a:lvl1pPr>
+          </a:lstStyle>
+          <a:p>
+            <a:r>
+              <a:rPr lang="en-US"/>
+              <a:t>Click to edit Master title style</a:t>
+            </a:r>
+            <a:endParaRPr lang="en-US" dirty="0"/>
+          </a:p>
+        </p:txBody>
+      </p:sp>
+      <p:sp>
+        <p:nvSpPr>
+          <p:cNvPr id="3" name="Picture Placeholder 2"/>
+          <p:cNvSpPr>
+            <a:spLocks noGrp="1" noChangeAspect="1"/>
+          </p:cNvSpPr>
+          <p:nvPr>
+            <p:ph type="pic" idx="1"/>
+          </p:nvPr>
+        </p:nvSpPr>
+        <p:spPr>
+          <a:xfrm>
+            <a:off x="685801" y="685799"/>
+            <a:ext cx="10392513" cy="3194903"/>
+          </a:xfrm>
+          <a:ln w="57150" cmpd="thinThick">
+            <a:solidFill>
+              <a:schemeClr val="bg1">
+                <a:lumMod val="50000"/>
+              </a:schemeClr>
+            </a:solidFill>
+            <a:miter lim="800000"/>
+          </a:ln>
+        </p:spPr>
+        <p:txBody>
+          <a:bodyPr anchor="t"/>
+          <a:lstStyle>
+            <a:lvl1pPr marL="0" indent="0" algn="ctr">
+              <a:buNone/>
+              <a:defRPr sz="3200"/>
+            </a:lvl1pPr>
+            <a:lvl2pPr marL="457200" indent="0">
+              <a:buNone/>
+              <a:defRPr sz="2800"/>
+            </a:lvl2pPr>
+            <a:lvl3pPr marL="914400" indent="0">
+              <a:buNone/>
+              <a:defRPr sz="2400"/>
+            </a:lvl3pPr>
+            <a:lvl4pPr marL="1371600" indent="0">
+              <a:buNone/>
+              <a:defRPr sz="2000"/>
+            </a:lvl4pPr>
+            <a:lvl5pPr marL="1828800" indent="0">
+              <a:buNone/>
+              <a:defRPr sz="2000"/>
+            </a:lvl5pPr>
+            <a:lvl6pPr marL="2286000" indent="0">
+              <a:buNone/>
+              <a:defRPr sz="2000"/>
+            </a:lvl6pPr>
+            <a:lvl7pPr marL="2743200" indent="0">
+              <a:buNone/>
+              <a:defRPr sz="2000"/>
+            </a:lvl7pPr>
+            <a:lvl8pPr marL="3200400" indent="0">
+              <a:buNone/>
+              <a:defRPr sz="2000"/>
+            </a:lvl8pPr>
+            <a:lvl9pPr marL="3657600" indent="0">
+              <a:buNone/>
+              <a:defRPr sz="2000"/>
+            </a:lvl9pPr>
+          </a:lstStyle>
+          <a:p>
+            <a:r>
+              <a:rPr lang="en-US"/>
+              <a:t>Click icon to add picture</a:t>
+            </a:r>
+            <a:endParaRPr lang="en-US" dirty="0"/>
+          </a:p>
+        </p:txBody>
+      </p:sp>
+      <p:sp>
+        <p:nvSpPr>
+          <p:cNvPr id="4" name="Text Placeholder 3"/>
+          <p:cNvSpPr>
+            <a:spLocks noGrp="1"/>
+          </p:cNvSpPr>
+          <p:nvPr>
+            <p:ph type="body" sz="half" idx="2"/>
+          </p:nvPr>
+        </p:nvSpPr>
+        <p:spPr>
+          <a:xfrm>
+            <a:off x="685780" y="4702923"/>
+            <a:ext cx="10394728" cy="682472"/>
+          </a:xfrm>
+        </p:spPr>
+        <p:txBody>
+          <a:bodyPr anchor="t"/>
+          <a:lstStyle>
+            <a:lvl1pPr marL="0" indent="0" algn="l">
+              <a:buNone/>
+              <a:defRPr sz="1600"/>
+            </a:lvl1pPr>
+            <a:lvl2pPr marL="457200" indent="0">
+              <a:buNone/>
+              <a:defRPr sz="1400"/>
+            </a:lvl2pPr>
+            <a:lvl3pPr marL="914400" indent="0">
+              <a:buNone/>
+              <a:defRPr sz="1200"/>
+            </a:lvl3pPr>
+            <a:lvl4pPr marL="1371600" indent="0">
+              <a:buNone/>
+              <a:defRPr sz="1000"/>
+            </a:lvl4pPr>
+            <a:lvl5pPr marL="1828800" indent="0">
+              <a:buNone/>
+              <a:defRPr sz="1000"/>
+            </a:lvl5pPr>
+            <a:lvl6pPr marL="2286000" indent="0">
+              <a:buNone/>
+              <a:defRPr sz="1000"/>
+            </a:lvl6pPr>
+            <a:lvl7pPr marL="2743200" indent="0">
+              <a:buNone/>
+              <a:defRPr sz="1000"/>
+            </a:lvl7pPr>
+            <a:lvl8pPr marL="3200400" indent="0">
+              <a:buNone/>
+              <a:defRPr sz="1000"/>
+            </a:lvl8pPr>
+            <a:lvl9pPr marL="3657600" indent="0">
+              <a:buNone/>
+              <a:defRPr sz="1000"/>
+            </a:lvl9pPr>
+          </a:lstStyle>
+          <a:p>
+            <a:pPr lvl="0"/>
+            <a:r>
+              <a:rPr lang="en-US"/>
+              <a:t>Click to edit Master text styles</a:t>
+            </a:r>
+          </a:p>
+        </p:txBody>
+      </p:sp>
+      <p:sp>
+        <p:nvSpPr>
+          <p:cNvPr id="5" name="Date Placeholder 4"/>
+          <p:cNvSpPr>
+            <a:spLocks noGrp="1"/>
+          </p:cNvSpPr>
+          <p:nvPr>
+            <p:ph type="dt" sz="half" idx="10"/>
+          </p:nvPr>
+        </p:nvSpPr>
+        <p:spPr/>
+        <p:txBody>
+          <a:bodyPr/>
+          <a:lstStyle/>
+          <a:p>
+            <a:fld id="{341D2AC3-6A0B-4169-B1EA-E3AE8B351BDD}" type="datetimeFigureOut">
+              <a:rPr lang="en-US" dirty="0"/>
+              <a:t>6/5/2026</a:t>
+            </a:fld>
+            <a:endParaRPr lang="en-US" dirty="0"/>
+          </a:p>
+        </p:txBody>
+      </p:sp>
+      <p:sp>
+        <p:nvSpPr>
+          <p:cNvPr id="6" name="Footer Placeholder 5"/>
+          <p:cNvSpPr>
+            <a:spLocks noGrp="1"/>
+          </p:cNvSpPr>
+          <p:nvPr>
+            <p:ph type="ftr" sz="quarter" idx="11"/>
+          </p:nvPr>
+        </p:nvSpPr>
+        <p:spPr/>
+        <p:txBody>
+          <a:bodyPr/>
+          <a:lstStyle/>
+          <a:p>
+            <a:endParaRPr lang="en-US" dirty="0"/>
+          </a:p>
+        </p:txBody>
+      </p:sp>
+      <p:sp>
+        <p:nvSpPr>
+          <p:cNvPr id="7" name="Slide Number Placeholder 6"/>
+          <p:cNvSpPr>
+            <a:spLocks noGrp="1"/>
+          </p:cNvSpPr>
+          <p:nvPr>
+            <p:ph type="sldNum" sz="quarter" idx="12"/>
+          </p:nvPr>
+        </p:nvSpPr>
+        <p:spPr/>
+        <p:txBody>
+          <a:bodyPr/>
+          <a:lstStyle/>
+          <a:p>
+            <a:fld id="{6D22F896-40B5-4ADD-8801-0D06FADFA095}" type="slidenum">
+              <a:rPr lang="en-US" dirty="0"/>
+              <a:t>‹#›</a:t>
+            </a:fld>
+            <a:endParaRPr lang="en-US" dirty="0"/>
+          </a:p>
+        </p:txBody>
+      </p:sp>
+    </p:spTree>
+    <p:extLst>
+      <p:ext uri="{BB962C8B-B14F-4D97-AF65-F5344CB8AC3E}">
+        <p14:creationId xmlns:p14="http://schemas.microsoft.com/office/powerpoint/2010/main" val="1676413113"/>
+      </p:ext>
+    </p:extLst>
+  </p:cSld>
+  <p:clrMapOvr>
+    <a:masterClrMapping/>
+  </p:clrMapOvr>
+</p:sldLayout>
+</file>
+
+<file path=ppt/slideLayouts/slideLayout11.xml><?xml version="1.0" encoding="utf-8"?>
+<p:sldLayout xmlns:a="http://schemas.openxmlformats.org/drawingml/2006/main" xmlns:r="http://schemas.openxmlformats.org/officeDocument/2006/relationships" xmlns:p="http://schemas.openxmlformats.org/presentationml/2006/main" preserve="1">
+  <p:cSld name="Title and Caption">
+    <p:spTree>
+      <p:nvGrpSpPr>
+        <p:cNvPr id="1" name=""/>
+        <p:cNvGrpSpPr/>
+        <p:nvPr/>
+      </p:nvGrpSpPr>
+      <p:grpSpPr>
+        <a:xfrm>
+          <a:off x="0" y="0"/>
+          <a:ext cx="0" cy="0"/>
+          <a:chOff x="0" y="0"/>
+          <a:chExt cx="0" cy="0"/>
+        </a:xfrm>
+      </p:grpSpPr>
+      <p:sp>
+        <p:nvSpPr>
+          <p:cNvPr id="2" name="Title 1"/>
+          <p:cNvSpPr>
+            <a:spLocks noGrp="1"/>
+          </p:cNvSpPr>
+          <p:nvPr>
+            <p:ph type="title"/>
+          </p:nvPr>
+        </p:nvSpPr>
+        <p:spPr>
+          <a:xfrm>
+            <a:off x="685801" y="685800"/>
+            <a:ext cx="10396902" cy="3194903"/>
+          </a:xfrm>
+        </p:spPr>
+        <p:txBody>
+          <a:bodyPr anchor="ctr">
+            <a:normAutofit/>
+          </a:bodyPr>
+          <a:lstStyle>
+            <a:lvl1pPr algn="ctr">
+              <a:defRPr sz="4800"/>
+            </a:lvl1pPr>
+          </a:lstStyle>
+          <a:p>
+            <a:r>
+              <a:rPr lang="en-US"/>
+              <a:t>Click to edit Master title style</a:t>
+            </a:r>
+            <a:endParaRPr lang="en-US" dirty="0"/>
+          </a:p>
+        </p:txBody>
+      </p:sp>
+      <p:sp>
+        <p:nvSpPr>
+          <p:cNvPr id="4" name="Text Placeholder 3"/>
+          <p:cNvSpPr>
+            <a:spLocks noGrp="1"/>
+          </p:cNvSpPr>
+          <p:nvPr>
+            <p:ph type="body" sz="half" idx="2"/>
+          </p:nvPr>
+        </p:nvSpPr>
+        <p:spPr>
+          <a:xfrm>
+            <a:off x="685779" y="4106333"/>
+            <a:ext cx="10394729" cy="1273606"/>
+          </a:xfrm>
+        </p:spPr>
+        <p:txBody>
+          <a:bodyPr anchor="ctr">
+            <a:normAutofit/>
+          </a:bodyPr>
+          <a:lstStyle>
+            <a:lvl1pPr marL="0" indent="0" algn="ctr">
+              <a:buNone/>
+              <a:defRPr sz="1800"/>
+            </a:lvl1pPr>
+            <a:lvl2pPr marL="457200" indent="0">
+              <a:buNone/>
+              <a:defRPr sz="1400"/>
+            </a:lvl2pPr>
+            <a:lvl3pPr marL="914400" indent="0">
+              <a:buNone/>
+              <a:defRPr sz="1200"/>
+            </a:lvl3pPr>
+            <a:lvl4pPr marL="1371600" indent="0">
+              <a:buNone/>
+              <a:defRPr sz="1000"/>
+            </a:lvl4pPr>
+            <a:lvl5pPr marL="1828800" indent="0">
+              <a:buNone/>
+              <a:defRPr sz="1000"/>
+            </a:lvl5pPr>
+            <a:lvl6pPr marL="2286000" indent="0">
+              <a:buNone/>
+              <a:defRPr sz="1000"/>
+            </a:lvl6pPr>
+            <a:lvl7pPr marL="2743200" indent="0">
+              <a:buNone/>
+              <a:defRPr sz="1000"/>
+            </a:lvl7pPr>
+            <a:lvl8pPr marL="3200400" indent="0">
+              <a:buNone/>
+              <a:defRPr sz="1000"/>
+            </a:lvl8pPr>
+            <a:lvl9pPr marL="3657600" indent="0">
+              <a:buNone/>
+              <a:defRPr sz="1000"/>
+            </a:lvl9pPr>
+          </a:lstStyle>
+          <a:p>
+            <a:pPr lvl="0"/>
+            <a:r>
+              <a:rPr lang="en-US"/>
+              <a:t>Click to edit Master text styles</a:t>
+            </a:r>
+          </a:p>
+        </p:txBody>
+      </p:sp>
+      <p:sp>
+        <p:nvSpPr>
+          <p:cNvPr id="5" name="Date Placeholder 4"/>
+          <p:cNvSpPr>
+            <a:spLocks noGrp="1"/>
+          </p:cNvSpPr>
+          <p:nvPr>
+            <p:ph type="dt" sz="half" idx="10"/>
+          </p:nvPr>
+        </p:nvSpPr>
+        <p:spPr/>
+        <p:txBody>
+          <a:bodyPr/>
+          <a:lstStyle/>
+          <a:p>
+            <a:fld id="{DD4B9363-8B87-41B7-9F8E-64519CBB8F34}" type="datetimeFigureOut">
+              <a:rPr lang="en-US" dirty="0"/>
+              <a:t>6/5/2026</a:t>
+            </a:fld>
+            <a:endParaRPr lang="en-US" dirty="0"/>
+          </a:p>
+        </p:txBody>
+      </p:sp>
+      <p:sp>
+        <p:nvSpPr>
+          <p:cNvPr id="6" name="Footer Placeholder 5"/>
+          <p:cNvSpPr>
+            <a:spLocks noGrp="1"/>
+          </p:cNvSpPr>
+          <p:nvPr>
+            <p:ph type="ftr" sz="quarter" idx="11"/>
+          </p:nvPr>
+        </p:nvSpPr>
+        <p:spPr/>
+        <p:txBody>
+          <a:bodyPr/>
+          <a:lstStyle/>
+          <a:p>
+            <a:endParaRPr lang="en-US" dirty="0"/>
+          </a:p>
+        </p:txBody>
+      </p:sp>
+      <p:sp>
+        <p:nvSpPr>
+          <p:cNvPr id="7" name="Slide Number Placeholder 6"/>
+          <p:cNvSpPr>
+            <a:spLocks noGrp="1"/>
+          </p:cNvSpPr>
+          <p:nvPr>
+            <p:ph type="sldNum" sz="quarter" idx="12"/>
+          </p:nvPr>
+        </p:nvSpPr>
+        <p:spPr/>
+        <p:txBody>
+          <a:bodyPr/>
+          <a:lstStyle/>
+          <a:p>
+            <a:fld id="{6D22F896-40B5-4ADD-8801-0D06FADFA095}" type="slidenum">
+              <a:rPr lang="en-US" dirty="0"/>
+              <a:t>‹#›</a:t>
+            </a:fld>
+            <a:endParaRPr lang="en-US" dirty="0"/>
+          </a:p>
+        </p:txBody>
+      </p:sp>
+    </p:spTree>
+    <p:extLst>
+      <p:ext uri="{BB962C8B-B14F-4D97-AF65-F5344CB8AC3E}">
+        <p14:creationId xmlns:p14="http://schemas.microsoft.com/office/powerpoint/2010/main" val="1770895290"/>
+      </p:ext>
+    </p:extLst>
+  </p:cSld>
+  <p:clrMapOvr>
+    <a:masterClrMapping/>
+  </p:clrMapOvr>
+</p:sldLayout>
+</file>
+
+<file path=ppt/slideLayouts/slideLayout12.xml><?xml version="1.0" encoding="utf-8"?>
+<p:sldLayout xmlns:a="http://schemas.openxmlformats.org/drawingml/2006/main" xmlns:r="http://schemas.openxmlformats.org/officeDocument/2006/relationships" xmlns:p="http://schemas.openxmlformats.org/presentationml/2006/main" preserve="1">
+  <p:cSld name="Quote with Caption">
+    <p:spTree>
+      <p:nvGrpSpPr>
+        <p:cNvPr id="1" name=""/>
+        <p:cNvGrpSpPr/>
+        <p:nvPr/>
+      </p:nvGrpSpPr>
+      <p:grpSpPr>
+        <a:xfrm>
+          <a:off x="0" y="0"/>
+          <a:ext cx="0" cy="0"/>
+          <a:chOff x="0" y="0"/>
+          <a:chExt cx="0" cy="0"/>
+        </a:xfrm>
+      </p:grpSpPr>
+      <p:sp>
+        <p:nvSpPr>
+          <p:cNvPr id="2" name="Title 1"/>
+          <p:cNvSpPr>
+            <a:spLocks noGrp="1"/>
+          </p:cNvSpPr>
+          <p:nvPr>
+            <p:ph type="title"/>
+          </p:nvPr>
+        </p:nvSpPr>
+        <p:spPr>
+          <a:xfrm>
+            <a:off x="1121732" y="685800"/>
+            <a:ext cx="9525020" cy="2916704"/>
+          </a:xfrm>
+        </p:spPr>
+        <p:txBody>
+          <a:bodyPr anchor="ctr">
+            <a:normAutofit/>
+          </a:bodyPr>
+          <a:lstStyle>
+            <a:lvl1pPr algn="ctr">
+              <a:defRPr sz="4800"/>
+            </a:lvl1pPr>
+          </a:lstStyle>
+          <a:p>
+            <a:r>
+              <a:rPr lang="en-US"/>
+              <a:t>Click to edit Master title style</a:t>
+            </a:r>
+            <a:endParaRPr lang="en-US" dirty="0"/>
+          </a:p>
+        </p:txBody>
+      </p:sp>
+      <p:sp>
+        <p:nvSpPr>
+          <p:cNvPr id="12" name="Text Placeholder 3"/>
+          <p:cNvSpPr>
+            <a:spLocks noGrp="1"/>
+          </p:cNvSpPr>
+          <p:nvPr>
+            <p:ph type="body" sz="half" idx="13"/>
+          </p:nvPr>
+        </p:nvSpPr>
+        <p:spPr>
+          <a:xfrm>
+            <a:off x="1550264" y="3610032"/>
+            <a:ext cx="8667956" cy="377768"/>
+          </a:xfrm>
+        </p:spPr>
+        <p:txBody>
+          <a:bodyPr anchor="t">
+            <a:normAutofit/>
+          </a:bodyPr>
+          <a:lstStyle>
+            <a:lvl1pPr marL="0" indent="0" algn="r">
+              <a:buNone/>
+              <a:defRPr sz="1400">
+                <a:solidFill>
+                  <a:schemeClr val="tx1">
+                    <a:lumMod val="50000"/>
+                    <a:lumOff val="50000"/>
+                  </a:schemeClr>
+                </a:solidFill>
+              </a:defRPr>
+            </a:lvl1pPr>
+            <a:lvl2pPr marL="457200" indent="0">
+              <a:buNone/>
+              <a:defRPr sz="1400"/>
+            </a:lvl2pPr>
+            <a:lvl3pPr marL="914400" indent="0">
+              <a:buNone/>
+              <a:defRPr sz="1200"/>
+            </a:lvl3pPr>
+            <a:lvl4pPr marL="1371600" indent="0">
+              <a:buNone/>
+              <a:defRPr sz="1000"/>
+            </a:lvl4pPr>
+            <a:lvl5pPr marL="1828800" indent="0">
+              <a:buNone/>
+              <a:defRPr sz="1000"/>
+            </a:lvl5pPr>
+            <a:lvl6pPr marL="2286000" indent="0">
+              <a:buNone/>
+              <a:defRPr sz="1000"/>
+            </a:lvl6pPr>
+            <a:lvl7pPr marL="2743200" indent="0">
+              <a:buNone/>
+              <a:defRPr sz="1000"/>
+            </a:lvl7pPr>
+            <a:lvl8pPr marL="3200400" indent="0">
+              <a:buNone/>
+              <a:defRPr sz="1000"/>
+            </a:lvl8pPr>
+            <a:lvl9pPr marL="3657600" indent="0">
+              <a:buNone/>
+              <a:defRPr sz="1000"/>
+            </a:lvl9pPr>
+          </a:lstStyle>
+          <a:p>
+            <a:pPr lvl="0"/>
+            <a:r>
+              <a:rPr lang="en-US"/>
+              <a:t>Click to edit Master text styles</a:t>
+            </a:r>
+          </a:p>
+        </p:txBody>
+      </p:sp>
+      <p:sp>
+        <p:nvSpPr>
+          <p:cNvPr id="4" name="Text Placeholder 3"/>
+          <p:cNvSpPr>
+            <a:spLocks noGrp="1"/>
+          </p:cNvSpPr>
+          <p:nvPr>
+            <p:ph type="body" sz="half" idx="2"/>
+          </p:nvPr>
+        </p:nvSpPr>
+        <p:spPr>
+          <a:xfrm>
+            <a:off x="685801" y="4106334"/>
+            <a:ext cx="10396882" cy="1268252"/>
+          </a:xfrm>
+        </p:spPr>
+        <p:txBody>
+          <a:bodyPr anchor="ctr">
+            <a:normAutofit/>
+          </a:bodyPr>
+          <a:lstStyle>
+            <a:lvl1pPr marL="0" indent="0" algn="ctr">
+              <a:buNone/>
+              <a:defRPr sz="1800"/>
+            </a:lvl1pPr>
+            <a:lvl2pPr marL="457200" indent="0">
+              <a:buNone/>
+              <a:defRPr sz="1400"/>
+            </a:lvl2pPr>
+            <a:lvl3pPr marL="914400" indent="0">
+              <a:buNone/>
+              <a:defRPr sz="1200"/>
+            </a:lvl3pPr>
+            <a:lvl4pPr marL="1371600" indent="0">
+              <a:buNone/>
+              <a:defRPr sz="1000"/>
+            </a:lvl4pPr>
+            <a:lvl5pPr marL="1828800" indent="0">
+              <a:buNone/>
+              <a:defRPr sz="1000"/>
+            </a:lvl5pPr>
+            <a:lvl6pPr marL="2286000" indent="0">
+              <a:buNone/>
+              <a:defRPr sz="1000"/>
+            </a:lvl6pPr>
+            <a:lvl7pPr marL="2743200" indent="0">
+              <a:buNone/>
+              <a:defRPr sz="1000"/>
+            </a:lvl7pPr>
+            <a:lvl8pPr marL="3200400" indent="0">
+              <a:buNone/>
+              <a:defRPr sz="1000"/>
+            </a:lvl8pPr>
+            <a:lvl9pPr marL="3657600" indent="0">
+              <a:buNone/>
+              <a:defRPr sz="1000"/>
+            </a:lvl9pPr>
+          </a:lstStyle>
+          <a:p>
+            <a:pPr lvl="0"/>
+            <a:r>
+              <a:rPr lang="en-US"/>
+              <a:t>Click to edit Master text styles</a:t>
+            </a:r>
+          </a:p>
+        </p:txBody>
+      </p:sp>
+      <p:sp>
+        <p:nvSpPr>
+          <p:cNvPr id="5" name="Date Placeholder 4"/>
+          <p:cNvSpPr>
+            <a:spLocks noGrp="1"/>
+          </p:cNvSpPr>
+          <p:nvPr>
+            <p:ph type="dt" sz="half" idx="10"/>
+          </p:nvPr>
+        </p:nvSpPr>
+        <p:spPr/>
+        <p:txBody>
+          <a:bodyPr/>
+          <a:lstStyle/>
+          <a:p>
+            <a:fld id="{EAEF5746-5284-4951-9F37-7AE924EDBCB7}" type="datetimeFigureOut">
+              <a:rPr lang="en-US" dirty="0"/>
+              <a:t>6/5/2026</a:t>
+            </a:fld>
+            <a:endParaRPr lang="en-US" dirty="0"/>
+          </a:p>
+        </p:txBody>
+      </p:sp>
+      <p:sp>
+        <p:nvSpPr>
+          <p:cNvPr id="6" name="Footer Placeholder 5"/>
+          <p:cNvSpPr>
+            <a:spLocks noGrp="1"/>
+          </p:cNvSpPr>
+          <p:nvPr>
+            <p:ph type="ftr" sz="quarter" idx="11"/>
+          </p:nvPr>
+        </p:nvSpPr>
+        <p:spPr/>
+        <p:txBody>
+          <a:bodyPr/>
+          <a:lstStyle/>
+          <a:p>
+            <a:endParaRPr lang="en-US" dirty="0"/>
+          </a:p>
+        </p:txBody>
+      </p:sp>
+      <p:sp>
+        <p:nvSpPr>
+          <p:cNvPr id="7" name="Slide Number Placeholder 6"/>
+          <p:cNvSpPr>
+            <a:spLocks noGrp="1"/>
+          </p:cNvSpPr>
+          <p:nvPr>
+            <p:ph type="sldNum" sz="quarter" idx="12"/>
+          </p:nvPr>
+        </p:nvSpPr>
+        <p:spPr/>
+        <p:txBody>
+          <a:bodyPr/>
+          <a:lstStyle/>
+          <a:p>
+            <a:fld id="{6D22F896-40B5-4ADD-8801-0D06FADFA095}" type="slidenum">
+              <a:rPr lang="en-US" dirty="0"/>
+              <a:t>‹#›</a:t>
+            </a:fld>
+            <a:endParaRPr lang="en-US" dirty="0"/>
+          </a:p>
+        </p:txBody>
+      </p:sp>
+      <p:sp>
+        <p:nvSpPr>
+          <p:cNvPr id="13" name="TextBox 12"/>
+          <p:cNvSpPr txBox="1"/>
+          <p:nvPr/>
+        </p:nvSpPr>
+        <p:spPr>
+          <a:xfrm>
+            <a:off x="685801" y="892628"/>
+            <a:ext cx="609600" cy="584776"/>
+          </a:xfrm>
+          <a:prstGeom prst="rect">
+            <a:avLst/>
+          </a:prstGeom>
+        </p:spPr>
+        <p:txBody>
+          <a:bodyPr vert="horz" lIns="91440" tIns="45720" rIns="91440" bIns="45720" rtlCol="0" anchor="ctr">
+            <a:noAutofit/>
+          </a:bodyPr>
+          <a:lstStyle>
+            <a:lvl1pPr>
+              <a:spcBef>
+                <a:spcPct val="0"/>
+              </a:spcBef>
+              <a:buNone/>
+              <a:defRPr sz="3200" b="0" cap="all">
+                <a:ln w="3175" cmpd="sng">
+                  <a:noFill/>
+                </a:ln>
+                <a:effectLst>
+                  <a:glow rad="38100">
+                    <a:schemeClr val="bg1">
+                      <a:lumMod val="65000"/>
+                      <a:lumOff val="35000"/>
+                      <a:alpha val="40000"/>
+                    </a:schemeClr>
+                  </a:glow>
+                  <a:outerShdw blurRad="28575" dist="38100" dir="14040000" algn="tl" rotWithShape="0">
+                    <a:srgbClr val="000000">
+                      <a:alpha val="25000"/>
+                    </a:srgbClr>
+                  </a:outerShdw>
+                </a:effectLst>
+              </a:defRPr>
+            </a:lvl1pPr>
+            <a:lvl2pPr>
+              <a:defRPr>
+                <a:solidFill>
+                  <a:schemeClr val="tx2"/>
+                </a:solidFill>
+              </a:defRPr>
+            </a:lvl2pPr>
+            <a:lvl3pPr>
+              <a:defRPr>
+                <a:solidFill>
+                  <a:schemeClr val="tx2"/>
+                </a:solidFill>
+              </a:defRPr>
+            </a:lvl3pPr>
+            <a:lvl4pPr>
+              <a:defRPr>
+                <a:solidFill>
+                  <a:schemeClr val="tx2"/>
+                </a:solidFill>
+              </a:defRPr>
+            </a:lvl4pPr>
+            <a:lvl5pPr>
+              <a:defRPr>
+                <a:solidFill>
+                  <a:schemeClr val="tx2"/>
+                </a:solidFill>
+              </a:defRPr>
+            </a:lvl5pPr>
+            <a:lvl6pPr>
+              <a:defRPr>
+                <a:solidFill>
+                  <a:schemeClr val="tx2"/>
+                </a:solidFill>
+              </a:defRPr>
+            </a:lvl6pPr>
+            <a:lvl7pPr>
+              <a:defRPr>
+                <a:solidFill>
+                  <a:schemeClr val="tx2"/>
+                </a:solidFill>
+              </a:defRPr>
+            </a:lvl7pPr>
+            <a:lvl8pPr>
+              <a:defRPr>
+                <a:solidFill>
+                  <a:schemeClr val="tx2"/>
+                </a:solidFill>
+              </a:defRPr>
+            </a:lvl8pPr>
+            <a:lvl9pPr>
+              <a:defRPr>
+                <a:solidFill>
+                  <a:schemeClr val="tx2"/>
+                </a:solidFill>
+              </a:defRPr>
+            </a:lvl9pPr>
+          </a:lstStyle>
+          <a:p>
+            <a:pPr lvl="0"/>
+            <a:r>
+              <a:rPr lang="en-US" sz="8000" dirty="0">
+                <a:solidFill>
+                  <a:schemeClr val="tx1"/>
+                </a:solidFill>
+                <a:effectLst/>
+              </a:rPr>
+              <a:t>“</a:t>
+            </a:r>
+          </a:p>
+        </p:txBody>
+      </p:sp>
+      <p:sp>
+        <p:nvSpPr>
+          <p:cNvPr id="14" name="TextBox 13"/>
+          <p:cNvSpPr txBox="1"/>
+          <p:nvPr/>
+        </p:nvSpPr>
+        <p:spPr>
+          <a:xfrm>
+            <a:off x="10473083" y="2922827"/>
+            <a:ext cx="609600" cy="584776"/>
+          </a:xfrm>
+          <a:prstGeom prst="rect">
+            <a:avLst/>
+          </a:prstGeom>
+        </p:spPr>
+        <p:txBody>
+          <a:bodyPr vert="horz" lIns="91440" tIns="45720" rIns="91440" bIns="45720" rtlCol="0" anchor="ctr">
+            <a:noAutofit/>
+          </a:bodyPr>
+          <a:lstStyle>
+            <a:lvl1pPr>
+              <a:spcBef>
+                <a:spcPct val="0"/>
+              </a:spcBef>
+              <a:buNone/>
+              <a:defRPr sz="3200" b="0" cap="all">
+                <a:ln w="3175" cmpd="sng">
+                  <a:noFill/>
+                </a:ln>
+                <a:effectLst>
+                  <a:glow rad="38100">
+                    <a:schemeClr val="bg1">
+                      <a:lumMod val="65000"/>
+                      <a:lumOff val="35000"/>
+                      <a:alpha val="40000"/>
+                    </a:schemeClr>
+                  </a:glow>
+                  <a:outerShdw blurRad="28575" dist="38100" dir="14040000" algn="tl" rotWithShape="0">
+                    <a:srgbClr val="000000">
+                      <a:alpha val="25000"/>
+                    </a:srgbClr>
+                  </a:outerShdw>
+                </a:effectLst>
+              </a:defRPr>
+            </a:lvl1pPr>
+            <a:lvl2pPr>
+              <a:defRPr>
+                <a:solidFill>
+                  <a:schemeClr val="tx2"/>
+                </a:solidFill>
+              </a:defRPr>
+            </a:lvl2pPr>
+            <a:lvl3pPr>
+              <a:defRPr>
+                <a:solidFill>
+                  <a:schemeClr val="tx2"/>
+                </a:solidFill>
+              </a:defRPr>
+            </a:lvl3pPr>
+            <a:lvl4pPr>
+              <a:defRPr>
+                <a:solidFill>
+                  <a:schemeClr val="tx2"/>
+                </a:solidFill>
+              </a:defRPr>
+            </a:lvl4pPr>
+            <a:lvl5pPr>
+              <a:defRPr>
+                <a:solidFill>
+                  <a:schemeClr val="tx2"/>
+                </a:solidFill>
+              </a:defRPr>
+            </a:lvl5pPr>
+            <a:lvl6pPr>
+              <a:defRPr>
+                <a:solidFill>
+                  <a:schemeClr val="tx2"/>
+                </a:solidFill>
+              </a:defRPr>
+            </a:lvl6pPr>
+            <a:lvl7pPr>
+              <a:defRPr>
+                <a:solidFill>
+                  <a:schemeClr val="tx2"/>
+                </a:solidFill>
+              </a:defRPr>
+            </a:lvl7pPr>
+            <a:lvl8pPr>
+              <a:defRPr>
+                <a:solidFill>
+                  <a:schemeClr val="tx2"/>
+                </a:solidFill>
+              </a:defRPr>
+            </a:lvl8pPr>
+            <a:lvl9pPr>
+              <a:defRPr>
+                <a:solidFill>
+                  <a:schemeClr val="tx2"/>
+                </a:solidFill>
+              </a:defRPr>
+            </a:lvl9pPr>
+          </a:lstStyle>
+          <a:p>
+            <a:pPr lvl="0" algn="r"/>
+            <a:r>
+              <a:rPr lang="en-US" sz="8000" dirty="0">
+                <a:solidFill>
+                  <a:schemeClr val="tx1"/>
+                </a:solidFill>
+                <a:effectLst/>
+              </a:rPr>
+              <a:t>”</a:t>
+            </a:r>
+          </a:p>
+        </p:txBody>
+      </p:sp>
+    </p:spTree>
+    <p:extLst>
+      <p:ext uri="{BB962C8B-B14F-4D97-AF65-F5344CB8AC3E}">
+        <p14:creationId xmlns:p14="http://schemas.microsoft.com/office/powerpoint/2010/main" val="3184317003"/>
+      </p:ext>
+    </p:extLst>
+  </p:cSld>
+  <p:clrMapOvr>
+    <a:masterClrMapping/>
+  </p:clrMapOvr>
+</p:sldLayout>
+</file>
+
+<file path=ppt/slideLayouts/slideLayout13.xml><?xml version="1.0" encoding="utf-8"?>
+<p:sldLayout xmlns:a="http://schemas.openxmlformats.org/drawingml/2006/main" xmlns:r="http://schemas.openxmlformats.org/officeDocument/2006/relationships" xmlns:p="http://schemas.openxmlformats.org/presentationml/2006/main" preserve="1">
+  <p:cSld name="Name Card">
+    <p:spTree>
+      <p:nvGrpSpPr>
+        <p:cNvPr id="1" name=""/>
+        <p:cNvGrpSpPr/>
+        <p:nvPr/>
+      </p:nvGrpSpPr>
+      <p:grpSpPr>
+        <a:xfrm>
+          <a:off x="0" y="0"/>
+          <a:ext cx="0" cy="0"/>
+          <a:chOff x="0" y="0"/>
+          <a:chExt cx="0" cy="0"/>
+        </a:xfrm>
+      </p:grpSpPr>
+      <p:sp>
+        <p:nvSpPr>
+          <p:cNvPr id="2" name="Title 1"/>
+          <p:cNvSpPr>
+            <a:spLocks noGrp="1"/>
+          </p:cNvSpPr>
+          <p:nvPr>
+            <p:ph type="title"/>
+          </p:nvPr>
+        </p:nvSpPr>
+        <p:spPr>
+          <a:xfrm>
+            <a:off x="685800" y="1723854"/>
+            <a:ext cx="10394707" cy="2511835"/>
+          </a:xfrm>
+        </p:spPr>
+        <p:txBody>
+          <a:bodyPr anchor="b">
+            <a:normAutofit/>
+          </a:bodyPr>
+          <a:lstStyle>
+            <a:lvl1pPr algn="l">
+              <a:defRPr sz="4800"/>
+            </a:lvl1pPr>
+          </a:lstStyle>
+          <a:p>
+            <a:r>
+              <a:rPr lang="en-US"/>
+              <a:t>Click to edit Master title style</a:t>
+            </a:r>
+            <a:endParaRPr lang="en-US" dirty="0"/>
+          </a:p>
+        </p:txBody>
+      </p:sp>
+      <p:sp>
+        <p:nvSpPr>
+          <p:cNvPr id="4" name="Text Placeholder 3"/>
+          <p:cNvSpPr>
+            <a:spLocks noGrp="1"/>
+          </p:cNvSpPr>
+          <p:nvPr>
+            <p:ph type="body" sz="half" idx="2"/>
+          </p:nvPr>
+        </p:nvSpPr>
+        <p:spPr>
+          <a:xfrm>
+            <a:off x="685800" y="4247468"/>
+            <a:ext cx="10394707" cy="1140644"/>
+          </a:xfrm>
+        </p:spPr>
+        <p:txBody>
+          <a:bodyPr anchor="t">
+            <a:normAutofit/>
+          </a:bodyPr>
+          <a:lstStyle>
+            <a:lvl1pPr marL="0" indent="0" algn="l">
+              <a:buNone/>
+              <a:defRPr sz="1800"/>
+            </a:lvl1pPr>
+            <a:lvl2pPr marL="457200" indent="0">
+              <a:buNone/>
+              <a:defRPr sz="1400"/>
+            </a:lvl2pPr>
+            <a:lvl3pPr marL="914400" indent="0">
+              <a:buNone/>
+              <a:defRPr sz="1200"/>
+            </a:lvl3pPr>
+            <a:lvl4pPr marL="1371600" indent="0">
+              <a:buNone/>
+              <a:defRPr sz="1000"/>
+            </a:lvl4pPr>
+            <a:lvl5pPr marL="1828800" indent="0">
+              <a:buNone/>
+              <a:defRPr sz="1000"/>
+            </a:lvl5pPr>
+            <a:lvl6pPr marL="2286000" indent="0">
+              <a:buNone/>
+              <a:defRPr sz="1000"/>
+            </a:lvl6pPr>
+            <a:lvl7pPr marL="2743200" indent="0">
+              <a:buNone/>
+              <a:defRPr sz="1000"/>
+            </a:lvl7pPr>
+            <a:lvl8pPr marL="3200400" indent="0">
+              <a:buNone/>
+              <a:defRPr sz="1000"/>
+            </a:lvl8pPr>
+            <a:lvl9pPr marL="3657600" indent="0">
+              <a:buNone/>
+              <a:defRPr sz="1000"/>
+            </a:lvl9pPr>
+          </a:lstStyle>
+          <a:p>
+            <a:pPr lvl="0"/>
+            <a:r>
+              <a:rPr lang="en-US"/>
+              <a:t>Click to edit Master text styles</a:t>
+            </a:r>
+          </a:p>
+        </p:txBody>
+      </p:sp>
+      <p:sp>
+        <p:nvSpPr>
+          <p:cNvPr id="5" name="Date Placeholder 4"/>
+          <p:cNvSpPr>
+            <a:spLocks noGrp="1"/>
+          </p:cNvSpPr>
+          <p:nvPr>
+            <p:ph type="dt" sz="half" idx="10"/>
+          </p:nvPr>
+        </p:nvSpPr>
+        <p:spPr/>
+        <p:txBody>
+          <a:bodyPr/>
+          <a:lstStyle/>
+          <a:p>
+            <a:fld id="{02398B29-7265-4A65-A2A4-6703C057B7C1}" type="datetimeFigureOut">
+              <a:rPr lang="en-US" dirty="0"/>
+              <a:t>6/5/2026</a:t>
+            </a:fld>
+            <a:endParaRPr lang="en-US" dirty="0"/>
+          </a:p>
+        </p:txBody>
+      </p:sp>
+      <p:sp>
+        <p:nvSpPr>
+          <p:cNvPr id="6" name="Footer Placeholder 5"/>
+          <p:cNvSpPr>
+            <a:spLocks noGrp="1"/>
+          </p:cNvSpPr>
+          <p:nvPr>
+            <p:ph type="ftr" sz="quarter" idx="11"/>
+          </p:nvPr>
+        </p:nvSpPr>
+        <p:spPr/>
+        <p:txBody>
+          <a:bodyPr/>
+          <a:lstStyle/>
+          <a:p>
+            <a:endParaRPr lang="en-US" dirty="0"/>
+          </a:p>
+        </p:txBody>
+      </p:sp>
+      <p:sp>
+        <p:nvSpPr>
+          <p:cNvPr id="7" name="Slide Number Placeholder 6"/>
+          <p:cNvSpPr>
+            <a:spLocks noGrp="1"/>
+          </p:cNvSpPr>
+          <p:nvPr>
+            <p:ph type="sldNum" sz="quarter" idx="12"/>
+          </p:nvPr>
+        </p:nvSpPr>
+        <p:spPr/>
+        <p:txBody>
+          <a:bodyPr/>
+          <a:lstStyle/>
+          <a:p>
+            <a:fld id="{6D22F896-40B5-4ADD-8801-0D06FADFA095}" type="slidenum">
+              <a:rPr lang="en-US" dirty="0"/>
+              <a:t>‹#›</a:t>
+            </a:fld>
+            <a:endParaRPr lang="en-US" dirty="0"/>
+          </a:p>
+        </p:txBody>
+      </p:sp>
+    </p:spTree>
+    <p:extLst>
+      <p:ext uri="{BB962C8B-B14F-4D97-AF65-F5344CB8AC3E}">
+        <p14:creationId xmlns:p14="http://schemas.microsoft.com/office/powerpoint/2010/main" val="408232408"/>
+      </p:ext>
+    </p:extLst>
+  </p:cSld>
+  <p:clrMapOvr>
+    <a:masterClrMapping/>
+  </p:clrMapOvr>
+</p:sldLayout>
+</file>
+
+<file path=ppt/slideLayouts/slideLayout14.xml><?xml version="1.0" encoding="utf-8"?>
+<p:sldLayout xmlns:a="http://schemas.openxmlformats.org/drawingml/2006/main" xmlns:r="http://schemas.openxmlformats.org/officeDocument/2006/relationships" xmlns:p="http://schemas.openxmlformats.org/presentationml/2006/main" preserve="1">
+  <p:cSld name="3 Column">
+    <p:spTree>
+      <p:nvGrpSpPr>
+        <p:cNvPr id="1" name=""/>
+        <p:cNvGrpSpPr/>
+        <p:nvPr/>
+      </p:nvGrpSpPr>
+      <p:grpSpPr>
+        <a:xfrm>
+          <a:off x="0" y="0"/>
+          <a:ext cx="0" cy="0"/>
+          <a:chOff x="0" y="0"/>
+          <a:chExt cx="0" cy="0"/>
+        </a:xfrm>
+      </p:grpSpPr>
+      <p:sp>
+        <p:nvSpPr>
+          <p:cNvPr id="15" name="Title 1"/>
+          <p:cNvSpPr>
+            <a:spLocks noGrp="1"/>
+          </p:cNvSpPr>
+          <p:nvPr>
+            <p:ph type="title"/>
+          </p:nvPr>
+        </p:nvSpPr>
+        <p:spPr>
+          <a:xfrm>
+            <a:off x="685802" y="685800"/>
+            <a:ext cx="10394706" cy="1151965"/>
+          </a:xfrm>
+        </p:spPr>
+        <p:txBody>
+          <a:bodyPr/>
+          <a:lstStyle>
+            <a:lvl1pPr algn="ctr">
+              <a:defRPr/>
+            </a:lvl1pPr>
+          </a:lstStyle>
+          <a:p>
+            <a:r>
+              <a:rPr lang="en-US"/>
+              <a:t>Click to edit Master title style</a:t>
+            </a:r>
+            <a:endParaRPr lang="en-US" dirty="0"/>
+          </a:p>
+        </p:txBody>
+      </p:sp>
+      <p:sp>
+        <p:nvSpPr>
+          <p:cNvPr id="7" name="Text Placeholder 2"/>
+          <p:cNvSpPr>
+            <a:spLocks noGrp="1"/>
+          </p:cNvSpPr>
+          <p:nvPr>
+            <p:ph type="body" idx="1"/>
+          </p:nvPr>
+        </p:nvSpPr>
+        <p:spPr>
+          <a:xfrm>
+            <a:off x="685802" y="2063395"/>
+            <a:ext cx="3310128" cy="576262"/>
+          </a:xfrm>
+        </p:spPr>
+        <p:txBody>
+          <a:bodyPr anchor="b">
+            <a:noAutofit/>
+          </a:bodyPr>
+          <a:lstStyle>
+            <a:lvl1pPr marL="0" indent="0" algn="ctr">
+              <a:lnSpc>
+                <a:spcPct val="90000"/>
+              </a:lnSpc>
+              <a:buNone/>
+              <a:defRPr sz="2400" b="0">
+                <a:solidFill>
+                  <a:schemeClr val="accent1"/>
+                </a:solidFill>
+              </a:defRPr>
+            </a:lvl1pPr>
+            <a:lvl2pPr marL="457200" indent="0">
+              <a:buNone/>
+              <a:defRPr sz="2000" b="1"/>
+            </a:lvl2pPr>
+            <a:lvl3pPr marL="914400" indent="0">
+              <a:buNone/>
+              <a:defRPr sz="1800" b="1"/>
+            </a:lvl3pPr>
+            <a:lvl4pPr marL="1371600" indent="0">
+              <a:buNone/>
+              <a:defRPr sz="1600" b="1"/>
+            </a:lvl4pPr>
+            <a:lvl5pPr marL="1828800" indent="0">
+              <a:buNone/>
+              <a:defRPr sz="1600" b="1"/>
+            </a:lvl5pPr>
+            <a:lvl6pPr marL="2286000" indent="0">
+              <a:buNone/>
+              <a:defRPr sz="1600" b="1"/>
+            </a:lvl6pPr>
+            <a:lvl7pPr marL="2743200" indent="0">
+              <a:buNone/>
+              <a:defRPr sz="1600" b="1"/>
+            </a:lvl7pPr>
+            <a:lvl8pPr marL="3200400" indent="0">
+              <a:buNone/>
+              <a:defRPr sz="1600" b="1"/>
+            </a:lvl8pPr>
+            <a:lvl9pPr marL="3657600" indent="0">
+              <a:buNone/>
+              <a:defRPr sz="1600" b="1"/>
+            </a:lvl9pPr>
+          </a:lstStyle>
+          <a:p>
+            <a:pPr lvl="0"/>
+            <a:r>
+              <a:rPr lang="en-US"/>
+              <a:t>Click to edit Master text styles</a:t>
+            </a:r>
+          </a:p>
+        </p:txBody>
+      </p:sp>
+      <p:sp>
+        <p:nvSpPr>
+          <p:cNvPr id="8" name="Text Placeholder 3"/>
+          <p:cNvSpPr>
+            <a:spLocks noGrp="1"/>
+          </p:cNvSpPr>
+          <p:nvPr>
+            <p:ph type="body" sz="half" idx="15"/>
+          </p:nvPr>
+        </p:nvSpPr>
+        <p:spPr>
+          <a:xfrm>
+            <a:off x="685802" y="2639658"/>
+            <a:ext cx="3310128" cy="2734928"/>
+          </a:xfrm>
+        </p:spPr>
+        <p:txBody>
+          <a:bodyPr anchor="t">
+            <a:normAutofit/>
+          </a:bodyPr>
+          <a:lstStyle>
+            <a:lvl1pPr marL="0" indent="0" algn="ctr">
+              <a:buNone/>
+              <a:defRPr sz="1400"/>
+            </a:lvl1pPr>
+            <a:lvl2pPr marL="457200" indent="0">
+              <a:buNone/>
+              <a:defRPr sz="1200"/>
+            </a:lvl2pPr>
+            <a:lvl3pPr marL="914400" indent="0">
+              <a:buNone/>
+              <a:defRPr sz="1000"/>
+            </a:lvl3pPr>
+            <a:lvl4pPr marL="1371600" indent="0">
+              <a:buNone/>
+              <a:defRPr sz="900"/>
+            </a:lvl4pPr>
+            <a:lvl5pPr marL="1828800" indent="0">
+              <a:buNone/>
+              <a:defRPr sz="900"/>
+            </a:lvl5pPr>
+            <a:lvl6pPr marL="2286000" indent="0">
+              <a:buNone/>
+              <a:defRPr sz="900"/>
+            </a:lvl6pPr>
+            <a:lvl7pPr marL="2743200" indent="0">
+              <a:buNone/>
+              <a:defRPr sz="900"/>
+            </a:lvl7pPr>
+            <a:lvl8pPr marL="3200400" indent="0">
+              <a:buNone/>
+              <a:defRPr sz="900"/>
+            </a:lvl8pPr>
+            <a:lvl9pPr marL="3657600" indent="0">
+              <a:buNone/>
+              <a:defRPr sz="900"/>
+            </a:lvl9pPr>
+          </a:lstStyle>
+          <a:p>
+            <a:pPr lvl="0"/>
+            <a:r>
+              <a:rPr lang="en-US"/>
+              <a:t>Click to edit Master text styles</a:t>
+            </a:r>
+          </a:p>
+        </p:txBody>
+      </p:sp>
+      <p:sp>
+        <p:nvSpPr>
+          <p:cNvPr id="9" name="Text Placeholder 4"/>
+          <p:cNvSpPr>
+            <a:spLocks noGrp="1"/>
+          </p:cNvSpPr>
+          <p:nvPr>
+            <p:ph type="body" sz="quarter" idx="3"/>
+          </p:nvPr>
+        </p:nvSpPr>
+        <p:spPr>
+          <a:xfrm>
+            <a:off x="4234622" y="2063395"/>
+            <a:ext cx="3310128" cy="576262"/>
+          </a:xfrm>
+        </p:spPr>
+        <p:txBody>
+          <a:bodyPr anchor="b">
+            <a:noAutofit/>
+          </a:bodyPr>
+          <a:lstStyle>
+            <a:lvl1pPr marL="0" indent="0" algn="ctr">
+              <a:lnSpc>
+                <a:spcPct val="90000"/>
+              </a:lnSpc>
+              <a:buNone/>
+              <a:defRPr sz="2400" b="0">
+                <a:solidFill>
+                  <a:schemeClr val="accent1"/>
+                </a:solidFill>
+              </a:defRPr>
+            </a:lvl1pPr>
+            <a:lvl2pPr marL="457200" indent="0">
+              <a:buNone/>
+              <a:defRPr sz="2000" b="1"/>
+            </a:lvl2pPr>
+            <a:lvl3pPr marL="914400" indent="0">
+              <a:buNone/>
+              <a:defRPr sz="1800" b="1"/>
+            </a:lvl3pPr>
+            <a:lvl4pPr marL="1371600" indent="0">
+              <a:buNone/>
+              <a:defRPr sz="1600" b="1"/>
+            </a:lvl4pPr>
+            <a:lvl5pPr marL="1828800" indent="0">
+              <a:buNone/>
+              <a:defRPr sz="1600" b="1"/>
+            </a:lvl5pPr>
+            <a:lvl6pPr marL="2286000" indent="0">
+              <a:buNone/>
+              <a:defRPr sz="1600" b="1"/>
+            </a:lvl6pPr>
+            <a:lvl7pPr marL="2743200" indent="0">
+              <a:buNone/>
+              <a:defRPr sz="1600" b="1"/>
+            </a:lvl7pPr>
+            <a:lvl8pPr marL="3200400" indent="0">
+              <a:buNone/>
+              <a:defRPr sz="1600" b="1"/>
+            </a:lvl8pPr>
+            <a:lvl9pPr marL="3657600" indent="0">
+              <a:buNone/>
+              <a:defRPr sz="1600" b="1"/>
+            </a:lvl9pPr>
+          </a:lstStyle>
+          <a:p>
+            <a:pPr lvl="0"/>
+            <a:r>
+              <a:rPr lang="en-US"/>
+              <a:t>Click to edit Master text styles</a:t>
+            </a:r>
+          </a:p>
+        </p:txBody>
+      </p:sp>
+      <p:sp>
+        <p:nvSpPr>
+          <p:cNvPr id="10" name="Text Placeholder 3"/>
+          <p:cNvSpPr>
+            <a:spLocks noGrp="1"/>
+          </p:cNvSpPr>
+          <p:nvPr>
+            <p:ph type="body" sz="half" idx="16"/>
+          </p:nvPr>
+        </p:nvSpPr>
+        <p:spPr>
+          <a:xfrm>
+            <a:off x="4234621" y="2639658"/>
+            <a:ext cx="3310128" cy="2734928"/>
+          </a:xfrm>
+        </p:spPr>
+        <p:txBody>
+          <a:bodyPr anchor="t">
+            <a:normAutofit/>
+          </a:bodyPr>
+          <a:lstStyle>
+            <a:lvl1pPr marL="0" indent="0" algn="ctr">
+              <a:buNone/>
+              <a:defRPr sz="1400"/>
+            </a:lvl1pPr>
+            <a:lvl2pPr marL="457200" indent="0">
+              <a:buNone/>
+              <a:defRPr sz="1200"/>
+            </a:lvl2pPr>
+            <a:lvl3pPr marL="914400" indent="0">
+              <a:buNone/>
+              <a:defRPr sz="1000"/>
+            </a:lvl3pPr>
+            <a:lvl4pPr marL="1371600" indent="0">
+              <a:buNone/>
+              <a:defRPr sz="900"/>
+            </a:lvl4pPr>
+            <a:lvl5pPr marL="1828800" indent="0">
+              <a:buNone/>
+              <a:defRPr sz="900"/>
+            </a:lvl5pPr>
+            <a:lvl6pPr marL="2286000" indent="0">
+              <a:buNone/>
+              <a:defRPr sz="900"/>
+            </a:lvl6pPr>
+            <a:lvl7pPr marL="2743200" indent="0">
+              <a:buNone/>
+              <a:defRPr sz="900"/>
+            </a:lvl7pPr>
+            <a:lvl8pPr marL="3200400" indent="0">
+              <a:buNone/>
+              <a:defRPr sz="900"/>
+            </a:lvl8pPr>
+            <a:lvl9pPr marL="3657600" indent="0">
+              <a:buNone/>
+              <a:defRPr sz="900"/>
+            </a:lvl9pPr>
+          </a:lstStyle>
+          <a:p>
+            <a:pPr lvl="0"/>
+            <a:r>
+              <a:rPr lang="en-US"/>
+              <a:t>Click to edit Master text styles</a:t>
+            </a:r>
+          </a:p>
+        </p:txBody>
+      </p:sp>
+      <p:sp>
+        <p:nvSpPr>
+          <p:cNvPr id="11" name="Text Placeholder 4"/>
+          <p:cNvSpPr>
+            <a:spLocks noGrp="1"/>
+          </p:cNvSpPr>
+          <p:nvPr>
+            <p:ph type="body" sz="quarter" idx="13"/>
+          </p:nvPr>
+        </p:nvSpPr>
+        <p:spPr>
+          <a:xfrm>
+            <a:off x="7770380" y="2063395"/>
+            <a:ext cx="3310128" cy="576262"/>
+          </a:xfrm>
+        </p:spPr>
+        <p:txBody>
+          <a:bodyPr anchor="b">
+            <a:noAutofit/>
+          </a:bodyPr>
+          <a:lstStyle>
+            <a:lvl1pPr marL="0" indent="0" algn="ctr">
+              <a:lnSpc>
+                <a:spcPct val="90000"/>
+              </a:lnSpc>
+              <a:buNone/>
+              <a:defRPr sz="2400" b="0">
+                <a:solidFill>
+                  <a:schemeClr val="accent1"/>
+                </a:solidFill>
+              </a:defRPr>
+            </a:lvl1pPr>
+            <a:lvl2pPr marL="457200" indent="0">
+              <a:buNone/>
+              <a:defRPr sz="2000" b="1"/>
+            </a:lvl2pPr>
+            <a:lvl3pPr marL="914400" indent="0">
+              <a:buNone/>
+              <a:defRPr sz="1800" b="1"/>
+            </a:lvl3pPr>
+            <a:lvl4pPr marL="1371600" indent="0">
+              <a:buNone/>
+              <a:defRPr sz="1600" b="1"/>
+            </a:lvl4pPr>
+            <a:lvl5pPr marL="1828800" indent="0">
+              <a:buNone/>
+              <a:defRPr sz="1600" b="1"/>
+            </a:lvl5pPr>
+            <a:lvl6pPr marL="2286000" indent="0">
+              <a:buNone/>
+              <a:defRPr sz="1600" b="1"/>
+            </a:lvl6pPr>
+            <a:lvl7pPr marL="2743200" indent="0">
+              <a:buNone/>
+              <a:defRPr sz="1600" b="1"/>
+            </a:lvl7pPr>
+            <a:lvl8pPr marL="3200400" indent="0">
+              <a:buNone/>
+              <a:defRPr sz="1600" b="1"/>
+            </a:lvl8pPr>
+            <a:lvl9pPr marL="3657600" indent="0">
+              <a:buNone/>
+              <a:defRPr sz="1600" b="1"/>
+            </a:lvl9pPr>
+          </a:lstStyle>
+          <a:p>
+            <a:pPr lvl="0"/>
+            <a:r>
+              <a:rPr lang="en-US"/>
+              <a:t>Click to edit Master text styles</a:t>
+            </a:r>
+          </a:p>
+        </p:txBody>
+      </p:sp>
+      <p:sp>
+        <p:nvSpPr>
+          <p:cNvPr id="12" name="Text Placeholder 3"/>
+          <p:cNvSpPr>
+            <a:spLocks noGrp="1"/>
+          </p:cNvSpPr>
+          <p:nvPr>
+            <p:ph type="body" sz="half" idx="17"/>
+          </p:nvPr>
+        </p:nvSpPr>
+        <p:spPr>
+          <a:xfrm>
+            <a:off x="7770380" y="2639658"/>
+            <a:ext cx="3310128" cy="2734928"/>
+          </a:xfrm>
+        </p:spPr>
+        <p:txBody>
+          <a:bodyPr anchor="t">
+            <a:normAutofit/>
+          </a:bodyPr>
+          <a:lstStyle>
+            <a:lvl1pPr marL="0" indent="0" algn="ctr">
+              <a:buNone/>
+              <a:defRPr sz="1400"/>
+            </a:lvl1pPr>
+            <a:lvl2pPr marL="457200" indent="0">
+              <a:buNone/>
+              <a:defRPr sz="1200"/>
+            </a:lvl2pPr>
+            <a:lvl3pPr marL="914400" indent="0">
+              <a:buNone/>
+              <a:defRPr sz="1000"/>
+            </a:lvl3pPr>
+            <a:lvl4pPr marL="1371600" indent="0">
+              <a:buNone/>
+              <a:defRPr sz="900"/>
+            </a:lvl4pPr>
+            <a:lvl5pPr marL="1828800" indent="0">
+              <a:buNone/>
+              <a:defRPr sz="900"/>
+            </a:lvl5pPr>
+            <a:lvl6pPr marL="2286000" indent="0">
+              <a:buNone/>
+              <a:defRPr sz="900"/>
+            </a:lvl6pPr>
+            <a:lvl7pPr marL="2743200" indent="0">
+              <a:buNone/>
+              <a:defRPr sz="900"/>
+            </a:lvl7pPr>
+            <a:lvl8pPr marL="3200400" indent="0">
+              <a:buNone/>
+              <a:defRPr sz="900"/>
+            </a:lvl8pPr>
+            <a:lvl9pPr marL="3657600" indent="0">
+              <a:buNone/>
+              <a:defRPr sz="900"/>
+            </a:lvl9pPr>
+          </a:lstStyle>
+          <a:p>
+            <a:pPr lvl="0"/>
+            <a:r>
+              <a:rPr lang="en-US"/>
+              <a:t>Click to edit Master text styles</a:t>
+            </a:r>
+          </a:p>
+        </p:txBody>
+      </p:sp>
+      <p:sp>
+        <p:nvSpPr>
+          <p:cNvPr id="3" name="Date Placeholder 2"/>
+          <p:cNvSpPr>
+            <a:spLocks noGrp="1"/>
+          </p:cNvSpPr>
+          <p:nvPr>
+            <p:ph type="dt" sz="half" idx="10"/>
+          </p:nvPr>
+        </p:nvSpPr>
+        <p:spPr/>
+        <p:txBody>
+          <a:bodyPr/>
+          <a:lstStyle/>
+          <a:p>
+            <a:fld id="{28FBA082-94DF-4C4B-A041-6624924AB0A8}" type="datetimeFigureOut">
+              <a:rPr lang="en-US" dirty="0"/>
+              <a:t>6/5/2026</a:t>
+            </a:fld>
+            <a:endParaRPr lang="en-US" dirty="0"/>
+          </a:p>
+        </p:txBody>
+      </p:sp>
+      <p:sp>
+        <p:nvSpPr>
+          <p:cNvPr id="4" name="Footer Placeholder 3"/>
+          <p:cNvSpPr>
+            <a:spLocks noGrp="1"/>
+          </p:cNvSpPr>
+          <p:nvPr>
+            <p:ph type="ftr" sz="quarter" idx="11"/>
+          </p:nvPr>
+        </p:nvSpPr>
+        <p:spPr/>
+        <p:txBody>
+          <a:bodyPr/>
+          <a:lstStyle/>
+          <a:p>
+            <a:endParaRPr lang="en-US" dirty="0"/>
+          </a:p>
+        </p:txBody>
+      </p:sp>
+      <p:sp>
+        <p:nvSpPr>
+          <p:cNvPr id="5" name="Slide Number Placeholder 4"/>
+          <p:cNvSpPr>
+            <a:spLocks noGrp="1"/>
+          </p:cNvSpPr>
+          <p:nvPr>
+            <p:ph type="sldNum" sz="quarter" idx="12"/>
+          </p:nvPr>
+        </p:nvSpPr>
+        <p:spPr/>
+        <p:txBody>
+          <a:bodyPr/>
+          <a:lstStyle/>
+          <a:p>
+            <a:fld id="{6D22F896-40B5-4ADD-8801-0D06FADFA095}" type="slidenum">
+              <a:rPr lang="en-US" dirty="0"/>
+              <a:t>‹#›</a:t>
+            </a:fld>
+            <a:endParaRPr lang="en-US" dirty="0"/>
+          </a:p>
+        </p:txBody>
+      </p:sp>
+    </p:spTree>
+    <p:extLst>
+      <p:ext uri="{BB962C8B-B14F-4D97-AF65-F5344CB8AC3E}">
+        <p14:creationId xmlns:p14="http://schemas.microsoft.com/office/powerpoint/2010/main" val="3739569885"/>
+      </p:ext>
+    </p:extLst>
+  </p:cSld>
+  <p:clrMapOvr>
+    <a:masterClrMapping/>
+  </p:clrMapOvr>
+</p:sldLayout>
+</file>
+
+<file path=ppt/slideLayouts/slideLayout15.xml><?xml version="1.0" encoding="utf-8"?>
+<p:sldLayout xmlns:a="http://schemas.openxmlformats.org/drawingml/2006/main" xmlns:r="http://schemas.openxmlformats.org/officeDocument/2006/relationships" xmlns:p="http://schemas.openxmlformats.org/presentationml/2006/main" preserve="1">
+  <p:cSld name="3 Picture Column">
+    <p:spTree>
+      <p:nvGrpSpPr>
+        <p:cNvPr id="1" name=""/>
+        <p:cNvGrpSpPr/>
+        <p:nvPr/>
+      </p:nvGrpSpPr>
+      <p:grpSpPr>
+        <a:xfrm>
+          <a:off x="0" y="0"/>
+          <a:ext cx="0" cy="0"/>
+          <a:chOff x="0" y="0"/>
+          <a:chExt cx="0" cy="0"/>
+        </a:xfrm>
+      </p:grpSpPr>
+      <p:sp>
+        <p:nvSpPr>
+          <p:cNvPr id="30" name="Title 1"/>
+          <p:cNvSpPr>
+            <a:spLocks noGrp="1"/>
+          </p:cNvSpPr>
+          <p:nvPr>
+            <p:ph type="title"/>
+          </p:nvPr>
+        </p:nvSpPr>
+        <p:spPr>
+          <a:xfrm>
+            <a:off x="685801" y="685800"/>
+            <a:ext cx="10396882" cy="1151965"/>
+          </a:xfrm>
+        </p:spPr>
+        <p:txBody>
+          <a:bodyPr/>
+          <a:lstStyle>
+            <a:lvl1pPr algn="ctr">
+              <a:defRPr/>
+            </a:lvl1pPr>
+          </a:lstStyle>
+          <a:p>
+            <a:r>
+              <a:rPr lang="en-US"/>
+              <a:t>Click to edit Master title style</a:t>
+            </a:r>
+            <a:endParaRPr lang="en-US" dirty="0"/>
+          </a:p>
+        </p:txBody>
+      </p:sp>
+      <p:sp>
+        <p:nvSpPr>
+          <p:cNvPr id="19" name="Text Placeholder 2"/>
+          <p:cNvSpPr>
+            <a:spLocks noGrp="1"/>
+          </p:cNvSpPr>
+          <p:nvPr>
+            <p:ph type="body" idx="1"/>
+          </p:nvPr>
+        </p:nvSpPr>
+        <p:spPr>
+          <a:xfrm>
+            <a:off x="691840" y="3813025"/>
+            <a:ext cx="3310128" cy="576262"/>
+          </a:xfrm>
+        </p:spPr>
+        <p:txBody>
+          <a:bodyPr anchor="b">
+            <a:noAutofit/>
+          </a:bodyPr>
+          <a:lstStyle>
+            <a:lvl1pPr marL="0" indent="0" algn="ctr">
+              <a:lnSpc>
+                <a:spcPct val="90000"/>
+              </a:lnSpc>
+              <a:buNone/>
+              <a:defRPr sz="2200" b="0">
+                <a:solidFill>
+                  <a:schemeClr val="accent1"/>
+                </a:solidFill>
+              </a:defRPr>
+            </a:lvl1pPr>
+            <a:lvl2pPr marL="457200" indent="0">
+              <a:buNone/>
+              <a:defRPr sz="2000" b="1"/>
+            </a:lvl2pPr>
+            <a:lvl3pPr marL="914400" indent="0">
+              <a:buNone/>
+              <a:defRPr sz="1800" b="1"/>
+            </a:lvl3pPr>
+            <a:lvl4pPr marL="1371600" indent="0">
+              <a:buNone/>
+              <a:defRPr sz="1600" b="1"/>
+            </a:lvl4pPr>
+            <a:lvl5pPr marL="1828800" indent="0">
+              <a:buNone/>
+              <a:defRPr sz="1600" b="1"/>
+            </a:lvl5pPr>
+            <a:lvl6pPr marL="2286000" indent="0">
+              <a:buNone/>
+              <a:defRPr sz="1600" b="1"/>
+            </a:lvl6pPr>
+            <a:lvl7pPr marL="2743200" indent="0">
+              <a:buNone/>
+              <a:defRPr sz="1600" b="1"/>
+            </a:lvl7pPr>
+            <a:lvl8pPr marL="3200400" indent="0">
+              <a:buNone/>
+              <a:defRPr sz="1600" b="1"/>
+            </a:lvl8pPr>
+            <a:lvl9pPr marL="3657600" indent="0">
+              <a:buNone/>
+              <a:defRPr sz="1600" b="1"/>
+            </a:lvl9pPr>
+          </a:lstStyle>
+          <a:p>
+            <a:pPr lvl="0"/>
+            <a:r>
+              <a:rPr lang="en-US"/>
+              <a:t>Click to edit Master text styles</a:t>
+            </a:r>
+          </a:p>
+        </p:txBody>
+      </p:sp>
+      <p:sp>
+        <p:nvSpPr>
+          <p:cNvPr id="20" name="Picture Placeholder 2"/>
+          <p:cNvSpPr>
+            <a:spLocks noGrp="1" noChangeAspect="1"/>
+          </p:cNvSpPr>
+          <p:nvPr>
+            <p:ph type="pic" idx="15"/>
+          </p:nvPr>
+        </p:nvSpPr>
+        <p:spPr>
+          <a:xfrm>
+            <a:off x="685780" y="2063395"/>
+            <a:ext cx="3310128" cy="1536725"/>
+          </a:xfrm>
+          <a:prstGeom prst="roundRect">
+            <a:avLst>
+              <a:gd name="adj" fmla="val 0"/>
+            </a:avLst>
+          </a:prstGeom>
+          <a:ln w="57150" cmpd="thinThick">
+            <a:solidFill>
+              <a:schemeClr val="bg1">
+                <a:lumMod val="50000"/>
+              </a:schemeClr>
+            </a:solidFill>
+            <a:miter lim="800000"/>
+          </a:ln>
+        </p:spPr>
+        <p:txBody>
+          <a:bodyPr anchor="t">
+            <a:normAutofit/>
+          </a:bodyPr>
+          <a:lstStyle>
+            <a:lvl1pPr marL="0" indent="0" algn="ctr">
+              <a:buNone/>
+              <a:defRPr sz="1600"/>
+            </a:lvl1pPr>
+            <a:lvl2pPr marL="457200" indent="0">
+              <a:buNone/>
+              <a:defRPr sz="1600"/>
+            </a:lvl2pPr>
+            <a:lvl3pPr marL="914400" indent="0">
+              <a:buNone/>
+              <a:defRPr sz="1600"/>
+            </a:lvl3pPr>
+            <a:lvl4pPr marL="1371600" indent="0">
+              <a:buNone/>
+              <a:defRPr sz="1600"/>
+            </a:lvl4pPr>
+            <a:lvl5pPr marL="1828800" indent="0">
+              <a:buNone/>
+              <a:defRPr sz="1600"/>
+            </a:lvl5pPr>
+            <a:lvl6pPr marL="2286000" indent="0">
+              <a:buNone/>
+              <a:defRPr sz="1600"/>
+            </a:lvl6pPr>
+            <a:lvl7pPr marL="2743200" indent="0">
+              <a:buNone/>
+              <a:defRPr sz="1600"/>
+            </a:lvl7pPr>
+            <a:lvl8pPr marL="3200400" indent="0">
+              <a:buNone/>
+              <a:defRPr sz="1600"/>
+            </a:lvl8pPr>
+            <a:lvl9pPr marL="3657600" indent="0">
+              <a:buNone/>
+              <a:defRPr sz="1600"/>
+            </a:lvl9pPr>
+          </a:lstStyle>
+          <a:p>
+            <a:r>
+              <a:rPr lang="en-US"/>
+              <a:t>Click icon to add picture</a:t>
+            </a:r>
+            <a:endParaRPr lang="en-US" dirty="0"/>
+          </a:p>
+        </p:txBody>
+      </p:sp>
+      <p:sp>
+        <p:nvSpPr>
+          <p:cNvPr id="21" name="Text Placeholder 3"/>
+          <p:cNvSpPr>
+            <a:spLocks noGrp="1"/>
+          </p:cNvSpPr>
+          <p:nvPr>
+            <p:ph type="body" sz="half" idx="18"/>
+          </p:nvPr>
+        </p:nvSpPr>
+        <p:spPr>
+          <a:xfrm>
+            <a:off x="691840" y="4389287"/>
+            <a:ext cx="3310128" cy="985299"/>
+          </a:xfrm>
+        </p:spPr>
+        <p:txBody>
+          <a:bodyPr anchor="t">
+            <a:normAutofit/>
+          </a:bodyPr>
+          <a:lstStyle>
+            <a:lvl1pPr marL="0" indent="0" algn="ctr">
+              <a:buNone/>
+              <a:defRPr sz="1400"/>
+            </a:lvl1pPr>
+            <a:lvl2pPr marL="457200" indent="0">
+              <a:buNone/>
+              <a:defRPr sz="1200"/>
+            </a:lvl2pPr>
+            <a:lvl3pPr marL="914400" indent="0">
+              <a:buNone/>
+              <a:defRPr sz="1000"/>
+            </a:lvl3pPr>
+            <a:lvl4pPr marL="1371600" indent="0">
+              <a:buNone/>
+              <a:defRPr sz="900"/>
+            </a:lvl4pPr>
+            <a:lvl5pPr marL="1828800" indent="0">
+              <a:buNone/>
+              <a:defRPr sz="900"/>
+            </a:lvl5pPr>
+            <a:lvl6pPr marL="2286000" indent="0">
+              <a:buNone/>
+              <a:defRPr sz="900"/>
+            </a:lvl6pPr>
+            <a:lvl7pPr marL="2743200" indent="0">
+              <a:buNone/>
+              <a:defRPr sz="900"/>
+            </a:lvl7pPr>
+            <a:lvl8pPr marL="3200400" indent="0">
+              <a:buNone/>
+              <a:defRPr sz="900"/>
+            </a:lvl8pPr>
+            <a:lvl9pPr marL="3657600" indent="0">
+              <a:buNone/>
+              <a:defRPr sz="900"/>
+            </a:lvl9pPr>
+          </a:lstStyle>
+          <a:p>
+            <a:pPr lvl="0"/>
+            <a:r>
+              <a:rPr lang="en-US"/>
+              <a:t>Click to edit Master text styles</a:t>
+            </a:r>
+          </a:p>
+        </p:txBody>
+      </p:sp>
+      <p:sp>
+        <p:nvSpPr>
+          <p:cNvPr id="22" name="Text Placeholder 4"/>
+          <p:cNvSpPr>
+            <a:spLocks noGrp="1"/>
+          </p:cNvSpPr>
+          <p:nvPr>
+            <p:ph type="body" sz="quarter" idx="3"/>
+          </p:nvPr>
+        </p:nvSpPr>
+        <p:spPr>
+          <a:xfrm>
+            <a:off x="4237410" y="3813025"/>
+            <a:ext cx="3310128" cy="576262"/>
+          </a:xfrm>
+        </p:spPr>
+        <p:txBody>
+          <a:bodyPr anchor="b">
+            <a:noAutofit/>
+          </a:bodyPr>
+          <a:lstStyle>
+            <a:lvl1pPr marL="0" indent="0" algn="ctr">
+              <a:lnSpc>
+                <a:spcPct val="90000"/>
+              </a:lnSpc>
+              <a:buNone/>
+              <a:defRPr sz="2200" b="0">
+                <a:solidFill>
+                  <a:schemeClr val="accent1"/>
+                </a:solidFill>
+              </a:defRPr>
+            </a:lvl1pPr>
+            <a:lvl2pPr marL="457200" indent="0">
+              <a:buNone/>
+              <a:defRPr sz="2000" b="1"/>
+            </a:lvl2pPr>
+            <a:lvl3pPr marL="914400" indent="0">
+              <a:buNone/>
+              <a:defRPr sz="1800" b="1"/>
+            </a:lvl3pPr>
+            <a:lvl4pPr marL="1371600" indent="0">
+              <a:buNone/>
+              <a:defRPr sz="1600" b="1"/>
+            </a:lvl4pPr>
+            <a:lvl5pPr marL="1828800" indent="0">
+              <a:buNone/>
+              <a:defRPr sz="1600" b="1"/>
+            </a:lvl5pPr>
+            <a:lvl6pPr marL="2286000" indent="0">
+              <a:buNone/>
+              <a:defRPr sz="1600" b="1"/>
+            </a:lvl6pPr>
+            <a:lvl7pPr marL="2743200" indent="0">
+              <a:buNone/>
+              <a:defRPr sz="1600" b="1"/>
+            </a:lvl7pPr>
+            <a:lvl8pPr marL="3200400" indent="0">
+              <a:buNone/>
+              <a:defRPr sz="1600" b="1"/>
+            </a:lvl8pPr>
+            <a:lvl9pPr marL="3657600" indent="0">
+              <a:buNone/>
+              <a:defRPr sz="1600" b="1"/>
+            </a:lvl9pPr>
+          </a:lstStyle>
+          <a:p>
+            <a:pPr lvl="0"/>
+            <a:r>
+              <a:rPr lang="en-US"/>
+              <a:t>Click to edit Master text styles</a:t>
+            </a:r>
+          </a:p>
+        </p:txBody>
+      </p:sp>
+      <p:sp>
+        <p:nvSpPr>
+          <p:cNvPr id="23" name="Picture Placeholder 2"/>
+          <p:cNvSpPr>
+            <a:spLocks noGrp="1" noChangeAspect="1"/>
+          </p:cNvSpPr>
+          <p:nvPr>
+            <p:ph type="pic" idx="21"/>
+          </p:nvPr>
+        </p:nvSpPr>
+        <p:spPr>
+          <a:xfrm>
+            <a:off x="4235999" y="2063395"/>
+            <a:ext cx="3310128" cy="1535237"/>
+          </a:xfrm>
+          <a:prstGeom prst="roundRect">
+            <a:avLst>
+              <a:gd name="adj" fmla="val 0"/>
+            </a:avLst>
+          </a:prstGeom>
+          <a:ln w="57150" cmpd="thinThick">
+            <a:solidFill>
+              <a:schemeClr val="bg1">
+                <a:lumMod val="50000"/>
+              </a:schemeClr>
+            </a:solidFill>
+            <a:miter lim="800000"/>
+          </a:ln>
+        </p:spPr>
+        <p:txBody>
+          <a:bodyPr anchor="t">
+            <a:normAutofit/>
+          </a:bodyPr>
+          <a:lstStyle>
+            <a:lvl1pPr marL="0" indent="0" algn="ctr">
+              <a:buNone/>
+              <a:defRPr sz="1600"/>
+            </a:lvl1pPr>
+            <a:lvl2pPr marL="457200" indent="0">
+              <a:buNone/>
+              <a:defRPr sz="1600"/>
+            </a:lvl2pPr>
+            <a:lvl3pPr marL="914400" indent="0">
+              <a:buNone/>
+              <a:defRPr sz="1600"/>
+            </a:lvl3pPr>
+            <a:lvl4pPr marL="1371600" indent="0">
+              <a:buNone/>
+              <a:defRPr sz="1600"/>
+            </a:lvl4pPr>
+            <a:lvl5pPr marL="1828800" indent="0">
+              <a:buNone/>
+              <a:defRPr sz="1600"/>
+            </a:lvl5pPr>
+            <a:lvl6pPr marL="2286000" indent="0">
+              <a:buNone/>
+              <a:defRPr sz="1600"/>
+            </a:lvl6pPr>
+            <a:lvl7pPr marL="2743200" indent="0">
+              <a:buNone/>
+              <a:defRPr sz="1600"/>
+            </a:lvl7pPr>
+            <a:lvl8pPr marL="3200400" indent="0">
+              <a:buNone/>
+              <a:defRPr sz="1600"/>
+            </a:lvl8pPr>
+            <a:lvl9pPr marL="3657600" indent="0">
+              <a:buNone/>
+              <a:defRPr sz="1600"/>
+            </a:lvl9pPr>
+          </a:lstStyle>
+          <a:p>
+            <a:r>
+              <a:rPr lang="en-US"/>
+              <a:t>Click icon to add picture</a:t>
+            </a:r>
+            <a:endParaRPr lang="en-US" dirty="0"/>
+          </a:p>
+        </p:txBody>
+      </p:sp>
+      <p:sp>
+        <p:nvSpPr>
+          <p:cNvPr id="24" name="Text Placeholder 3"/>
+          <p:cNvSpPr>
+            <a:spLocks noGrp="1"/>
+          </p:cNvSpPr>
+          <p:nvPr>
+            <p:ph type="body" sz="half" idx="19"/>
+          </p:nvPr>
+        </p:nvSpPr>
+        <p:spPr>
+          <a:xfrm>
+            <a:off x="4235999" y="4389286"/>
+            <a:ext cx="3310128" cy="985300"/>
+          </a:xfrm>
+        </p:spPr>
+        <p:txBody>
+          <a:bodyPr anchor="t">
+            <a:normAutofit/>
+          </a:bodyPr>
+          <a:lstStyle>
+            <a:lvl1pPr marL="0" indent="0" algn="ctr">
+              <a:buNone/>
+              <a:defRPr sz="1400"/>
+            </a:lvl1pPr>
+            <a:lvl2pPr marL="457200" indent="0">
+              <a:buNone/>
+              <a:defRPr sz="1200"/>
+            </a:lvl2pPr>
+            <a:lvl3pPr marL="914400" indent="0">
+              <a:buNone/>
+              <a:defRPr sz="1000"/>
+            </a:lvl3pPr>
+            <a:lvl4pPr marL="1371600" indent="0">
+              <a:buNone/>
+              <a:defRPr sz="900"/>
+            </a:lvl4pPr>
+            <a:lvl5pPr marL="1828800" indent="0">
+              <a:buNone/>
+              <a:defRPr sz="900"/>
+            </a:lvl5pPr>
+            <a:lvl6pPr marL="2286000" indent="0">
+              <a:buNone/>
+              <a:defRPr sz="900"/>
+            </a:lvl6pPr>
+            <a:lvl7pPr marL="2743200" indent="0">
+              <a:buNone/>
+              <a:defRPr sz="900"/>
+            </a:lvl7pPr>
+            <a:lvl8pPr marL="3200400" indent="0">
+              <a:buNone/>
+              <a:defRPr sz="900"/>
+            </a:lvl8pPr>
+            <a:lvl9pPr marL="3657600" indent="0">
+              <a:buNone/>
+              <a:defRPr sz="900"/>
+            </a:lvl9pPr>
+          </a:lstStyle>
+          <a:p>
+            <a:pPr lvl="0"/>
+            <a:r>
+              <a:rPr lang="en-US"/>
+              <a:t>Click to edit Master text styles</a:t>
+            </a:r>
+          </a:p>
+        </p:txBody>
+      </p:sp>
+      <p:sp>
+        <p:nvSpPr>
+          <p:cNvPr id="25" name="Text Placeholder 4"/>
+          <p:cNvSpPr>
+            <a:spLocks noGrp="1"/>
+          </p:cNvSpPr>
+          <p:nvPr>
+            <p:ph type="body" sz="quarter" idx="13"/>
+          </p:nvPr>
+        </p:nvSpPr>
+        <p:spPr>
+          <a:xfrm>
+            <a:off x="7768944" y="3813025"/>
+            <a:ext cx="3310128" cy="576262"/>
+          </a:xfrm>
+        </p:spPr>
+        <p:txBody>
+          <a:bodyPr anchor="b">
+            <a:noAutofit/>
+          </a:bodyPr>
+          <a:lstStyle>
+            <a:lvl1pPr marL="0" indent="0" algn="ctr">
+              <a:lnSpc>
+                <a:spcPct val="90000"/>
+              </a:lnSpc>
+              <a:buNone/>
+              <a:defRPr sz="2200" b="0">
+                <a:solidFill>
+                  <a:schemeClr val="accent1"/>
+                </a:solidFill>
+              </a:defRPr>
+            </a:lvl1pPr>
+            <a:lvl2pPr marL="457200" indent="0">
+              <a:buNone/>
+              <a:defRPr sz="2000" b="1"/>
+            </a:lvl2pPr>
+            <a:lvl3pPr marL="914400" indent="0">
+              <a:buNone/>
+              <a:defRPr sz="1800" b="1"/>
+            </a:lvl3pPr>
+            <a:lvl4pPr marL="1371600" indent="0">
+              <a:buNone/>
+              <a:defRPr sz="1600" b="1"/>
+            </a:lvl4pPr>
+            <a:lvl5pPr marL="1828800" indent="0">
+              <a:buNone/>
+              <a:defRPr sz="1600" b="1"/>
+            </a:lvl5pPr>
+            <a:lvl6pPr marL="2286000" indent="0">
+              <a:buNone/>
+              <a:defRPr sz="1600" b="1"/>
+            </a:lvl6pPr>
+            <a:lvl7pPr marL="2743200" indent="0">
+              <a:buNone/>
+              <a:defRPr sz="1600" b="1"/>
+            </a:lvl7pPr>
+            <a:lvl8pPr marL="3200400" indent="0">
+              <a:buNone/>
+              <a:defRPr sz="1600" b="1"/>
+            </a:lvl8pPr>
+            <a:lvl9pPr marL="3657600" indent="0">
+              <a:buNone/>
+              <a:defRPr sz="1600" b="1"/>
+            </a:lvl9pPr>
+          </a:lstStyle>
+          <a:p>
+            <a:pPr lvl="0"/>
+            <a:r>
+              <a:rPr lang="en-US"/>
+              <a:t>Click to edit Master text styles</a:t>
+            </a:r>
+          </a:p>
+        </p:txBody>
+      </p:sp>
+      <p:sp>
+        <p:nvSpPr>
+          <p:cNvPr id="26" name="Picture Placeholder 2"/>
+          <p:cNvSpPr>
+            <a:spLocks noGrp="1" noChangeAspect="1"/>
+          </p:cNvSpPr>
+          <p:nvPr>
+            <p:ph type="pic" idx="22"/>
+          </p:nvPr>
+        </p:nvSpPr>
+        <p:spPr>
+          <a:xfrm>
+            <a:off x="7768819" y="2063394"/>
+            <a:ext cx="3310128" cy="1537196"/>
+          </a:xfrm>
+          <a:prstGeom prst="roundRect">
+            <a:avLst>
+              <a:gd name="adj" fmla="val 0"/>
+            </a:avLst>
+          </a:prstGeom>
+          <a:ln w="57150" cmpd="thinThick">
+            <a:solidFill>
+              <a:schemeClr val="bg1">
+                <a:lumMod val="50000"/>
+              </a:schemeClr>
+            </a:solidFill>
+            <a:miter lim="800000"/>
+          </a:ln>
+        </p:spPr>
+        <p:txBody>
+          <a:bodyPr anchor="t">
+            <a:normAutofit/>
+          </a:bodyPr>
+          <a:lstStyle>
+            <a:lvl1pPr marL="0" indent="0" algn="ctr">
+              <a:buNone/>
+              <a:defRPr sz="1600"/>
+            </a:lvl1pPr>
+            <a:lvl2pPr marL="457200" indent="0">
+              <a:buNone/>
+              <a:defRPr sz="1600"/>
+            </a:lvl2pPr>
+            <a:lvl3pPr marL="914400" indent="0">
+              <a:buNone/>
+              <a:defRPr sz="1600"/>
+            </a:lvl3pPr>
+            <a:lvl4pPr marL="1371600" indent="0">
+              <a:buNone/>
+              <a:defRPr sz="1600"/>
+            </a:lvl4pPr>
+            <a:lvl5pPr marL="1828800" indent="0">
+              <a:buNone/>
+              <a:defRPr sz="1600"/>
+            </a:lvl5pPr>
+            <a:lvl6pPr marL="2286000" indent="0">
+              <a:buNone/>
+              <a:defRPr sz="1600"/>
+            </a:lvl6pPr>
+            <a:lvl7pPr marL="2743200" indent="0">
+              <a:buNone/>
+              <a:defRPr sz="1600"/>
+            </a:lvl7pPr>
+            <a:lvl8pPr marL="3200400" indent="0">
+              <a:buNone/>
+              <a:defRPr sz="1600"/>
+            </a:lvl8pPr>
+            <a:lvl9pPr marL="3657600" indent="0">
+              <a:buNone/>
+              <a:defRPr sz="1600"/>
+            </a:lvl9pPr>
+          </a:lstStyle>
+          <a:p>
+            <a:r>
+              <a:rPr lang="en-US"/>
+              <a:t>Click icon to add picture</a:t>
+            </a:r>
+            <a:endParaRPr lang="en-US" dirty="0"/>
+          </a:p>
+        </p:txBody>
+      </p:sp>
+      <p:sp>
+        <p:nvSpPr>
+          <p:cNvPr id="27" name="Text Placeholder 3"/>
+          <p:cNvSpPr>
+            <a:spLocks noGrp="1"/>
+          </p:cNvSpPr>
+          <p:nvPr>
+            <p:ph type="body" sz="half" idx="20"/>
+          </p:nvPr>
+        </p:nvSpPr>
+        <p:spPr>
+          <a:xfrm>
+            <a:off x="7768819" y="4389284"/>
+            <a:ext cx="3310128" cy="985302"/>
+          </a:xfrm>
+        </p:spPr>
+        <p:txBody>
+          <a:bodyPr anchor="t">
+            <a:normAutofit/>
+          </a:bodyPr>
+          <a:lstStyle>
+            <a:lvl1pPr marL="0" indent="0" algn="ctr">
+              <a:buNone/>
+              <a:defRPr sz="1400"/>
+            </a:lvl1pPr>
+            <a:lvl2pPr marL="457200" indent="0">
+              <a:buNone/>
+              <a:defRPr sz="1200"/>
+            </a:lvl2pPr>
+            <a:lvl3pPr marL="914400" indent="0">
+              <a:buNone/>
+              <a:defRPr sz="1000"/>
+            </a:lvl3pPr>
+            <a:lvl4pPr marL="1371600" indent="0">
+              <a:buNone/>
+              <a:defRPr sz="900"/>
+            </a:lvl4pPr>
+            <a:lvl5pPr marL="1828800" indent="0">
+              <a:buNone/>
+              <a:defRPr sz="900"/>
+            </a:lvl5pPr>
+            <a:lvl6pPr marL="2286000" indent="0">
+              <a:buNone/>
+              <a:defRPr sz="900"/>
+            </a:lvl6pPr>
+            <a:lvl7pPr marL="2743200" indent="0">
+              <a:buNone/>
+              <a:defRPr sz="900"/>
+            </a:lvl7pPr>
+            <a:lvl8pPr marL="3200400" indent="0">
+              <a:buNone/>
+              <a:defRPr sz="900"/>
+            </a:lvl8pPr>
+            <a:lvl9pPr marL="3657600" indent="0">
+              <a:buNone/>
+              <a:defRPr sz="900"/>
+            </a:lvl9pPr>
+          </a:lstStyle>
+          <a:p>
+            <a:pPr lvl="0"/>
+            <a:r>
+              <a:rPr lang="en-US"/>
+              <a:t>Click to edit Master text styles</a:t>
+            </a:r>
+          </a:p>
+        </p:txBody>
+      </p:sp>
+      <p:sp>
+        <p:nvSpPr>
+          <p:cNvPr id="3" name="Date Placeholder 2"/>
+          <p:cNvSpPr>
+            <a:spLocks noGrp="1"/>
+          </p:cNvSpPr>
+          <p:nvPr>
+            <p:ph type="dt" sz="half" idx="10"/>
+          </p:nvPr>
+        </p:nvSpPr>
+        <p:spPr/>
+        <p:txBody>
+          <a:bodyPr/>
+          <a:lstStyle/>
+          <a:p>
+            <a:fld id="{B27686C4-3AB5-4E0C-86CA-FB108C350AA9}" type="datetimeFigureOut">
+              <a:rPr lang="en-US" dirty="0"/>
+              <a:t>6/5/2026</a:t>
+            </a:fld>
+            <a:endParaRPr lang="en-US" dirty="0"/>
+          </a:p>
+        </p:txBody>
+      </p:sp>
+      <p:sp>
+        <p:nvSpPr>
+          <p:cNvPr id="4" name="Footer Placeholder 3"/>
+          <p:cNvSpPr>
+            <a:spLocks noGrp="1"/>
+          </p:cNvSpPr>
+          <p:nvPr>
+            <p:ph type="ftr" sz="quarter" idx="11"/>
+          </p:nvPr>
+        </p:nvSpPr>
+        <p:spPr/>
+        <p:txBody>
+          <a:bodyPr/>
+          <a:lstStyle/>
+          <a:p>
+            <a:endParaRPr lang="en-US" dirty="0"/>
+          </a:p>
+        </p:txBody>
+      </p:sp>
+      <p:sp>
+        <p:nvSpPr>
+          <p:cNvPr id="5" name="Slide Number Placeholder 4"/>
+          <p:cNvSpPr>
+            <a:spLocks noGrp="1"/>
+          </p:cNvSpPr>
+          <p:nvPr>
+            <p:ph type="sldNum" sz="quarter" idx="12"/>
+          </p:nvPr>
+        </p:nvSpPr>
+        <p:spPr/>
+        <p:txBody>
+          <a:bodyPr/>
+          <a:lstStyle/>
+          <a:p>
+            <a:fld id="{6D22F896-40B5-4ADD-8801-0D06FADFA095}" type="slidenum">
+              <a:rPr lang="en-US" dirty="0"/>
+              <a:t>‹#›</a:t>
+            </a:fld>
+            <a:endParaRPr lang="en-US" dirty="0"/>
+          </a:p>
+        </p:txBody>
+      </p:sp>
+    </p:spTree>
+    <p:extLst>
+      <p:ext uri="{BB962C8B-B14F-4D97-AF65-F5344CB8AC3E}">
+        <p14:creationId xmlns:p14="http://schemas.microsoft.com/office/powerpoint/2010/main" val="4056998563"/>
+      </p:ext>
+    </p:extLst>
+  </p:cSld>
+  <p:clrMapOvr>
+    <a:masterClrMapping/>
+  </p:clrMapOvr>
+</p:sldLayout>
+</file>
+
+<file path=ppt/slideLayouts/slideLayout16.xml><?xml version="1.0" encoding="utf-8"?>
+<p:sldLayout xmlns:a="http://schemas.openxmlformats.org/drawingml/2006/main" xmlns:r="http://schemas.openxmlformats.org/officeDocument/2006/relationships" xmlns:p="http://schemas.openxmlformats.org/presentationml/2006/main" type="vertTx" preserve="1">
+  <p:cSld name="Title and Vertical Text">
+    <p:spTree>
+      <p:nvGrpSpPr>
+        <p:cNvPr id="1" name=""/>
+        <p:cNvGrpSpPr/>
+        <p:nvPr/>
+      </p:nvGrpSpPr>
+      <p:grpSpPr>
+        <a:xfrm>
+          <a:off x="0" y="0"/>
+          <a:ext cx="0" cy="0"/>
+          <a:chOff x="0" y="0"/>
+          <a:chExt cx="0" cy="0"/>
+        </a:xfrm>
+      </p:grpSpPr>
+      <p:sp>
+        <p:nvSpPr>
+          <p:cNvPr id="2" name="Title 1"/>
+          <p:cNvSpPr>
+            <a:spLocks noGrp="1"/>
+          </p:cNvSpPr>
+          <p:nvPr>
+            <p:ph type="title"/>
+          </p:nvPr>
+        </p:nvSpPr>
+        <p:spPr/>
+        <p:txBody>
+          <a:bodyPr/>
+          <a:lstStyle>
+            <a:lvl1pPr algn="r">
+              <a:defRPr/>
+            </a:lvl1pPr>
+          </a:lstStyle>
+          <a:p>
+            <a:r>
+              <a:rPr lang="en-US"/>
+              <a:t>Click to edit Master title style</a:t>
+            </a:r>
+            <a:endParaRPr lang="en-US" dirty="0"/>
+          </a:p>
+        </p:txBody>
+      </p:sp>
+      <p:sp>
+        <p:nvSpPr>
+          <p:cNvPr id="11" name="Vertical Text Placeholder 2"/>
+          <p:cNvSpPr>
+            <a:spLocks noGrp="1"/>
+          </p:cNvSpPr>
+          <p:nvPr>
+            <p:ph type="body" orient="vert" sz="quarter" idx="13"/>
+          </p:nvPr>
+        </p:nvSpPr>
+        <p:spPr>
+          <a:xfrm>
+            <a:off x="685800" y="2063396"/>
+            <a:ext cx="10394707" cy="3311190"/>
+          </a:xfrm>
+        </p:spPr>
+        <p:txBody>
+          <a:bodyPr vert="eaVert" anchor="t"/>
+          <a:lstStyle/>
+          <a:p>
+            <a:pPr lvl="0"/>
+            <a:r>
+              <a:rPr lang="en-US"/>
+              <a:t>Click to edit Master text styles</a:t>
+            </a:r>
+          </a:p>
+          <a:p>
+            <a:pPr lvl="1"/>
+            <a:r>
+              <a:rPr lang="en-US"/>
+              <a:t>Second level</a:t>
+            </a:r>
+          </a:p>
+          <a:p>
+            <a:pPr lvl="2"/>
+            <a:r>
+              <a:rPr lang="en-US"/>
+              <a:t>Third level</a:t>
+            </a:r>
+          </a:p>
+          <a:p>
+            <a:pPr lvl="3"/>
+            <a:r>
+              <a:rPr lang="en-US"/>
+              <a:t>Fourth level</a:t>
+            </a:r>
+          </a:p>
+          <a:p>
+            <a:pPr lvl="4"/>
+            <a:r>
+              <a:rPr lang="en-US"/>
+              <a:t>Fifth level</a:t>
+            </a:r>
+            <a:endParaRPr lang="en-US" dirty="0"/>
+          </a:p>
+        </p:txBody>
+      </p:sp>
+      <p:sp>
+        <p:nvSpPr>
+          <p:cNvPr id="4" name="Date Placeholder 3"/>
+          <p:cNvSpPr>
+            <a:spLocks noGrp="1"/>
+          </p:cNvSpPr>
+          <p:nvPr>
+            <p:ph type="dt" sz="half" idx="10"/>
+          </p:nvPr>
+        </p:nvSpPr>
+        <p:spPr/>
+        <p:txBody>
+          <a:bodyPr/>
+          <a:lstStyle/>
+          <a:p>
+            <a:fld id="{49FF1211-4E0C-4AB3-B04F-585959BDAFE8}" type="datetimeFigureOut">
+              <a:rPr lang="en-US" dirty="0"/>
+              <a:t>6/5/2026</a:t>
+            </a:fld>
+            <a:endParaRPr lang="en-US" dirty="0"/>
+          </a:p>
+        </p:txBody>
+      </p:sp>
+      <p:sp>
+        <p:nvSpPr>
+          <p:cNvPr id="5" name="Footer Placeholder 4"/>
+          <p:cNvSpPr>
+            <a:spLocks noGrp="1"/>
+          </p:cNvSpPr>
+          <p:nvPr>
+            <p:ph type="ftr" sz="quarter" idx="11"/>
+          </p:nvPr>
+        </p:nvSpPr>
+        <p:spPr/>
+        <p:txBody>
+          <a:bodyPr/>
+          <a:lstStyle/>
+          <a:p>
+            <a:endParaRPr lang="en-US" dirty="0"/>
+          </a:p>
+        </p:txBody>
+      </p:sp>
+      <p:sp>
+        <p:nvSpPr>
+          <p:cNvPr id="6" name="Slide Number Placeholder 5"/>
+          <p:cNvSpPr>
+            <a:spLocks noGrp="1"/>
+          </p:cNvSpPr>
+          <p:nvPr>
+            <p:ph type="sldNum" sz="quarter" idx="12"/>
+          </p:nvPr>
+        </p:nvSpPr>
+        <p:spPr/>
+        <p:txBody>
+          <a:bodyPr/>
+          <a:lstStyle/>
+          <a:p>
+            <a:fld id="{6D22F896-40B5-4ADD-8801-0D06FADFA095}" type="slidenum">
+              <a:rPr lang="en-US" dirty="0"/>
+              <a:t>‹#›</a:t>
+            </a:fld>
+            <a:endParaRPr lang="en-US" dirty="0"/>
+          </a:p>
+        </p:txBody>
+      </p:sp>
+    </p:spTree>
+    <p:extLst>
+      <p:ext uri="{BB962C8B-B14F-4D97-AF65-F5344CB8AC3E}">
+        <p14:creationId xmlns:p14="http://schemas.microsoft.com/office/powerpoint/2010/main" val="3779663217"/>
+      </p:ext>
+    </p:extLst>
+  </p:cSld>
+  <p:clrMapOvr>
+    <a:masterClrMapping/>
+  </p:clrMapOvr>
+</p:sldLayout>
+</file>
+
+<file path=ppt/slideLayouts/slideLayout17.xml><?xml version="1.0" encoding="utf-8"?>
+<p:sldLayout xmlns:a="http://schemas.openxmlformats.org/drawingml/2006/main" xmlns:r="http://schemas.openxmlformats.org/officeDocument/2006/relationships" xmlns:p="http://schemas.openxmlformats.org/presentationml/2006/main" type="vertTitleAndTx" preserve="1">
+  <p:cSld name="Vertical Title and Text">
+    <p:spTree>
+      <p:nvGrpSpPr>
+        <p:cNvPr id="1" name=""/>
+        <p:cNvGrpSpPr/>
+        <p:nvPr/>
+      </p:nvGrpSpPr>
+      <p:grpSpPr>
+        <a:xfrm>
+          <a:off x="0" y="0"/>
+          <a:ext cx="0" cy="0"/>
+          <a:chOff x="0" y="0"/>
+          <a:chExt cx="0" cy="0"/>
+        </a:xfrm>
+      </p:grpSpPr>
+      <p:sp>
+        <p:nvSpPr>
+          <p:cNvPr id="2" name="Vertical Title 1"/>
+          <p:cNvSpPr>
+            <a:spLocks noGrp="1"/>
+          </p:cNvSpPr>
+          <p:nvPr>
+            <p:ph type="title" orient="vert"/>
+          </p:nvPr>
+        </p:nvSpPr>
+        <p:spPr>
+          <a:xfrm>
+            <a:off x="8815862" y="685800"/>
+            <a:ext cx="2264646" cy="4688785"/>
+          </a:xfrm>
+        </p:spPr>
+        <p:txBody>
+          <a:bodyPr vert="eaVert"/>
+          <a:lstStyle>
+            <a:lvl1pPr algn="l">
+              <a:defRPr/>
+            </a:lvl1pPr>
+          </a:lstStyle>
+          <a:p>
+            <a:r>
+              <a:rPr lang="en-US"/>
+              <a:t>Click to edit Master title style</a:t>
+            </a:r>
+            <a:endParaRPr lang="en-US" dirty="0"/>
+          </a:p>
+        </p:txBody>
+      </p:sp>
+      <p:sp>
+        <p:nvSpPr>
+          <p:cNvPr id="8" name="Vertical Text Placeholder 2"/>
+          <p:cNvSpPr>
+            <a:spLocks noGrp="1"/>
+          </p:cNvSpPr>
+          <p:nvPr>
+            <p:ph type="body" orient="vert" sz="quarter" idx="13"/>
+          </p:nvPr>
+        </p:nvSpPr>
+        <p:spPr>
+          <a:xfrm>
+            <a:off x="685800" y="685800"/>
+            <a:ext cx="7904431" cy="4688785"/>
+          </a:xfrm>
+        </p:spPr>
+        <p:txBody>
+          <a:bodyPr vert="eaVert" anchor="t"/>
+          <a:lstStyle/>
+          <a:p>
+            <a:pPr lvl="0"/>
+            <a:r>
+              <a:rPr lang="en-US"/>
+              <a:t>Click to edit Master text styles</a:t>
+            </a:r>
+          </a:p>
+          <a:p>
+            <a:pPr lvl="1"/>
+            <a:r>
+              <a:rPr lang="en-US"/>
+              <a:t>Second level</a:t>
+            </a:r>
+          </a:p>
+          <a:p>
+            <a:pPr lvl="2"/>
+            <a:r>
+              <a:rPr lang="en-US"/>
+              <a:t>Third level</a:t>
+            </a:r>
+          </a:p>
+          <a:p>
+            <a:pPr lvl="3"/>
+            <a:r>
+              <a:rPr lang="en-US"/>
+              <a:t>Fourth level</a:t>
+            </a:r>
+          </a:p>
+          <a:p>
+            <a:pPr lvl="4"/>
+            <a:r>
+              <a:rPr lang="en-US"/>
+              <a:t>Fifth level</a:t>
+            </a:r>
+            <a:endParaRPr lang="en-US" dirty="0"/>
+          </a:p>
+        </p:txBody>
+      </p:sp>
+      <p:sp>
+        <p:nvSpPr>
+          <p:cNvPr id="4" name="Date Placeholder 3"/>
+          <p:cNvSpPr>
+            <a:spLocks noGrp="1"/>
+          </p:cNvSpPr>
+          <p:nvPr>
+            <p:ph type="dt" sz="half" idx="10"/>
+          </p:nvPr>
+        </p:nvSpPr>
+        <p:spPr/>
+        <p:txBody>
+          <a:bodyPr/>
+          <a:lstStyle/>
+          <a:p>
+            <a:fld id="{28BDECAF-D3BE-4069-9C78-642ECCD01477}" type="datetimeFigureOut">
+              <a:rPr lang="en-US" dirty="0"/>
+              <a:t>6/5/2026</a:t>
+            </a:fld>
+            <a:endParaRPr lang="en-US" dirty="0"/>
+          </a:p>
+        </p:txBody>
+      </p:sp>
+      <p:sp>
+        <p:nvSpPr>
+          <p:cNvPr id="5" name="Footer Placeholder 4"/>
+          <p:cNvSpPr>
+            <a:spLocks noGrp="1"/>
+          </p:cNvSpPr>
+          <p:nvPr>
+            <p:ph type="ftr" sz="quarter" idx="11"/>
+          </p:nvPr>
+        </p:nvSpPr>
+        <p:spPr/>
+        <p:txBody>
+          <a:bodyPr/>
+          <a:lstStyle/>
+          <a:p>
+            <a:endParaRPr lang="en-US" dirty="0"/>
+          </a:p>
+        </p:txBody>
+      </p:sp>
+      <p:sp>
+        <p:nvSpPr>
+          <p:cNvPr id="6" name="Slide Number Placeholder 5"/>
+          <p:cNvSpPr>
+            <a:spLocks noGrp="1"/>
+          </p:cNvSpPr>
+          <p:nvPr>
+            <p:ph type="sldNum" sz="quarter" idx="12"/>
+          </p:nvPr>
+        </p:nvSpPr>
+        <p:spPr/>
+        <p:txBody>
+          <a:bodyPr/>
+          <a:lstStyle/>
+          <a:p>
+            <a:fld id="{6D22F896-40B5-4ADD-8801-0D06FADFA095}" type="slidenum">
+              <a:rPr lang="en-US" dirty="0"/>
+              <a:t>‹#›</a:t>
+            </a:fld>
+            <a:endParaRPr lang="en-US" dirty="0"/>
+          </a:p>
+        </p:txBody>
+      </p:sp>
+    </p:spTree>
+    <p:extLst>
+      <p:ext uri="{BB962C8B-B14F-4D97-AF65-F5344CB8AC3E}">
+        <p14:creationId xmlns:p14="http://schemas.microsoft.com/office/powerpoint/2010/main" val="3312350870"/>
+      </p:ext>
+    </p:extLst>
+  </p:cSld>
+  <p:clrMapOvr>
+    <a:masterClrMapping/>
+  </p:clrMapOvr>
+</p:sldLayout>
+</file>
+
+<file path=ppt/slideLayouts/slideLayout18.xml><?xml version="1.0" encoding="utf-8"?>
+<p:sldLayout xmlns:a="http://schemas.openxmlformats.org/drawingml/2006/main" xmlns:r="http://schemas.openxmlformats.org/officeDocument/2006/relationships" xmlns:p="http://schemas.openxmlformats.org/presentationml/2006/main" type="obj">
+  <p:cSld name="1_Title and Content">
+    <p:spTree>
+      <p:nvGrpSpPr>
+        <p:cNvPr id="1" name=""/>
+        <p:cNvGrpSpPr/>
+        <p:nvPr/>
+      </p:nvGrpSpPr>
+      <p:grpSpPr>
+        <a:xfrm>
+          <a:off x="0" y="0"/>
+          <a:ext cx="0" cy="0"/>
+          <a:chOff x="0" y="0"/>
+          <a:chExt cx="0" cy="0"/>
+        </a:xfrm>
+      </p:grpSpPr>
       <p:sp>
         <p:nvSpPr>
           <p:cNvPr id="2" name="Title">
             <a:extLst>
               <a:ext uri="{FF2B5EF4-FFF2-40B4-BE49-F238E27FC236}">
-                <a16:creationId xmlns:a16="http://schemas.microsoft.com/office/drawing/2014/main" id="{27117B4D-F55B-07E8-1103-ABCA060EB175}"/>
+                <a16:creationId xmlns:a16="http://schemas.microsoft.com/office/drawing/2014/main" id="{FC3A8FBD-1A0C-8D7A-ED79-054BF73C11EF}"/>
               </a:ext>
             </a:extLst>
           </p:cNvPr>
@@ -144,22 +3588,13 @@
             <a:spLocks noGrp="1"/>
           </p:cNvSpPr>
           <p:nvPr>
-            <p:ph type="ctrTitle"/>
-          </p:nvPr>
-        </p:nvSpPr>
-        <p:spPr>
-          <a:xfrm>
-            <a:off x="1524000" y="1122363"/>
-            <a:ext cx="9144000" cy="2387600"/>
-          </a:xfrm>
-        </p:spPr>
-        <p:txBody>
-          <a:bodyPr anchor="b"/>
-          <a:lstStyle>
-            <a:lvl1pPr algn="ctr">
-              <a:defRPr sz="6000"/>
-            </a:lvl1pPr>
-          </a:lstStyle>
+            <p:ph type="title"/>
+          </p:nvPr>
+        </p:nvSpPr>
+        <p:spPr/>
+        <p:txBody>
+          <a:bodyPr/>
+          <a:lstStyle/>
           <a:p>
             <a:r>
               <a:rPr lang="en-US"/>
@@ -171,10 +3606,10 @@
       </p:sp>
       <p:sp>
         <p:nvSpPr>
-          <p:cNvPr id="3" name="Subtitle">
+          <p:cNvPr id="3" name="Body">
             <a:extLst>
               <a:ext uri="{FF2B5EF4-FFF2-40B4-BE49-F238E27FC236}">
-                <a16:creationId xmlns:a16="http://schemas.microsoft.com/office/drawing/2014/main" id="{2103747F-2B09-8BEE-9234-36E91841637D}"/>
+                <a16:creationId xmlns:a16="http://schemas.microsoft.com/office/drawing/2014/main" id="{79B38F65-7A12-DE63-C507-20F8AF05708B}"/>
               </a:ext>
             </a:extLst>
           </p:cNvPr>
@@ -182,59 +3617,46 @@
             <a:spLocks noGrp="1"/>
           </p:cNvSpPr>
           <p:nvPr>
-            <p:ph type="subTitle" idx="1"/>
-          </p:nvPr>
-        </p:nvSpPr>
-        <p:spPr>
-          <a:xfrm>
-            <a:off x="1524000" y="3602038"/>
-            <a:ext cx="9144000" cy="1655762"/>
-          </a:xfrm>
-        </p:spPr>
+            <p:ph idx="1"/>
+          </p:nvPr>
+        </p:nvSpPr>
+        <p:spPr/>
         <p:txBody>
           <a:bodyPr/>
-          <a:lstStyle>
-            <a:lvl1pPr marL="0" indent="0" algn="ctr">
-              <a:buNone/>
-              <a:defRPr sz="2400"/>
-            </a:lvl1pPr>
-            <a:lvl2pPr marL="457200" indent="0" algn="ctr">
-              <a:buNone/>
-              <a:defRPr sz="2000"/>
-            </a:lvl2pPr>
-            <a:lvl3pPr marL="914400" indent="0" algn="ctr">
-              <a:buNone/>
-              <a:defRPr sz="1800"/>
-            </a:lvl3pPr>
-            <a:lvl4pPr marL="1371600" indent="0" algn="ctr">
-              <a:buNone/>
-              <a:defRPr sz="1600"/>
-            </a:lvl4pPr>
-            <a:lvl5pPr marL="1828800" indent="0" algn="ctr">
-              <a:buNone/>
-              <a:defRPr sz="1600"/>
-            </a:lvl5pPr>
-            <a:lvl6pPr marL="2286000" indent="0" algn="ctr">
-              <a:buNone/>
-              <a:defRPr sz="1600"/>
-            </a:lvl6pPr>
-            <a:lvl7pPr marL="2743200" indent="0" algn="ctr">
-              <a:buNone/>
-              <a:defRPr sz="1600"/>
-            </a:lvl7pPr>
-            <a:lvl8pPr marL="3200400" indent="0" algn="ctr">
-              <a:buNone/>
-              <a:defRPr sz="1600"/>
-            </a:lvl8pPr>
-            <a:lvl9pPr marL="3657600" indent="0" algn="ctr">
-              <a:buNone/>
-              <a:defRPr sz="1600"/>
-            </a:lvl9pPr>
-          </a:lstStyle>
-          <a:p>
-            <a:r>
-              <a:rPr lang="en-US"/>
-              <a:t>Click to edit Master subtitle style</a:t>
+          <a:lstStyle/>
+          <a:p>
+            <a:pPr lvl="0"/>
+            <a:r>
+              <a:rPr lang="en-US"/>
+              <a:t>Click to edit Master text styles</a:t>
+            </a:r>
+          </a:p>
+          <a:p>
+            <a:pPr lvl="1"/>
+            <a:r>
+              <a:rPr lang="en-US"/>
+              <a:t>Second level</a:t>
+            </a:r>
+          </a:p>
+          <a:p>
+            <a:pPr lvl="2"/>
+            <a:r>
+              <a:rPr lang="en-US"/>
+              <a:t>Third level</a:t>
+            </a:r>
+          </a:p>
+          <a:p>
+            <a:pPr lvl="3"/>
+            <a:r>
+              <a:rPr lang="en-US"/>
+              <a:t>Fourth level</a:t>
+            </a:r>
+          </a:p>
+          <a:p>
+            <a:pPr lvl="4"/>
+            <a:r>
+              <a:rPr lang="en-US"/>
+              <a:t>Fifth level</a:t>
             </a:r>
             <a:endParaRPr lang="en-GB"/>
           </a:p>
@@ -243,7 +3665,7 @@
     </p:spTree>
     <p:extLst>
       <p:ext uri="{BB962C8B-B14F-4D97-AF65-F5344CB8AC3E}">
-        <p14:creationId xmlns:p14="http://schemas.microsoft.com/office/powerpoint/2010/main" val="2098846355"/>
+        <p14:creationId xmlns:p14="http://schemas.microsoft.com/office/powerpoint/2010/main" val="1104694775"/>
       </p:ext>
     </p:extLst>
   </p:cSld>
@@ -272,13 +3694,7 @@
       </p:grpSpPr>
       <p:sp>
         <p:nvSpPr>
-          <p:cNvPr id="2" name="Title">
-            <a:extLst>
-              <a:ext uri="{FF2B5EF4-FFF2-40B4-BE49-F238E27FC236}">
-                <a16:creationId xmlns:a16="http://schemas.microsoft.com/office/drawing/2014/main" id="{FC3A8FBD-1A0C-8D7A-ED79-054BF73C11EF}"/>
-              </a:ext>
-            </a:extLst>
-          </p:cNvPr>
+          <p:cNvPr id="2" name="Title 1"/>
           <p:cNvSpPr>
             <a:spLocks noGrp="1"/>
           </p:cNvSpPr>
@@ -295,24 +3711,75 @@
               <a:rPr lang="en-US"/>
               <a:t>Click to edit Master title style</a:t>
             </a:r>
-            <a:endParaRPr lang="en-GB"/>
-          </a:p>
-        </p:txBody>
-      </p:sp>
-      <p:sp>
-        <p:nvSpPr>
-          <p:cNvPr id="3" name="Body">
-            <a:extLst>
-              <a:ext uri="{FF2B5EF4-FFF2-40B4-BE49-F238E27FC236}">
-                <a16:creationId xmlns:a16="http://schemas.microsoft.com/office/drawing/2014/main" id="{79B38F65-7A12-DE63-C507-20F8AF05708B}"/>
-              </a:ext>
-            </a:extLst>
-          </p:cNvPr>
-          <p:cNvSpPr>
-            <a:spLocks noGrp="1"/>
-          </p:cNvSpPr>
-          <p:nvPr>
-            <p:ph idx="1"/>
+            <a:endParaRPr lang="en-US" dirty="0"/>
+          </a:p>
+        </p:txBody>
+      </p:sp>
+      <p:sp>
+        <p:nvSpPr>
+          <p:cNvPr id="12" name="Content Placeholder 2"/>
+          <p:cNvSpPr>
+            <a:spLocks noGrp="1"/>
+          </p:cNvSpPr>
+          <p:nvPr>
+            <p:ph sz="quarter" idx="13"/>
+          </p:nvPr>
+        </p:nvSpPr>
+        <p:spPr>
+          <a:xfrm>
+            <a:off x="685800" y="2063396"/>
+            <a:ext cx="10394707" cy="3311189"/>
+          </a:xfrm>
+        </p:spPr>
+        <p:txBody>
+          <a:bodyPr/>
+          <a:lstStyle/>
+          <a:p>
+            <a:pPr lvl="0"/>
+            <a:r>
+              <a:rPr lang="en-US"/>
+              <a:t>Click to edit Master text styles</a:t>
+            </a:r>
+          </a:p>
+          <a:p>
+            <a:pPr lvl="1"/>
+            <a:r>
+              <a:rPr lang="en-US"/>
+              <a:t>Second level</a:t>
+            </a:r>
+          </a:p>
+          <a:p>
+            <a:pPr lvl="2"/>
+            <a:r>
+              <a:rPr lang="en-US"/>
+              <a:t>Third level</a:t>
+            </a:r>
+          </a:p>
+          <a:p>
+            <a:pPr lvl="3"/>
+            <a:r>
+              <a:rPr lang="en-US"/>
+              <a:t>Fourth level</a:t>
+            </a:r>
+          </a:p>
+          <a:p>
+            <a:pPr lvl="4"/>
+            <a:r>
+              <a:rPr lang="en-US"/>
+              <a:t>Fifth level</a:t>
+            </a:r>
+            <a:endParaRPr lang="en-US" dirty="0"/>
+          </a:p>
+        </p:txBody>
+      </p:sp>
+      <p:sp>
+        <p:nvSpPr>
+          <p:cNvPr id="4" name="Date Placeholder 3"/>
+          <p:cNvSpPr>
+            <a:spLocks noGrp="1"/>
+          </p:cNvSpPr>
+          <p:nvPr>
+            <p:ph type="dt" sz="half" idx="10"/>
           </p:nvPr>
         </p:nvSpPr>
         <p:spPr/>
@@ -320,47 +3787,60 @@
           <a:bodyPr/>
           <a:lstStyle/>
           <a:p>
-            <a:pPr lvl="0"/>
-            <a:r>
-              <a:rPr lang="en-US"/>
-              <a:t>Click to edit Master text styles</a:t>
-            </a:r>
-          </a:p>
-          <a:p>
-            <a:pPr lvl="1"/>
-            <a:r>
-              <a:rPr lang="en-US"/>
-              <a:t>Second level</a:t>
-            </a:r>
-          </a:p>
-          <a:p>
-            <a:pPr lvl="2"/>
-            <a:r>
-              <a:rPr lang="en-US"/>
-              <a:t>Third level</a:t>
-            </a:r>
-          </a:p>
-          <a:p>
-            <a:pPr lvl="3"/>
-            <a:r>
-              <a:rPr lang="en-US"/>
-              <a:t>Fourth level</a:t>
-            </a:r>
-          </a:p>
-          <a:p>
-            <a:pPr lvl="4"/>
-            <a:r>
-              <a:rPr lang="en-US"/>
-              <a:t>Fifth level</a:t>
-            </a:r>
-            <a:endParaRPr lang="en-GB"/>
+            <a:fld id="{8EFBDC27-E420-4878-9EE6-7B9656D6442A}" type="datetimeFigureOut">
+              <a:rPr lang="en-US" dirty="0"/>
+              <a:t>6/5/2026</a:t>
+            </a:fld>
+            <a:endParaRPr lang="en-US" dirty="0"/>
+          </a:p>
+        </p:txBody>
+      </p:sp>
+      <p:sp>
+        <p:nvSpPr>
+          <p:cNvPr id="5" name="Footer Placeholder 4"/>
+          <p:cNvSpPr>
+            <a:spLocks noGrp="1"/>
+          </p:cNvSpPr>
+          <p:nvPr>
+            <p:ph type="ftr" sz="quarter" idx="11"/>
+          </p:nvPr>
+        </p:nvSpPr>
+        <p:spPr/>
+        <p:txBody>
+          <a:bodyPr/>
+          <a:lstStyle/>
+          <a:p>
+            <a:endParaRPr lang="en-US" dirty="0"/>
+          </a:p>
+        </p:txBody>
+      </p:sp>
+      <p:sp>
+        <p:nvSpPr>
+          <p:cNvPr id="6" name="Slide Number Placeholder 5"/>
+          <p:cNvSpPr>
+            <a:spLocks noGrp="1"/>
+          </p:cNvSpPr>
+          <p:nvPr>
+            <p:ph type="sldNum" sz="quarter" idx="12"/>
+          </p:nvPr>
+        </p:nvSpPr>
+        <p:spPr/>
+        <p:txBody>
+          <a:bodyPr/>
+          <a:lstStyle/>
+          <a:p>
+            <a:fld id="{6D22F896-40B5-4ADD-8801-0D06FADFA095}" type="slidenum">
+              <a:rPr lang="en-US" dirty="0"/>
+              <a:t>‹#›</a:t>
+            </a:fld>
+            <a:endParaRPr lang="en-US" dirty="0"/>
           </a:p>
         </p:txBody>
       </p:sp>
     </p:spTree>
     <p:extLst>
       <p:ext uri="{BB962C8B-B14F-4D97-AF65-F5344CB8AC3E}">
-        <p14:creationId xmlns:p14="http://schemas.microsoft.com/office/powerpoint/2010/main" val="2102564540"/>
+        <p14:creationId xmlns:p14="http://schemas.microsoft.com/office/powerpoint/2010/main" val="1359146187"/>
       </p:ext>
     </p:extLst>
   </p:cSld>
@@ -371,8 +3851,8 @@
 </file>
 
 <file path=ppt/slideLayouts/slideLayout3.xml><?xml version="1.0" encoding="utf-8"?>
-<p:sldLayout xmlns:a="http://schemas.openxmlformats.org/drawingml/2006/main" xmlns:r="http://schemas.openxmlformats.org/officeDocument/2006/relationships" xmlns:p="http://schemas.openxmlformats.org/presentationml/2006/main" type="obj" preserve="1">
-  <p:cSld name="1_Title and Content">
+<p:sldLayout xmlns:a="http://schemas.openxmlformats.org/drawingml/2006/main" xmlns:r="http://schemas.openxmlformats.org/officeDocument/2006/relationships" xmlns:p="http://schemas.openxmlformats.org/presentationml/2006/main" type="secHead" preserve="1">
+  <p:cSld name="Section Header">
     <p:spTree>
       <p:nvGrpSpPr>
         <p:cNvPr id="1" name=""/>
@@ -389,13 +3869,7 @@
       </p:grpSpPr>
       <p:sp>
         <p:nvSpPr>
-          <p:cNvPr id="2" name="Title">
-            <a:extLst>
-              <a:ext uri="{FF2B5EF4-FFF2-40B4-BE49-F238E27FC236}">
-                <a16:creationId xmlns:a16="http://schemas.microsoft.com/office/drawing/2014/main" id="{FC3A8FBD-1A0C-8D7A-ED79-054BF73C11EF}"/>
-              </a:ext>
-            </a:extLst>
-          </p:cNvPr>
+          <p:cNvPr id="2" name="Title 1"/>
           <p:cNvSpPr>
             <a:spLocks noGrp="1"/>
           </p:cNvSpPr>
@@ -403,33 +3877,182 @@
             <p:ph type="title"/>
           </p:nvPr>
         </p:nvSpPr>
+        <p:spPr>
+          <a:xfrm>
+            <a:off x="685801" y="685800"/>
+            <a:ext cx="10394707" cy="3193487"/>
+          </a:xfrm>
+        </p:spPr>
+        <p:txBody>
+          <a:bodyPr anchor="b">
+            <a:normAutofit/>
+          </a:bodyPr>
+          <a:lstStyle>
+            <a:lvl1pPr algn="l">
+              <a:defRPr sz="5400"/>
+            </a:lvl1pPr>
+          </a:lstStyle>
+          <a:p>
+            <a:r>
+              <a:rPr lang="en-US"/>
+              <a:t>Click to edit Master title style</a:t>
+            </a:r>
+            <a:endParaRPr lang="en-US" dirty="0"/>
+          </a:p>
+        </p:txBody>
+      </p:sp>
+      <p:sp>
+        <p:nvSpPr>
+          <p:cNvPr id="3" name="Text Placeholder 2"/>
+          <p:cNvSpPr>
+            <a:spLocks noGrp="1"/>
+          </p:cNvSpPr>
+          <p:nvPr>
+            <p:ph type="body" idx="1"/>
+          </p:nvPr>
+        </p:nvSpPr>
+        <p:spPr>
+          <a:xfrm>
+            <a:off x="685801" y="3742267"/>
+            <a:ext cx="10394707" cy="1639614"/>
+          </a:xfrm>
+        </p:spPr>
+        <p:txBody>
+          <a:bodyPr anchor="t">
+            <a:normAutofit/>
+          </a:bodyPr>
+          <a:lstStyle>
+            <a:lvl1pPr marL="0" indent="0" algn="l">
+              <a:buNone/>
+              <a:defRPr sz="2000">
+                <a:solidFill>
+                  <a:schemeClr val="bg1">
+                    <a:lumMod val="50000"/>
+                  </a:schemeClr>
+                </a:solidFill>
+              </a:defRPr>
+            </a:lvl1pPr>
+            <a:lvl2pPr marL="457200" indent="0">
+              <a:buNone/>
+              <a:defRPr sz="2000">
+                <a:solidFill>
+                  <a:schemeClr val="tx1">
+                    <a:tint val="75000"/>
+                  </a:schemeClr>
+                </a:solidFill>
+              </a:defRPr>
+            </a:lvl2pPr>
+            <a:lvl3pPr marL="914400" indent="0">
+              <a:buNone/>
+              <a:defRPr sz="1800">
+                <a:solidFill>
+                  <a:schemeClr val="tx1">
+                    <a:tint val="75000"/>
+                  </a:schemeClr>
+                </a:solidFill>
+              </a:defRPr>
+            </a:lvl3pPr>
+            <a:lvl4pPr marL="1371600" indent="0">
+              <a:buNone/>
+              <a:defRPr sz="1600">
+                <a:solidFill>
+                  <a:schemeClr val="tx1">
+                    <a:tint val="75000"/>
+                  </a:schemeClr>
+                </a:solidFill>
+              </a:defRPr>
+            </a:lvl4pPr>
+            <a:lvl5pPr marL="1828800" indent="0">
+              <a:buNone/>
+              <a:defRPr sz="1600">
+                <a:solidFill>
+                  <a:schemeClr val="tx1">
+                    <a:tint val="75000"/>
+                  </a:schemeClr>
+                </a:solidFill>
+              </a:defRPr>
+            </a:lvl5pPr>
+            <a:lvl6pPr marL="2286000" indent="0">
+              <a:buNone/>
+              <a:defRPr sz="1600">
+                <a:solidFill>
+                  <a:schemeClr val="tx1">
+                    <a:tint val="75000"/>
+                  </a:schemeClr>
+                </a:solidFill>
+              </a:defRPr>
+            </a:lvl6pPr>
+            <a:lvl7pPr marL="2743200" indent="0">
+              <a:buNone/>
+              <a:defRPr sz="1600">
+                <a:solidFill>
+                  <a:schemeClr val="tx1">
+                    <a:tint val="75000"/>
+                  </a:schemeClr>
+                </a:solidFill>
+              </a:defRPr>
+            </a:lvl7pPr>
+            <a:lvl8pPr marL="3200400" indent="0">
+              <a:buNone/>
+              <a:defRPr sz="1600">
+                <a:solidFill>
+                  <a:schemeClr val="tx1">
+                    <a:tint val="75000"/>
+                  </a:schemeClr>
+                </a:solidFill>
+              </a:defRPr>
+            </a:lvl8pPr>
+            <a:lvl9pPr marL="3657600" indent="0">
+              <a:buNone/>
+              <a:defRPr sz="1600">
+                <a:solidFill>
+                  <a:schemeClr val="tx1">
+                    <a:tint val="75000"/>
+                  </a:schemeClr>
+                </a:solidFill>
+              </a:defRPr>
+            </a:lvl9pPr>
+          </a:lstStyle>
+          <a:p>
+            <a:pPr lvl="0"/>
+            <a:r>
+              <a:rPr lang="en-US"/>
+              <a:t>Click to edit Master text styles</a:t>
+            </a:r>
+          </a:p>
+        </p:txBody>
+      </p:sp>
+      <p:sp>
+        <p:nvSpPr>
+          <p:cNvPr id="4" name="Date Placeholder 3"/>
+          <p:cNvSpPr>
+            <a:spLocks noGrp="1"/>
+          </p:cNvSpPr>
+          <p:nvPr>
+            <p:ph type="dt" sz="half" idx="10"/>
+          </p:nvPr>
+        </p:nvSpPr>
         <p:spPr/>
         <p:txBody>
           <a:bodyPr/>
           <a:lstStyle/>
           <a:p>
-            <a:r>
-              <a:rPr lang="en-US"/>
-              <a:t>Click to edit Master title style</a:t>
-            </a:r>
-            <a:endParaRPr lang="en-GB"/>
-          </a:p>
-        </p:txBody>
-      </p:sp>
-      <p:sp>
-        <p:nvSpPr>
-          <p:cNvPr id="3" name="Body">
-            <a:extLst>
-              <a:ext uri="{FF2B5EF4-FFF2-40B4-BE49-F238E27FC236}">
-                <a16:creationId xmlns:a16="http://schemas.microsoft.com/office/drawing/2014/main" id="{79B38F65-7A12-DE63-C507-20F8AF05708B}"/>
-              </a:ext>
-            </a:extLst>
-          </p:cNvPr>
-          <p:cNvSpPr>
-            <a:spLocks noGrp="1"/>
-          </p:cNvSpPr>
-          <p:nvPr>
-            <p:ph idx="1"/>
+            <a:fld id="{0F7F47CF-67C9-420C-80A5-E2069FF0C2DF}" type="datetimeFigureOut">
+              <a:rPr lang="en-US" dirty="0"/>
+              <a:t>6/5/2026</a:t>
+            </a:fld>
+            <a:endParaRPr lang="en-US" dirty="0"/>
+          </a:p>
+        </p:txBody>
+      </p:sp>
+      <p:sp>
+        <p:nvSpPr>
+          <p:cNvPr id="5" name="Footer Placeholder 4"/>
+          <p:cNvSpPr>
+            <a:spLocks noGrp="1"/>
+          </p:cNvSpPr>
+          <p:nvPr>
+            <p:ph type="ftr" sz="quarter" idx="11"/>
           </p:nvPr>
         </p:nvSpPr>
         <p:spPr/>
@@ -437,47 +4060,1394 @@
           <a:bodyPr/>
           <a:lstStyle/>
           <a:p>
-            <a:pPr lvl="0"/>
-            <a:r>
-              <a:rPr lang="en-US"/>
-              <a:t>Click to edit Master text styles</a:t>
-            </a:r>
-          </a:p>
-          <a:p>
-            <a:pPr lvl="1"/>
-            <a:r>
-              <a:rPr lang="en-US"/>
-              <a:t>Second level</a:t>
-            </a:r>
-          </a:p>
-          <a:p>
-            <a:pPr lvl="2"/>
-            <a:r>
-              <a:rPr lang="en-US"/>
-              <a:t>Third level</a:t>
-            </a:r>
-          </a:p>
-          <a:p>
-            <a:pPr lvl="3"/>
-            <a:r>
-              <a:rPr lang="en-US"/>
-              <a:t>Fourth level</a:t>
-            </a:r>
-          </a:p>
-          <a:p>
-            <a:pPr lvl="4"/>
-            <a:r>
-              <a:rPr lang="en-US"/>
-              <a:t>Fifth level</a:t>
-            </a:r>
-            <a:endParaRPr lang="en-GB"/>
+            <a:endParaRPr lang="en-US" dirty="0"/>
+          </a:p>
+        </p:txBody>
+      </p:sp>
+      <p:sp>
+        <p:nvSpPr>
+          <p:cNvPr id="6" name="Slide Number Placeholder 5"/>
+          <p:cNvSpPr>
+            <a:spLocks noGrp="1"/>
+          </p:cNvSpPr>
+          <p:nvPr>
+            <p:ph type="sldNum" sz="quarter" idx="12"/>
+          </p:nvPr>
+        </p:nvSpPr>
+        <p:spPr/>
+        <p:txBody>
+          <a:bodyPr/>
+          <a:lstStyle/>
+          <a:p>
+            <a:fld id="{6D22F896-40B5-4ADD-8801-0D06FADFA095}" type="slidenum">
+              <a:rPr lang="en-US" dirty="0"/>
+              <a:t>‹#›</a:t>
+            </a:fld>
+            <a:endParaRPr lang="en-US" dirty="0"/>
           </a:p>
         </p:txBody>
       </p:sp>
     </p:spTree>
     <p:extLst>
       <p:ext uri="{BB962C8B-B14F-4D97-AF65-F5344CB8AC3E}">
-        <p14:creationId xmlns:p14="http://schemas.microsoft.com/office/powerpoint/2010/main" val="2135793839"/>
+        <p14:creationId xmlns:p14="http://schemas.microsoft.com/office/powerpoint/2010/main" val="2254927860"/>
+      </p:ext>
+    </p:extLst>
+  </p:cSld>
+  <p:clrMapOvr>
+    <a:masterClrMapping/>
+  </p:clrMapOvr>
+</p:sldLayout>
+</file>
+
+<file path=ppt/slideLayouts/slideLayout4.xml><?xml version="1.0" encoding="utf-8"?>
+<p:sldLayout xmlns:a="http://schemas.openxmlformats.org/drawingml/2006/main" xmlns:r="http://schemas.openxmlformats.org/officeDocument/2006/relationships" xmlns:p="http://schemas.openxmlformats.org/presentationml/2006/main" type="twoObj" preserve="1">
+  <p:cSld name="Two Content">
+    <p:spTree>
+      <p:nvGrpSpPr>
+        <p:cNvPr id="1" name=""/>
+        <p:cNvGrpSpPr/>
+        <p:nvPr/>
+      </p:nvGrpSpPr>
+      <p:grpSpPr>
+        <a:xfrm>
+          <a:off x="0" y="0"/>
+          <a:ext cx="0" cy="0"/>
+          <a:chOff x="0" y="0"/>
+          <a:chExt cx="0" cy="0"/>
+        </a:xfrm>
+      </p:grpSpPr>
+      <p:sp>
+        <p:nvSpPr>
+          <p:cNvPr id="14" name="Title 1"/>
+          <p:cNvSpPr>
+            <a:spLocks noGrp="1"/>
+          </p:cNvSpPr>
+          <p:nvPr>
+            <p:ph type="title"/>
+          </p:nvPr>
+        </p:nvSpPr>
+        <p:spPr>
+          <a:xfrm>
+            <a:off x="685801" y="685800"/>
+            <a:ext cx="10396882" cy="1158140"/>
+          </a:xfrm>
+        </p:spPr>
+        <p:txBody>
+          <a:bodyPr/>
+          <a:lstStyle/>
+          <a:p>
+            <a:r>
+              <a:rPr lang="en-US"/>
+              <a:t>Click to edit Master title style</a:t>
+            </a:r>
+            <a:endParaRPr lang="en-US" dirty="0"/>
+          </a:p>
+        </p:txBody>
+      </p:sp>
+      <p:sp>
+        <p:nvSpPr>
+          <p:cNvPr id="12" name="Content Placeholder 2"/>
+          <p:cNvSpPr>
+            <a:spLocks noGrp="1"/>
+          </p:cNvSpPr>
+          <p:nvPr>
+            <p:ph sz="quarter" idx="13"/>
+          </p:nvPr>
+        </p:nvSpPr>
+        <p:spPr>
+          <a:xfrm>
+            <a:off x="685800" y="2063396"/>
+            <a:ext cx="5088714" cy="3311189"/>
+          </a:xfrm>
+        </p:spPr>
+        <p:txBody>
+          <a:bodyPr anchor="t"/>
+          <a:lstStyle/>
+          <a:p>
+            <a:pPr lvl="0"/>
+            <a:r>
+              <a:rPr lang="en-US"/>
+              <a:t>Click to edit Master text styles</a:t>
+            </a:r>
+          </a:p>
+          <a:p>
+            <a:pPr lvl="1"/>
+            <a:r>
+              <a:rPr lang="en-US"/>
+              <a:t>Second level</a:t>
+            </a:r>
+          </a:p>
+          <a:p>
+            <a:pPr lvl="2"/>
+            <a:r>
+              <a:rPr lang="en-US"/>
+              <a:t>Third level</a:t>
+            </a:r>
+          </a:p>
+          <a:p>
+            <a:pPr lvl="3"/>
+            <a:r>
+              <a:rPr lang="en-US"/>
+              <a:t>Fourth level</a:t>
+            </a:r>
+          </a:p>
+          <a:p>
+            <a:pPr lvl="4"/>
+            <a:r>
+              <a:rPr lang="en-US"/>
+              <a:t>Fifth level</a:t>
+            </a:r>
+            <a:endParaRPr lang="en-US" dirty="0"/>
+          </a:p>
+        </p:txBody>
+      </p:sp>
+      <p:sp>
+        <p:nvSpPr>
+          <p:cNvPr id="13" name="Content Placeholder 3"/>
+          <p:cNvSpPr>
+            <a:spLocks noGrp="1"/>
+          </p:cNvSpPr>
+          <p:nvPr>
+            <p:ph sz="quarter" idx="14"/>
+          </p:nvPr>
+        </p:nvSpPr>
+        <p:spPr>
+          <a:xfrm>
+            <a:off x="5993971" y="2063396"/>
+            <a:ext cx="5086538" cy="3311189"/>
+          </a:xfrm>
+        </p:spPr>
+        <p:txBody>
+          <a:bodyPr anchor="t"/>
+          <a:lstStyle/>
+          <a:p>
+            <a:pPr lvl="0"/>
+            <a:r>
+              <a:rPr lang="en-US"/>
+              <a:t>Click to edit Master text styles</a:t>
+            </a:r>
+          </a:p>
+          <a:p>
+            <a:pPr lvl="1"/>
+            <a:r>
+              <a:rPr lang="en-US"/>
+              <a:t>Second level</a:t>
+            </a:r>
+          </a:p>
+          <a:p>
+            <a:pPr lvl="2"/>
+            <a:r>
+              <a:rPr lang="en-US"/>
+              <a:t>Third level</a:t>
+            </a:r>
+          </a:p>
+          <a:p>
+            <a:pPr lvl="3"/>
+            <a:r>
+              <a:rPr lang="en-US"/>
+              <a:t>Fourth level</a:t>
+            </a:r>
+          </a:p>
+          <a:p>
+            <a:pPr lvl="4"/>
+            <a:r>
+              <a:rPr lang="en-US"/>
+              <a:t>Fifth level</a:t>
+            </a:r>
+            <a:endParaRPr lang="en-US" dirty="0"/>
+          </a:p>
+        </p:txBody>
+      </p:sp>
+      <p:sp>
+        <p:nvSpPr>
+          <p:cNvPr id="5" name="Date Placeholder 4"/>
+          <p:cNvSpPr>
+            <a:spLocks noGrp="1"/>
+          </p:cNvSpPr>
+          <p:nvPr>
+            <p:ph type="dt" sz="half" idx="10"/>
+          </p:nvPr>
+        </p:nvSpPr>
+        <p:spPr/>
+        <p:txBody>
+          <a:bodyPr/>
+          <a:lstStyle/>
+          <a:p>
+            <a:fld id="{AE22DC73-F065-42F5-A9F2-D90B2E42A0B3}" type="datetimeFigureOut">
+              <a:rPr lang="en-US" dirty="0"/>
+              <a:t>6/5/2026</a:t>
+            </a:fld>
+            <a:endParaRPr lang="en-US" dirty="0"/>
+          </a:p>
+        </p:txBody>
+      </p:sp>
+      <p:sp>
+        <p:nvSpPr>
+          <p:cNvPr id="6" name="Footer Placeholder 5"/>
+          <p:cNvSpPr>
+            <a:spLocks noGrp="1"/>
+          </p:cNvSpPr>
+          <p:nvPr>
+            <p:ph type="ftr" sz="quarter" idx="11"/>
+          </p:nvPr>
+        </p:nvSpPr>
+        <p:spPr/>
+        <p:txBody>
+          <a:bodyPr/>
+          <a:lstStyle/>
+          <a:p>
+            <a:endParaRPr lang="en-US" dirty="0"/>
+          </a:p>
+        </p:txBody>
+      </p:sp>
+      <p:sp>
+        <p:nvSpPr>
+          <p:cNvPr id="7" name="Slide Number Placeholder 6"/>
+          <p:cNvSpPr>
+            <a:spLocks noGrp="1"/>
+          </p:cNvSpPr>
+          <p:nvPr>
+            <p:ph type="sldNum" sz="quarter" idx="12"/>
+          </p:nvPr>
+        </p:nvSpPr>
+        <p:spPr/>
+        <p:txBody>
+          <a:bodyPr/>
+          <a:lstStyle/>
+          <a:p>
+            <a:fld id="{6D22F896-40B5-4ADD-8801-0D06FADFA095}" type="slidenum">
+              <a:rPr lang="en-US" dirty="0"/>
+              <a:t>‹#›</a:t>
+            </a:fld>
+            <a:endParaRPr lang="en-US" dirty="0"/>
+          </a:p>
+        </p:txBody>
+      </p:sp>
+    </p:spTree>
+    <p:extLst>
+      <p:ext uri="{BB962C8B-B14F-4D97-AF65-F5344CB8AC3E}">
+        <p14:creationId xmlns:p14="http://schemas.microsoft.com/office/powerpoint/2010/main" val="4147307004"/>
+      </p:ext>
+    </p:extLst>
+  </p:cSld>
+  <p:clrMapOvr>
+    <a:masterClrMapping/>
+  </p:clrMapOvr>
+</p:sldLayout>
+</file>
+
+<file path=ppt/slideLayouts/slideLayout5.xml><?xml version="1.0" encoding="utf-8"?>
+<p:sldLayout xmlns:a="http://schemas.openxmlformats.org/drawingml/2006/main" xmlns:r="http://schemas.openxmlformats.org/officeDocument/2006/relationships" xmlns:p="http://schemas.openxmlformats.org/presentationml/2006/main" type="twoTxTwoObj" preserve="1">
+  <p:cSld name="Comparison">
+    <p:spTree>
+      <p:nvGrpSpPr>
+        <p:cNvPr id="1" name=""/>
+        <p:cNvGrpSpPr/>
+        <p:nvPr/>
+      </p:nvGrpSpPr>
+      <p:grpSpPr>
+        <a:xfrm>
+          <a:off x="0" y="0"/>
+          <a:ext cx="0" cy="0"/>
+          <a:chOff x="0" y="0"/>
+          <a:chExt cx="0" cy="0"/>
+        </a:xfrm>
+      </p:grpSpPr>
+      <p:sp>
+        <p:nvSpPr>
+          <p:cNvPr id="14" name="Title 1"/>
+          <p:cNvSpPr>
+            <a:spLocks noGrp="1"/>
+          </p:cNvSpPr>
+          <p:nvPr>
+            <p:ph type="title"/>
+          </p:nvPr>
+        </p:nvSpPr>
+        <p:spPr>
+          <a:xfrm>
+            <a:off x="685801" y="685800"/>
+            <a:ext cx="10394707" cy="1158140"/>
+          </a:xfrm>
+        </p:spPr>
+        <p:txBody>
+          <a:bodyPr/>
+          <a:lstStyle/>
+          <a:p>
+            <a:r>
+              <a:rPr lang="en-US"/>
+              <a:t>Click to edit Master title style</a:t>
+            </a:r>
+            <a:endParaRPr lang="en-US" dirty="0"/>
+          </a:p>
+        </p:txBody>
+      </p:sp>
+      <p:sp>
+        <p:nvSpPr>
+          <p:cNvPr id="3" name="Text Placeholder 2"/>
+          <p:cNvSpPr>
+            <a:spLocks noGrp="1"/>
+          </p:cNvSpPr>
+          <p:nvPr>
+            <p:ph type="body" idx="1"/>
+          </p:nvPr>
+        </p:nvSpPr>
+        <p:spPr>
+          <a:xfrm>
+            <a:off x="918356" y="2063396"/>
+            <a:ext cx="4856158" cy="679994"/>
+          </a:xfrm>
+        </p:spPr>
+        <p:txBody>
+          <a:bodyPr anchor="b">
+            <a:noAutofit/>
+          </a:bodyPr>
+          <a:lstStyle>
+            <a:lvl1pPr marL="0" indent="0">
+              <a:lnSpc>
+                <a:spcPct val="90000"/>
+              </a:lnSpc>
+              <a:buNone/>
+              <a:defRPr sz="2600" b="0">
+                <a:solidFill>
+                  <a:schemeClr val="accent1"/>
+                </a:solidFill>
+              </a:defRPr>
+            </a:lvl1pPr>
+            <a:lvl2pPr marL="457200" indent="0">
+              <a:buNone/>
+              <a:defRPr sz="2000" b="1"/>
+            </a:lvl2pPr>
+            <a:lvl3pPr marL="914400" indent="0">
+              <a:buNone/>
+              <a:defRPr sz="1800" b="1"/>
+            </a:lvl3pPr>
+            <a:lvl4pPr marL="1371600" indent="0">
+              <a:buNone/>
+              <a:defRPr sz="1600" b="1"/>
+            </a:lvl4pPr>
+            <a:lvl5pPr marL="1828800" indent="0">
+              <a:buNone/>
+              <a:defRPr sz="1600" b="1"/>
+            </a:lvl5pPr>
+            <a:lvl6pPr marL="2286000" indent="0">
+              <a:buNone/>
+              <a:defRPr sz="1600" b="1"/>
+            </a:lvl6pPr>
+            <a:lvl7pPr marL="2743200" indent="0">
+              <a:buNone/>
+              <a:defRPr sz="1600" b="1"/>
+            </a:lvl7pPr>
+            <a:lvl8pPr marL="3200400" indent="0">
+              <a:buNone/>
+              <a:defRPr sz="1600" b="1"/>
+            </a:lvl8pPr>
+            <a:lvl9pPr marL="3657600" indent="0">
+              <a:buNone/>
+              <a:defRPr sz="1600" b="1"/>
+            </a:lvl9pPr>
+          </a:lstStyle>
+          <a:p>
+            <a:pPr lvl="0"/>
+            <a:r>
+              <a:rPr lang="en-US"/>
+              <a:t>Click to edit Master text styles</a:t>
+            </a:r>
+          </a:p>
+        </p:txBody>
+      </p:sp>
+      <p:sp>
+        <p:nvSpPr>
+          <p:cNvPr id="12" name="Content Placeholder 3"/>
+          <p:cNvSpPr>
+            <a:spLocks noGrp="1"/>
+          </p:cNvSpPr>
+          <p:nvPr>
+            <p:ph sz="quarter" idx="13"/>
+          </p:nvPr>
+        </p:nvSpPr>
+        <p:spPr>
+          <a:xfrm>
+            <a:off x="685802" y="2861733"/>
+            <a:ext cx="5088712" cy="2512852"/>
+          </a:xfrm>
+        </p:spPr>
+        <p:txBody>
+          <a:bodyPr anchor="t"/>
+          <a:lstStyle/>
+          <a:p>
+            <a:pPr lvl="0"/>
+            <a:r>
+              <a:rPr lang="en-US"/>
+              <a:t>Click to edit Master text styles</a:t>
+            </a:r>
+          </a:p>
+          <a:p>
+            <a:pPr lvl="1"/>
+            <a:r>
+              <a:rPr lang="en-US"/>
+              <a:t>Second level</a:t>
+            </a:r>
+          </a:p>
+          <a:p>
+            <a:pPr lvl="2"/>
+            <a:r>
+              <a:rPr lang="en-US"/>
+              <a:t>Third level</a:t>
+            </a:r>
+          </a:p>
+          <a:p>
+            <a:pPr lvl="3"/>
+            <a:r>
+              <a:rPr lang="en-US"/>
+              <a:t>Fourth level</a:t>
+            </a:r>
+          </a:p>
+          <a:p>
+            <a:pPr lvl="4"/>
+            <a:r>
+              <a:rPr lang="en-US"/>
+              <a:t>Fifth level</a:t>
+            </a:r>
+            <a:endParaRPr lang="en-US" dirty="0"/>
+          </a:p>
+        </p:txBody>
+      </p:sp>
+      <p:sp>
+        <p:nvSpPr>
+          <p:cNvPr id="5" name="Text Placeholder 4"/>
+          <p:cNvSpPr>
+            <a:spLocks noGrp="1"/>
+          </p:cNvSpPr>
+          <p:nvPr>
+            <p:ph type="body" sz="quarter" idx="3"/>
+          </p:nvPr>
+        </p:nvSpPr>
+        <p:spPr>
+          <a:xfrm>
+            <a:off x="6218191" y="2063396"/>
+            <a:ext cx="4864491" cy="679994"/>
+          </a:xfrm>
+        </p:spPr>
+        <p:txBody>
+          <a:bodyPr anchor="b">
+            <a:noAutofit/>
+          </a:bodyPr>
+          <a:lstStyle>
+            <a:lvl1pPr marL="0" indent="0">
+              <a:lnSpc>
+                <a:spcPct val="90000"/>
+              </a:lnSpc>
+              <a:buNone/>
+              <a:defRPr sz="2600" b="0">
+                <a:solidFill>
+                  <a:schemeClr val="accent1"/>
+                </a:solidFill>
+              </a:defRPr>
+            </a:lvl1pPr>
+            <a:lvl2pPr marL="457200" indent="0">
+              <a:buNone/>
+              <a:defRPr sz="2000" b="1"/>
+            </a:lvl2pPr>
+            <a:lvl3pPr marL="914400" indent="0">
+              <a:buNone/>
+              <a:defRPr sz="1800" b="1"/>
+            </a:lvl3pPr>
+            <a:lvl4pPr marL="1371600" indent="0">
+              <a:buNone/>
+              <a:defRPr sz="1600" b="1"/>
+            </a:lvl4pPr>
+            <a:lvl5pPr marL="1828800" indent="0">
+              <a:buNone/>
+              <a:defRPr sz="1600" b="1"/>
+            </a:lvl5pPr>
+            <a:lvl6pPr marL="2286000" indent="0">
+              <a:buNone/>
+              <a:defRPr sz="1600" b="1"/>
+            </a:lvl6pPr>
+            <a:lvl7pPr marL="2743200" indent="0">
+              <a:buNone/>
+              <a:defRPr sz="1600" b="1"/>
+            </a:lvl7pPr>
+            <a:lvl8pPr marL="3200400" indent="0">
+              <a:buNone/>
+              <a:defRPr sz="1600" b="1"/>
+            </a:lvl8pPr>
+            <a:lvl9pPr marL="3657600" indent="0">
+              <a:buNone/>
+              <a:defRPr sz="1600" b="1"/>
+            </a:lvl9pPr>
+          </a:lstStyle>
+          <a:p>
+            <a:pPr lvl="0"/>
+            <a:r>
+              <a:rPr lang="en-US"/>
+              <a:t>Click to edit Master text styles</a:t>
+            </a:r>
+          </a:p>
+        </p:txBody>
+      </p:sp>
+      <p:sp>
+        <p:nvSpPr>
+          <p:cNvPr id="13" name="Content Placeholder 5"/>
+          <p:cNvSpPr>
+            <a:spLocks noGrp="1"/>
+          </p:cNvSpPr>
+          <p:nvPr>
+            <p:ph sz="quarter" idx="14"/>
+          </p:nvPr>
+        </p:nvSpPr>
+        <p:spPr>
+          <a:xfrm>
+            <a:off x="5993969" y="2861733"/>
+            <a:ext cx="5088713" cy="2512852"/>
+          </a:xfrm>
+        </p:spPr>
+        <p:txBody>
+          <a:bodyPr anchor="t"/>
+          <a:lstStyle/>
+          <a:p>
+            <a:pPr lvl="0"/>
+            <a:r>
+              <a:rPr lang="en-US"/>
+              <a:t>Click to edit Master text styles</a:t>
+            </a:r>
+          </a:p>
+          <a:p>
+            <a:pPr lvl="1"/>
+            <a:r>
+              <a:rPr lang="en-US"/>
+              <a:t>Second level</a:t>
+            </a:r>
+          </a:p>
+          <a:p>
+            <a:pPr lvl="2"/>
+            <a:r>
+              <a:rPr lang="en-US"/>
+              <a:t>Third level</a:t>
+            </a:r>
+          </a:p>
+          <a:p>
+            <a:pPr lvl="3"/>
+            <a:r>
+              <a:rPr lang="en-US"/>
+              <a:t>Fourth level</a:t>
+            </a:r>
+          </a:p>
+          <a:p>
+            <a:pPr lvl="4"/>
+            <a:r>
+              <a:rPr lang="en-US"/>
+              <a:t>Fifth level</a:t>
+            </a:r>
+            <a:endParaRPr lang="en-US" dirty="0"/>
+          </a:p>
+        </p:txBody>
+      </p:sp>
+      <p:sp>
+        <p:nvSpPr>
+          <p:cNvPr id="7" name="Date Placeholder 6"/>
+          <p:cNvSpPr>
+            <a:spLocks noGrp="1"/>
+          </p:cNvSpPr>
+          <p:nvPr>
+            <p:ph type="dt" sz="half" idx="10"/>
+          </p:nvPr>
+        </p:nvSpPr>
+        <p:spPr/>
+        <p:txBody>
+          <a:bodyPr/>
+          <a:lstStyle/>
+          <a:p>
+            <a:fld id="{76BEA702-9B29-41CC-9BCC-3DF8A0D379FE}" type="datetimeFigureOut">
+              <a:rPr lang="en-US" dirty="0"/>
+              <a:t>6/5/2026</a:t>
+            </a:fld>
+            <a:endParaRPr lang="en-US" dirty="0"/>
+          </a:p>
+        </p:txBody>
+      </p:sp>
+      <p:sp>
+        <p:nvSpPr>
+          <p:cNvPr id="8" name="Footer Placeholder 7"/>
+          <p:cNvSpPr>
+            <a:spLocks noGrp="1"/>
+          </p:cNvSpPr>
+          <p:nvPr>
+            <p:ph type="ftr" sz="quarter" idx="11"/>
+          </p:nvPr>
+        </p:nvSpPr>
+        <p:spPr/>
+        <p:txBody>
+          <a:bodyPr/>
+          <a:lstStyle/>
+          <a:p>
+            <a:endParaRPr lang="en-US" dirty="0"/>
+          </a:p>
+        </p:txBody>
+      </p:sp>
+      <p:sp>
+        <p:nvSpPr>
+          <p:cNvPr id="9" name="Slide Number Placeholder 8"/>
+          <p:cNvSpPr>
+            <a:spLocks noGrp="1"/>
+          </p:cNvSpPr>
+          <p:nvPr>
+            <p:ph type="sldNum" sz="quarter" idx="12"/>
+          </p:nvPr>
+        </p:nvSpPr>
+        <p:spPr/>
+        <p:txBody>
+          <a:bodyPr/>
+          <a:lstStyle/>
+          <a:p>
+            <a:fld id="{6D22F896-40B5-4ADD-8801-0D06FADFA095}" type="slidenum">
+              <a:rPr lang="en-US" dirty="0"/>
+              <a:t>‹#›</a:t>
+            </a:fld>
+            <a:endParaRPr lang="en-US" dirty="0"/>
+          </a:p>
+        </p:txBody>
+      </p:sp>
+    </p:spTree>
+    <p:extLst>
+      <p:ext uri="{BB962C8B-B14F-4D97-AF65-F5344CB8AC3E}">
+        <p14:creationId xmlns:p14="http://schemas.microsoft.com/office/powerpoint/2010/main" val="2890950487"/>
+      </p:ext>
+    </p:extLst>
+  </p:cSld>
+  <p:clrMapOvr>
+    <a:masterClrMapping/>
+  </p:clrMapOvr>
+</p:sldLayout>
+</file>
+
+<file path=ppt/slideLayouts/slideLayout6.xml><?xml version="1.0" encoding="utf-8"?>
+<p:sldLayout xmlns:a="http://schemas.openxmlformats.org/drawingml/2006/main" xmlns:r="http://schemas.openxmlformats.org/officeDocument/2006/relationships" xmlns:p="http://schemas.openxmlformats.org/presentationml/2006/main" type="titleOnly" preserve="1">
+  <p:cSld name="Title Only">
+    <p:spTree>
+      <p:nvGrpSpPr>
+        <p:cNvPr id="1" name=""/>
+        <p:cNvGrpSpPr/>
+        <p:nvPr/>
+      </p:nvGrpSpPr>
+      <p:grpSpPr>
+        <a:xfrm>
+          <a:off x="0" y="0"/>
+          <a:ext cx="0" cy="0"/>
+          <a:chOff x="0" y="0"/>
+          <a:chExt cx="0" cy="0"/>
+        </a:xfrm>
+      </p:grpSpPr>
+      <p:sp>
+        <p:nvSpPr>
+          <p:cNvPr id="2" name="Title 1"/>
+          <p:cNvSpPr>
+            <a:spLocks noGrp="1"/>
+          </p:cNvSpPr>
+          <p:nvPr>
+            <p:ph type="title"/>
+          </p:nvPr>
+        </p:nvSpPr>
+        <p:spPr/>
+        <p:txBody>
+          <a:bodyPr/>
+          <a:lstStyle/>
+          <a:p>
+            <a:r>
+              <a:rPr lang="en-US"/>
+              <a:t>Click to edit Master title style</a:t>
+            </a:r>
+            <a:endParaRPr lang="en-US" dirty="0"/>
+          </a:p>
+        </p:txBody>
+      </p:sp>
+      <p:sp>
+        <p:nvSpPr>
+          <p:cNvPr id="3" name="Date Placeholder 2"/>
+          <p:cNvSpPr>
+            <a:spLocks noGrp="1"/>
+          </p:cNvSpPr>
+          <p:nvPr>
+            <p:ph type="dt" sz="half" idx="10"/>
+          </p:nvPr>
+        </p:nvSpPr>
+        <p:spPr/>
+        <p:txBody>
+          <a:bodyPr/>
+          <a:lstStyle/>
+          <a:p>
+            <a:fld id="{097649AC-CB8F-4FF1-9A34-5861C74DD0A7}" type="datetimeFigureOut">
+              <a:rPr lang="en-US" dirty="0"/>
+              <a:t>6/5/2026</a:t>
+            </a:fld>
+            <a:endParaRPr lang="en-US" dirty="0"/>
+          </a:p>
+        </p:txBody>
+      </p:sp>
+      <p:sp>
+        <p:nvSpPr>
+          <p:cNvPr id="4" name="Footer Placeholder 3"/>
+          <p:cNvSpPr>
+            <a:spLocks noGrp="1"/>
+          </p:cNvSpPr>
+          <p:nvPr>
+            <p:ph type="ftr" sz="quarter" idx="11"/>
+          </p:nvPr>
+        </p:nvSpPr>
+        <p:spPr/>
+        <p:txBody>
+          <a:bodyPr/>
+          <a:lstStyle/>
+          <a:p>
+            <a:endParaRPr lang="en-US" dirty="0"/>
+          </a:p>
+        </p:txBody>
+      </p:sp>
+      <p:sp>
+        <p:nvSpPr>
+          <p:cNvPr id="5" name="Slide Number Placeholder 4"/>
+          <p:cNvSpPr>
+            <a:spLocks noGrp="1"/>
+          </p:cNvSpPr>
+          <p:nvPr>
+            <p:ph type="sldNum" sz="quarter" idx="12"/>
+          </p:nvPr>
+        </p:nvSpPr>
+        <p:spPr/>
+        <p:txBody>
+          <a:bodyPr/>
+          <a:lstStyle/>
+          <a:p>
+            <a:fld id="{6D22F896-40B5-4ADD-8801-0D06FADFA095}" type="slidenum">
+              <a:rPr lang="en-US" dirty="0"/>
+              <a:t>‹#›</a:t>
+            </a:fld>
+            <a:endParaRPr lang="en-US" dirty="0"/>
+          </a:p>
+        </p:txBody>
+      </p:sp>
+    </p:spTree>
+    <p:extLst>
+      <p:ext uri="{BB962C8B-B14F-4D97-AF65-F5344CB8AC3E}">
+        <p14:creationId xmlns:p14="http://schemas.microsoft.com/office/powerpoint/2010/main" val="4051835045"/>
+      </p:ext>
+    </p:extLst>
+  </p:cSld>
+  <p:clrMapOvr>
+    <a:masterClrMapping/>
+  </p:clrMapOvr>
+</p:sldLayout>
+</file>
+
+<file path=ppt/slideLayouts/slideLayout7.xml><?xml version="1.0" encoding="utf-8"?>
+<p:sldLayout xmlns:a="http://schemas.openxmlformats.org/drawingml/2006/main" xmlns:r="http://schemas.openxmlformats.org/officeDocument/2006/relationships" xmlns:p="http://schemas.openxmlformats.org/presentationml/2006/main" type="blank" preserve="1">
+  <p:cSld name="Blank">
+    <p:spTree>
+      <p:nvGrpSpPr>
+        <p:cNvPr id="1" name=""/>
+        <p:cNvGrpSpPr/>
+        <p:nvPr/>
+      </p:nvGrpSpPr>
+      <p:grpSpPr>
+        <a:xfrm>
+          <a:off x="0" y="0"/>
+          <a:ext cx="0" cy="0"/>
+          <a:chOff x="0" y="0"/>
+          <a:chExt cx="0" cy="0"/>
+        </a:xfrm>
+      </p:grpSpPr>
+      <p:sp>
+        <p:nvSpPr>
+          <p:cNvPr id="2" name="Date Placeholder 1"/>
+          <p:cNvSpPr>
+            <a:spLocks noGrp="1"/>
+          </p:cNvSpPr>
+          <p:nvPr>
+            <p:ph type="dt" sz="half" idx="10"/>
+          </p:nvPr>
+        </p:nvSpPr>
+        <p:spPr/>
+        <p:txBody>
+          <a:bodyPr/>
+          <a:lstStyle/>
+          <a:p>
+            <a:fld id="{3EC5CECA-2D3A-4680-9B49-752200DE467C}" type="datetimeFigureOut">
+              <a:rPr lang="en-US" dirty="0"/>
+              <a:t>6/5/2026</a:t>
+            </a:fld>
+            <a:endParaRPr lang="en-US" dirty="0"/>
+          </a:p>
+        </p:txBody>
+      </p:sp>
+      <p:sp>
+        <p:nvSpPr>
+          <p:cNvPr id="3" name="Footer Placeholder 2"/>
+          <p:cNvSpPr>
+            <a:spLocks noGrp="1"/>
+          </p:cNvSpPr>
+          <p:nvPr>
+            <p:ph type="ftr" sz="quarter" idx="11"/>
+          </p:nvPr>
+        </p:nvSpPr>
+        <p:spPr/>
+        <p:txBody>
+          <a:bodyPr/>
+          <a:lstStyle/>
+          <a:p>
+            <a:endParaRPr lang="en-US" dirty="0"/>
+          </a:p>
+        </p:txBody>
+      </p:sp>
+      <p:sp>
+        <p:nvSpPr>
+          <p:cNvPr id="4" name="Slide Number Placeholder 3"/>
+          <p:cNvSpPr>
+            <a:spLocks noGrp="1"/>
+          </p:cNvSpPr>
+          <p:nvPr>
+            <p:ph type="sldNum" sz="quarter" idx="12"/>
+          </p:nvPr>
+        </p:nvSpPr>
+        <p:spPr/>
+        <p:txBody>
+          <a:bodyPr/>
+          <a:lstStyle/>
+          <a:p>
+            <a:fld id="{6D22F896-40B5-4ADD-8801-0D06FADFA095}" type="slidenum">
+              <a:rPr lang="en-US" dirty="0"/>
+              <a:t>‹#›</a:t>
+            </a:fld>
+            <a:endParaRPr lang="en-US" dirty="0"/>
+          </a:p>
+        </p:txBody>
+      </p:sp>
+    </p:spTree>
+    <p:extLst>
+      <p:ext uri="{BB962C8B-B14F-4D97-AF65-F5344CB8AC3E}">
+        <p14:creationId xmlns:p14="http://schemas.microsoft.com/office/powerpoint/2010/main" val="712244695"/>
+      </p:ext>
+    </p:extLst>
+  </p:cSld>
+  <p:clrMapOvr>
+    <a:masterClrMapping/>
+  </p:clrMapOvr>
+</p:sldLayout>
+</file>
+
+<file path=ppt/slideLayouts/slideLayout8.xml><?xml version="1.0" encoding="utf-8"?>
+<p:sldLayout xmlns:a="http://schemas.openxmlformats.org/drawingml/2006/main" xmlns:r="http://schemas.openxmlformats.org/officeDocument/2006/relationships" xmlns:p="http://schemas.openxmlformats.org/presentationml/2006/main" type="objTx" preserve="1">
+  <p:cSld name="Content with Caption">
+    <p:spTree>
+      <p:nvGrpSpPr>
+        <p:cNvPr id="1" name=""/>
+        <p:cNvGrpSpPr/>
+        <p:nvPr/>
+      </p:nvGrpSpPr>
+      <p:grpSpPr>
+        <a:xfrm>
+          <a:off x="0" y="0"/>
+          <a:ext cx="0" cy="0"/>
+          <a:chOff x="0" y="0"/>
+          <a:chExt cx="0" cy="0"/>
+        </a:xfrm>
+      </p:grpSpPr>
+      <p:sp>
+        <p:nvSpPr>
+          <p:cNvPr id="2" name="Title 1"/>
+          <p:cNvSpPr>
+            <a:spLocks noGrp="1"/>
+          </p:cNvSpPr>
+          <p:nvPr>
+            <p:ph type="title"/>
+          </p:nvPr>
+        </p:nvSpPr>
+        <p:spPr>
+          <a:xfrm>
+            <a:off x="693643" y="685800"/>
+            <a:ext cx="4126860" cy="2023252"/>
+          </a:xfrm>
+        </p:spPr>
+        <p:txBody>
+          <a:bodyPr anchor="b">
+            <a:normAutofit/>
+          </a:bodyPr>
+          <a:lstStyle>
+            <a:lvl1pPr algn="ctr">
+              <a:defRPr sz="3600"/>
+            </a:lvl1pPr>
+          </a:lstStyle>
+          <a:p>
+            <a:r>
+              <a:rPr lang="en-US"/>
+              <a:t>Click to edit Master title style</a:t>
+            </a:r>
+            <a:endParaRPr lang="en-US" dirty="0"/>
+          </a:p>
+        </p:txBody>
+      </p:sp>
+      <p:sp>
+        <p:nvSpPr>
+          <p:cNvPr id="10" name="Content Placeholder 2"/>
+          <p:cNvSpPr>
+            <a:spLocks noGrp="1"/>
+          </p:cNvSpPr>
+          <p:nvPr>
+            <p:ph sz="quarter" idx="13"/>
+          </p:nvPr>
+        </p:nvSpPr>
+        <p:spPr>
+          <a:xfrm>
+            <a:off x="5046132" y="685800"/>
+            <a:ext cx="6034375" cy="4688785"/>
+          </a:xfrm>
+        </p:spPr>
+        <p:txBody>
+          <a:bodyPr/>
+          <a:lstStyle/>
+          <a:p>
+            <a:pPr lvl="0"/>
+            <a:r>
+              <a:rPr lang="en-US"/>
+              <a:t>Click to edit Master text styles</a:t>
+            </a:r>
+          </a:p>
+          <a:p>
+            <a:pPr lvl="1"/>
+            <a:r>
+              <a:rPr lang="en-US"/>
+              <a:t>Second level</a:t>
+            </a:r>
+          </a:p>
+          <a:p>
+            <a:pPr lvl="2"/>
+            <a:r>
+              <a:rPr lang="en-US"/>
+              <a:t>Third level</a:t>
+            </a:r>
+          </a:p>
+          <a:p>
+            <a:pPr lvl="3"/>
+            <a:r>
+              <a:rPr lang="en-US"/>
+              <a:t>Fourth level</a:t>
+            </a:r>
+          </a:p>
+          <a:p>
+            <a:pPr lvl="4"/>
+            <a:r>
+              <a:rPr lang="en-US"/>
+              <a:t>Fifth level</a:t>
+            </a:r>
+            <a:endParaRPr lang="en-US" dirty="0"/>
+          </a:p>
+        </p:txBody>
+      </p:sp>
+      <p:sp>
+        <p:nvSpPr>
+          <p:cNvPr id="4" name="Text Placeholder 3"/>
+          <p:cNvSpPr>
+            <a:spLocks noGrp="1"/>
+          </p:cNvSpPr>
+          <p:nvPr>
+            <p:ph type="body" sz="half" idx="2"/>
+          </p:nvPr>
+        </p:nvSpPr>
+        <p:spPr>
+          <a:xfrm>
+            <a:off x="693642" y="2709052"/>
+            <a:ext cx="4126861" cy="2665533"/>
+          </a:xfrm>
+        </p:spPr>
+        <p:txBody>
+          <a:bodyPr anchor="t">
+            <a:normAutofit/>
+          </a:bodyPr>
+          <a:lstStyle>
+            <a:lvl1pPr marL="0" indent="0" algn="ctr">
+              <a:buNone/>
+              <a:defRPr sz="1800"/>
+            </a:lvl1pPr>
+            <a:lvl2pPr marL="457200" indent="0">
+              <a:buNone/>
+              <a:defRPr sz="1400"/>
+            </a:lvl2pPr>
+            <a:lvl3pPr marL="914400" indent="0">
+              <a:buNone/>
+              <a:defRPr sz="1200"/>
+            </a:lvl3pPr>
+            <a:lvl4pPr marL="1371600" indent="0">
+              <a:buNone/>
+              <a:defRPr sz="1000"/>
+            </a:lvl4pPr>
+            <a:lvl5pPr marL="1828800" indent="0">
+              <a:buNone/>
+              <a:defRPr sz="1000"/>
+            </a:lvl5pPr>
+            <a:lvl6pPr marL="2286000" indent="0">
+              <a:buNone/>
+              <a:defRPr sz="1000"/>
+            </a:lvl6pPr>
+            <a:lvl7pPr marL="2743200" indent="0">
+              <a:buNone/>
+              <a:defRPr sz="1000"/>
+            </a:lvl7pPr>
+            <a:lvl8pPr marL="3200400" indent="0">
+              <a:buNone/>
+              <a:defRPr sz="1000"/>
+            </a:lvl8pPr>
+            <a:lvl9pPr marL="3657600" indent="0">
+              <a:buNone/>
+              <a:defRPr sz="1000"/>
+            </a:lvl9pPr>
+          </a:lstStyle>
+          <a:p>
+            <a:pPr lvl="0"/>
+            <a:r>
+              <a:rPr lang="en-US"/>
+              <a:t>Click to edit Master text styles</a:t>
+            </a:r>
+          </a:p>
+        </p:txBody>
+      </p:sp>
+      <p:sp>
+        <p:nvSpPr>
+          <p:cNvPr id="5" name="Date Placeholder 4"/>
+          <p:cNvSpPr>
+            <a:spLocks noGrp="1"/>
+          </p:cNvSpPr>
+          <p:nvPr>
+            <p:ph type="dt" sz="half" idx="10"/>
+          </p:nvPr>
+        </p:nvSpPr>
+        <p:spPr/>
+        <p:txBody>
+          <a:bodyPr/>
+          <a:lstStyle/>
+          <a:p>
+            <a:fld id="{50C3BFE2-83B7-4B0A-B9D3-AB28331082B3}" type="datetimeFigureOut">
+              <a:rPr lang="en-US" dirty="0"/>
+              <a:t>6/5/2026</a:t>
+            </a:fld>
+            <a:endParaRPr lang="en-US" dirty="0"/>
+          </a:p>
+        </p:txBody>
+      </p:sp>
+      <p:sp>
+        <p:nvSpPr>
+          <p:cNvPr id="6" name="Footer Placeholder 5"/>
+          <p:cNvSpPr>
+            <a:spLocks noGrp="1"/>
+          </p:cNvSpPr>
+          <p:nvPr>
+            <p:ph type="ftr" sz="quarter" idx="11"/>
+          </p:nvPr>
+        </p:nvSpPr>
+        <p:spPr/>
+        <p:txBody>
+          <a:bodyPr/>
+          <a:lstStyle/>
+          <a:p>
+            <a:endParaRPr lang="en-US" dirty="0"/>
+          </a:p>
+        </p:txBody>
+      </p:sp>
+      <p:sp>
+        <p:nvSpPr>
+          <p:cNvPr id="7" name="Slide Number Placeholder 6"/>
+          <p:cNvSpPr>
+            <a:spLocks noGrp="1"/>
+          </p:cNvSpPr>
+          <p:nvPr>
+            <p:ph type="sldNum" sz="quarter" idx="12"/>
+          </p:nvPr>
+        </p:nvSpPr>
+        <p:spPr/>
+        <p:txBody>
+          <a:bodyPr/>
+          <a:lstStyle/>
+          <a:p>
+            <a:fld id="{6D22F896-40B5-4ADD-8801-0D06FADFA095}" type="slidenum">
+              <a:rPr lang="en-US" dirty="0"/>
+              <a:t>‹#›</a:t>
+            </a:fld>
+            <a:endParaRPr lang="en-US" dirty="0"/>
+          </a:p>
+        </p:txBody>
+      </p:sp>
+    </p:spTree>
+    <p:extLst>
+      <p:ext uri="{BB962C8B-B14F-4D97-AF65-F5344CB8AC3E}">
+        <p14:creationId xmlns:p14="http://schemas.microsoft.com/office/powerpoint/2010/main" val="3998311160"/>
+      </p:ext>
+    </p:extLst>
+  </p:cSld>
+  <p:clrMapOvr>
+    <a:masterClrMapping/>
+  </p:clrMapOvr>
+</p:sldLayout>
+</file>
+
+<file path=ppt/slideLayouts/slideLayout9.xml><?xml version="1.0" encoding="utf-8"?>
+<p:sldLayout xmlns:a="http://schemas.openxmlformats.org/drawingml/2006/main" xmlns:r="http://schemas.openxmlformats.org/officeDocument/2006/relationships" xmlns:p="http://schemas.openxmlformats.org/presentationml/2006/main" type="picTx" preserve="1">
+  <p:cSld name="Picture with Caption">
+    <p:spTree>
+      <p:nvGrpSpPr>
+        <p:cNvPr id="1" name=""/>
+        <p:cNvGrpSpPr/>
+        <p:nvPr/>
+      </p:nvGrpSpPr>
+      <p:grpSpPr>
+        <a:xfrm>
+          <a:off x="0" y="0"/>
+          <a:ext cx="0" cy="0"/>
+          <a:chOff x="0" y="0"/>
+          <a:chExt cx="0" cy="0"/>
+        </a:xfrm>
+      </p:grpSpPr>
+      <p:sp>
+        <p:nvSpPr>
+          <p:cNvPr id="2" name="Title 1"/>
+          <p:cNvSpPr>
+            <a:spLocks noGrp="1"/>
+          </p:cNvSpPr>
+          <p:nvPr>
+            <p:ph type="title"/>
+          </p:nvPr>
+        </p:nvSpPr>
+        <p:spPr>
+          <a:xfrm>
+            <a:off x="685800" y="685800"/>
+            <a:ext cx="6345302" cy="2023252"/>
+          </a:xfrm>
+        </p:spPr>
+        <p:txBody>
+          <a:bodyPr anchor="b">
+            <a:normAutofit/>
+          </a:bodyPr>
+          <a:lstStyle>
+            <a:lvl1pPr algn="ctr">
+              <a:defRPr sz="3600"/>
+            </a:lvl1pPr>
+          </a:lstStyle>
+          <a:p>
+            <a:r>
+              <a:rPr lang="en-US"/>
+              <a:t>Click to edit Master title style</a:t>
+            </a:r>
+            <a:endParaRPr lang="en-US" dirty="0"/>
+          </a:p>
+        </p:txBody>
+      </p:sp>
+      <p:sp>
+        <p:nvSpPr>
+          <p:cNvPr id="3" name="Picture Placeholder 2"/>
+          <p:cNvSpPr>
+            <a:spLocks noGrp="1" noChangeAspect="1"/>
+          </p:cNvSpPr>
+          <p:nvPr>
+            <p:ph type="pic" idx="1"/>
+          </p:nvPr>
+        </p:nvSpPr>
+        <p:spPr>
+          <a:xfrm>
+            <a:off x="7482362" y="0"/>
+            <a:ext cx="3598146" cy="5071533"/>
+          </a:xfrm>
+          <a:ln w="57150" cmpd="thinThick">
+            <a:solidFill>
+              <a:schemeClr val="bg1">
+                <a:lumMod val="50000"/>
+              </a:schemeClr>
+            </a:solidFill>
+            <a:miter lim="800000"/>
+          </a:ln>
+        </p:spPr>
+        <p:txBody>
+          <a:bodyPr anchor="t"/>
+          <a:lstStyle>
+            <a:lvl1pPr marL="0" indent="0" algn="ctr">
+              <a:buNone/>
+              <a:defRPr sz="3200"/>
+            </a:lvl1pPr>
+            <a:lvl2pPr marL="457200" indent="0">
+              <a:buNone/>
+              <a:defRPr sz="2800"/>
+            </a:lvl2pPr>
+            <a:lvl3pPr marL="914400" indent="0">
+              <a:buNone/>
+              <a:defRPr sz="2400"/>
+            </a:lvl3pPr>
+            <a:lvl4pPr marL="1371600" indent="0">
+              <a:buNone/>
+              <a:defRPr sz="2000"/>
+            </a:lvl4pPr>
+            <a:lvl5pPr marL="1828800" indent="0">
+              <a:buNone/>
+              <a:defRPr sz="2000"/>
+            </a:lvl5pPr>
+            <a:lvl6pPr marL="2286000" indent="0">
+              <a:buNone/>
+              <a:defRPr sz="2000"/>
+            </a:lvl6pPr>
+            <a:lvl7pPr marL="2743200" indent="0">
+              <a:buNone/>
+              <a:defRPr sz="2000"/>
+            </a:lvl7pPr>
+            <a:lvl8pPr marL="3200400" indent="0">
+              <a:buNone/>
+              <a:defRPr sz="2000"/>
+            </a:lvl8pPr>
+            <a:lvl9pPr marL="3657600" indent="0">
+              <a:buNone/>
+              <a:defRPr sz="2000"/>
+            </a:lvl9pPr>
+          </a:lstStyle>
+          <a:p>
+            <a:r>
+              <a:rPr lang="en-US"/>
+              <a:t>Click icon to add picture</a:t>
+            </a:r>
+            <a:endParaRPr lang="en-US" dirty="0"/>
+          </a:p>
+        </p:txBody>
+      </p:sp>
+      <p:sp>
+        <p:nvSpPr>
+          <p:cNvPr id="4" name="Text Placeholder 3"/>
+          <p:cNvSpPr>
+            <a:spLocks noGrp="1"/>
+          </p:cNvSpPr>
+          <p:nvPr>
+            <p:ph type="body" sz="half" idx="2"/>
+          </p:nvPr>
+        </p:nvSpPr>
+        <p:spPr>
+          <a:xfrm>
+            <a:off x="685801" y="2709052"/>
+            <a:ext cx="6345301" cy="2362481"/>
+          </a:xfrm>
+        </p:spPr>
+        <p:txBody>
+          <a:bodyPr anchor="t">
+            <a:normAutofit/>
+          </a:bodyPr>
+          <a:lstStyle>
+            <a:lvl1pPr marL="0" indent="0" algn="ctr">
+              <a:buNone/>
+              <a:defRPr sz="1800"/>
+            </a:lvl1pPr>
+            <a:lvl2pPr marL="457200" indent="0">
+              <a:buNone/>
+              <a:defRPr sz="1400"/>
+            </a:lvl2pPr>
+            <a:lvl3pPr marL="914400" indent="0">
+              <a:buNone/>
+              <a:defRPr sz="1200"/>
+            </a:lvl3pPr>
+            <a:lvl4pPr marL="1371600" indent="0">
+              <a:buNone/>
+              <a:defRPr sz="1000"/>
+            </a:lvl4pPr>
+            <a:lvl5pPr marL="1828800" indent="0">
+              <a:buNone/>
+              <a:defRPr sz="1000"/>
+            </a:lvl5pPr>
+            <a:lvl6pPr marL="2286000" indent="0">
+              <a:buNone/>
+              <a:defRPr sz="1000"/>
+            </a:lvl6pPr>
+            <a:lvl7pPr marL="2743200" indent="0">
+              <a:buNone/>
+              <a:defRPr sz="1000"/>
+            </a:lvl7pPr>
+            <a:lvl8pPr marL="3200400" indent="0">
+              <a:buNone/>
+              <a:defRPr sz="1000"/>
+            </a:lvl8pPr>
+            <a:lvl9pPr marL="3657600" indent="0">
+              <a:buNone/>
+              <a:defRPr sz="1000"/>
+            </a:lvl9pPr>
+          </a:lstStyle>
+          <a:p>
+            <a:pPr lvl="0"/>
+            <a:r>
+              <a:rPr lang="en-US"/>
+              <a:t>Click to edit Master text styles</a:t>
+            </a:r>
+          </a:p>
+        </p:txBody>
+      </p:sp>
+      <p:sp>
+        <p:nvSpPr>
+          <p:cNvPr id="5" name="Date Placeholder 4"/>
+          <p:cNvSpPr>
+            <a:spLocks noGrp="1"/>
+          </p:cNvSpPr>
+          <p:nvPr>
+            <p:ph type="dt" sz="half" idx="10"/>
+          </p:nvPr>
+        </p:nvSpPr>
+        <p:spPr/>
+        <p:txBody>
+          <a:bodyPr/>
+          <a:lstStyle/>
+          <a:p>
+            <a:fld id="{12EF78E3-FDA3-4D28-AAA2-0B81F349A39D}" type="datetimeFigureOut">
+              <a:rPr lang="en-US" dirty="0"/>
+              <a:t>6/5/2026</a:t>
+            </a:fld>
+            <a:endParaRPr lang="en-US" dirty="0"/>
+          </a:p>
+        </p:txBody>
+      </p:sp>
+      <p:sp>
+        <p:nvSpPr>
+          <p:cNvPr id="6" name="Footer Placeholder 5"/>
+          <p:cNvSpPr>
+            <a:spLocks noGrp="1"/>
+          </p:cNvSpPr>
+          <p:nvPr>
+            <p:ph type="ftr" sz="quarter" idx="11"/>
+          </p:nvPr>
+        </p:nvSpPr>
+        <p:spPr/>
+        <p:txBody>
+          <a:bodyPr/>
+          <a:lstStyle/>
+          <a:p>
+            <a:endParaRPr lang="en-US" dirty="0"/>
+          </a:p>
+        </p:txBody>
+      </p:sp>
+      <p:sp>
+        <p:nvSpPr>
+          <p:cNvPr id="7" name="Slide Number Placeholder 6"/>
+          <p:cNvSpPr>
+            <a:spLocks noGrp="1"/>
+          </p:cNvSpPr>
+          <p:nvPr>
+            <p:ph type="sldNum" sz="quarter" idx="12"/>
+          </p:nvPr>
+        </p:nvSpPr>
+        <p:spPr/>
+        <p:txBody>
+          <a:bodyPr/>
+          <a:lstStyle/>
+          <a:p>
+            <a:fld id="{6D22F896-40B5-4ADD-8801-0D06FADFA095}" type="slidenum">
+              <a:rPr lang="en-US" dirty="0"/>
+              <a:t>‹#›</a:t>
+            </a:fld>
+            <a:endParaRPr lang="en-US" dirty="0"/>
+          </a:p>
+        </p:txBody>
+      </p:sp>
+    </p:spTree>
+    <p:extLst>
+      <p:ext uri="{BB962C8B-B14F-4D97-AF65-F5344CB8AC3E}">
+        <p14:creationId xmlns:p14="http://schemas.microsoft.com/office/powerpoint/2010/main" val="511699671"/>
       </p:ext>
     </p:extLst>
   </p:cSld>
@@ -491,7 +5461,7 @@
 <p:sldMaster xmlns:a="http://schemas.openxmlformats.org/drawingml/2006/main" xmlns:r="http://schemas.openxmlformats.org/officeDocument/2006/relationships" xmlns:p="http://schemas.openxmlformats.org/presentationml/2006/main">
   <p:cSld>
     <p:bg>
-      <p:bgRef idx="1001">
+      <p:bgRef idx="1003">
         <a:schemeClr val="bg1"/>
       </p:bgRef>
     </p:bg>
@@ -509,125 +5479,438 @@
           <a:chExt cx="0" cy="0"/>
         </a:xfrm>
       </p:grpSpPr>
-      <p:sp>
-        <p:nvSpPr>
-          <p:cNvPr id="2" name="Title">
+      <p:pic>
+        <p:nvPicPr>
+          <p:cNvPr id="7" name="Picture 6" descr="Brickwork-HD-R1a.jpg"/>
+          <p:cNvPicPr>
+            <a:picLocks noChangeAspect="1"/>
+          </p:cNvPicPr>
+          <p:nvPr/>
+        </p:nvPicPr>
+        <p:blipFill>
+          <a:blip r:embed="rId20">
             <a:extLst>
-              <a:ext uri="{FF2B5EF4-FFF2-40B4-BE49-F238E27FC236}">
-                <a16:creationId xmlns:a16="http://schemas.microsoft.com/office/drawing/2014/main" id="{B682F04C-DEC8-2CC0-6F1F-DB6E1DA96954}"/>
+              <a:ext uri="{28A0092B-C50C-407E-A947-70E740481C1C}">
+                <a14:useLocalDpi xmlns:a14="http://schemas.microsoft.com/office/drawing/2010/main" val="0"/>
               </a:ext>
             </a:extLst>
-          </p:cNvPr>
-          <p:cNvSpPr>
-            <a:spLocks noGrp="1"/>
-          </p:cNvSpPr>
-          <p:nvPr>
-            <p:ph type="title"/>
-          </p:nvPr>
-        </p:nvSpPr>
+          </a:blip>
+          <a:stretch>
+            <a:fillRect/>
+          </a:stretch>
+        </p:blipFill>
         <p:spPr>
           <a:xfrm>
-            <a:off x="838200" y="365125"/>
-            <a:ext cx="10515600" cy="1325563"/>
+            <a:off x="0" y="0"/>
+            <a:ext cx="12192000" cy="6858000"/>
           </a:xfrm>
           <a:prstGeom prst="rect">
             <a:avLst/>
           </a:prstGeom>
         </p:spPr>
-        <p:txBody>
-          <a:bodyPr vert="horz" lIns="91440" tIns="45720" rIns="91440" bIns="45720" rtlCol="0" anchor="ctr">
-            <a:normAutofit/>
-          </a:bodyPr>
-          <a:lstStyle/>
-          <a:p>
-            <a:r>
-              <a:rPr lang="en-US" dirty="0"/>
-              <a:t>Click to edit Master title style</a:t>
-            </a:r>
-            <a:endParaRPr lang="en-GB" dirty="0"/>
-          </a:p>
-        </p:txBody>
-      </p:sp>
-      <p:sp>
-        <p:nvSpPr>
-          <p:cNvPr id="3" name="Body">
-            <a:extLst>
-              <a:ext uri="{FF2B5EF4-FFF2-40B4-BE49-F238E27FC236}">
-                <a16:creationId xmlns:a16="http://schemas.microsoft.com/office/drawing/2014/main" id="{939A8866-BFC3-3A4E-01A5-D3C7ED25190A}"/>
-              </a:ext>
-            </a:extLst>
-          </p:cNvPr>
-          <p:cNvSpPr>
-            <a:spLocks noGrp="1"/>
-          </p:cNvSpPr>
-          <p:nvPr>
-            <p:ph type="body" idx="1"/>
+      </p:pic>
+      <p:grpSp>
+        <p:nvGrpSpPr>
+          <p:cNvPr id="10" name="Group 9"/>
+          <p:cNvGrpSpPr/>
+          <p:nvPr/>
+        </p:nvGrpSpPr>
+        <p:grpSpPr>
+          <a:xfrm>
+            <a:off x="-25397" y="0"/>
+            <a:ext cx="12005350" cy="6644081"/>
+            <a:chOff x="-25397" y="0"/>
+            <a:chExt cx="12005350" cy="6644081"/>
+          </a:xfrm>
+        </p:grpSpPr>
+        <p:sp useBgFill="1">
+          <p:nvSpPr>
+            <p:cNvPr id="11" name="Rectangle 10"/>
+            <p:cNvSpPr/>
+            <p:nvPr/>
+          </p:nvSpPr>
+          <p:spPr>
+            <a:xfrm>
+              <a:off x="1" y="0"/>
+              <a:ext cx="11979952" cy="6644081"/>
+            </a:xfrm>
+            <a:prstGeom prst="rect">
+              <a:avLst/>
+            </a:prstGeom>
+            <a:ln>
+              <a:noFill/>
+            </a:ln>
+            <a:effectLst>
+              <a:outerShdw blurRad="98425" dist="76200" dir="4380000" algn="tl" rotWithShape="0">
+                <a:srgbClr val="000000">
+                  <a:alpha val="68000"/>
+                </a:srgbClr>
+              </a:outerShdw>
+            </a:effectLst>
+          </p:spPr>
+          <p:style>
+            <a:lnRef idx="1">
+              <a:schemeClr val="accent1"/>
+            </a:lnRef>
+            <a:fillRef idx="3">
+              <a:schemeClr val="accent1"/>
+            </a:fillRef>
+            <a:effectRef idx="2">
+              <a:schemeClr val="accent1"/>
+            </a:effectRef>
+            <a:fontRef idx="minor">
+              <a:schemeClr val="lt1"/>
+            </a:fontRef>
+          </p:style>
+        </p:sp>
+        <p:sp>
+          <p:nvSpPr>
+            <p:cNvPr id="12" name="Freeform 11"/>
+            <p:cNvSpPr/>
+            <p:nvPr/>
+          </p:nvSpPr>
+          <p:spPr>
+            <a:xfrm>
+              <a:off x="-25397" y="0"/>
+              <a:ext cx="11773291" cy="6419514"/>
+            </a:xfrm>
+            <a:custGeom>
+              <a:avLst/>
+              <a:gdLst/>
+              <a:ahLst/>
+              <a:cxnLst/>
+              <a:rect l="l" t="t" r="r" b="b"/>
+              <a:pathLst>
+                <a:path w="11773291" h="6419514">
+                  <a:moveTo>
+                    <a:pt x="11750059" y="0"/>
+                  </a:moveTo>
+                  <a:lnTo>
+                    <a:pt x="11773291" y="6419514"/>
+                  </a:lnTo>
+                  <a:lnTo>
+                    <a:pt x="0" y="6411047"/>
+                  </a:lnTo>
+                </a:path>
+              </a:pathLst>
+            </a:custGeom>
+            <a:ln w="82550">
+              <a:solidFill>
+                <a:schemeClr val="tx1">
+                  <a:lumMod val="50000"/>
+                  <a:lumOff val="50000"/>
+                </a:schemeClr>
+              </a:solidFill>
+              <a:miter lim="800000"/>
+            </a:ln>
+          </p:spPr>
+          <p:style>
+            <a:lnRef idx="2">
+              <a:schemeClr val="accent1"/>
+            </a:lnRef>
+            <a:fillRef idx="0">
+              <a:schemeClr val="accent1"/>
+            </a:fillRef>
+            <a:effectRef idx="1">
+              <a:schemeClr val="accent1"/>
+            </a:effectRef>
+            <a:fontRef idx="minor">
+              <a:schemeClr val="tx1"/>
+            </a:fontRef>
+          </p:style>
+        </p:sp>
+        <p:sp>
+          <p:nvSpPr>
+            <p:cNvPr id="13" name="Rectangle 12"/>
+            <p:cNvSpPr/>
+            <p:nvPr/>
+          </p:nvSpPr>
+          <p:spPr>
+            <a:xfrm>
+              <a:off x="1" y="5600215"/>
+              <a:ext cx="11706512" cy="780581"/>
+            </a:xfrm>
+            <a:prstGeom prst="rect">
+              <a:avLst/>
+            </a:prstGeom>
+            <a:gradFill flip="none" rotWithShape="1">
+              <a:gsLst>
+                <a:gs pos="34000">
+                  <a:schemeClr val="accent1"/>
+                </a:gs>
+                <a:gs pos="100000">
+                  <a:schemeClr val="accent1">
+                    <a:lumMod val="50000"/>
+                  </a:schemeClr>
+                </a:gs>
+              </a:gsLst>
+              <a:path path="circle">
+                <a:fillToRect l="50000" t="50000" r="50000" b="50000"/>
+              </a:path>
+              <a:tileRect/>
+            </a:gradFill>
+            <a:ln>
+              <a:noFill/>
+            </a:ln>
+          </p:spPr>
+          <p:style>
+            <a:lnRef idx="1">
+              <a:schemeClr val="accent1"/>
+            </a:lnRef>
+            <a:fillRef idx="3">
+              <a:schemeClr val="accent1"/>
+            </a:fillRef>
+            <a:effectRef idx="2">
+              <a:schemeClr val="accent1"/>
+            </a:effectRef>
+            <a:fontRef idx="minor">
+              <a:schemeClr val="lt1"/>
+            </a:fontRef>
+          </p:style>
+        </p:sp>
+      </p:grpSp>
+      <p:sp>
+        <p:nvSpPr>
+          <p:cNvPr id="2" name="Title Placeholder 1"/>
+          <p:cNvSpPr>
+            <a:spLocks noGrp="1"/>
+          </p:cNvSpPr>
+          <p:nvPr>
+            <p:ph type="title"/>
           </p:nvPr>
         </p:nvSpPr>
         <p:spPr>
           <a:xfrm>
-            <a:off x="838200" y="1825625"/>
-            <a:ext cx="10515600" cy="4351338"/>
+            <a:off x="685801" y="685800"/>
+            <a:ext cx="10396882" cy="1151965"/>
           </a:xfrm>
           <a:prstGeom prst="rect">
             <a:avLst/>
           </a:prstGeom>
         </p:spPr>
         <p:txBody>
-          <a:bodyPr vert="horz" lIns="91440" tIns="45720" rIns="91440" bIns="45720" rtlCol="0">
+          <a:bodyPr vert="horz" lIns="91440" tIns="45720" rIns="91440" bIns="45720" rtlCol="0" anchor="ctr">
             <a:normAutofit/>
           </a:bodyPr>
           <a:lstStyle/>
           <a:p>
+            <a:r>
+              <a:rPr lang="en-US"/>
+              <a:t>Click to edit Master title style</a:t>
+            </a:r>
+            <a:endParaRPr lang="en-US" dirty="0"/>
+          </a:p>
+        </p:txBody>
+      </p:sp>
+      <p:sp>
+        <p:nvSpPr>
+          <p:cNvPr id="3" name="Text Placeholder 2"/>
+          <p:cNvSpPr>
+            <a:spLocks noGrp="1"/>
+          </p:cNvSpPr>
+          <p:nvPr>
+            <p:ph type="body" idx="1"/>
+          </p:nvPr>
+        </p:nvSpPr>
+        <p:spPr>
+          <a:xfrm>
+            <a:off x="685800" y="2063396"/>
+            <a:ext cx="10396883" cy="3311189"/>
+          </a:xfrm>
+          <a:prstGeom prst="rect">
+            <a:avLst/>
+          </a:prstGeom>
+        </p:spPr>
+        <p:txBody>
+          <a:bodyPr vert="horz" lIns="91440" tIns="45720" rIns="91440" bIns="45720" rtlCol="0" anchor="ctr">
+            <a:normAutofit/>
+          </a:bodyPr>
+          <a:lstStyle/>
+          <a:p>
             <a:pPr lvl="0"/>
             <a:r>
+              <a:rPr lang="en-US"/>
+              <a:t>Click to edit Master text styles</a:t>
+            </a:r>
+          </a:p>
+          <a:p>
+            <a:pPr lvl="1"/>
+            <a:r>
+              <a:rPr lang="en-US"/>
+              <a:t>Second level</a:t>
+            </a:r>
+          </a:p>
+          <a:p>
+            <a:pPr lvl="2"/>
+            <a:r>
+              <a:rPr lang="en-US"/>
+              <a:t>Third level</a:t>
+            </a:r>
+          </a:p>
+          <a:p>
+            <a:pPr lvl="3"/>
+            <a:r>
+              <a:rPr lang="en-US"/>
+              <a:t>Fourth level</a:t>
+            </a:r>
+          </a:p>
+          <a:p>
+            <a:pPr lvl="4"/>
+            <a:r>
+              <a:rPr lang="en-US"/>
+              <a:t>Fifth level</a:t>
+            </a:r>
+            <a:endParaRPr lang="en-US" dirty="0"/>
+          </a:p>
+        </p:txBody>
+      </p:sp>
+      <p:sp>
+        <p:nvSpPr>
+          <p:cNvPr id="4" name="Date Placeholder 3"/>
+          <p:cNvSpPr>
+            <a:spLocks noGrp="1"/>
+          </p:cNvSpPr>
+          <p:nvPr>
+            <p:ph type="dt" sz="half" idx="2"/>
+          </p:nvPr>
+        </p:nvSpPr>
+        <p:spPr>
+          <a:xfrm>
+            <a:off x="7298083" y="5757334"/>
+            <a:ext cx="3784600" cy="498470"/>
+          </a:xfrm>
+          <a:prstGeom prst="rect">
+            <a:avLst/>
+          </a:prstGeom>
+        </p:spPr>
+        <p:txBody>
+          <a:bodyPr vert="horz" lIns="91440" tIns="45720" rIns="91440" bIns="45720" rtlCol="0" anchor="ctr"/>
+          <a:lstStyle>
+            <a:lvl1pPr algn="r">
+              <a:defRPr sz="3200" cap="all" baseline="0">
+                <a:solidFill>
+                  <a:schemeClr val="accent1">
+                    <a:lumMod val="50000"/>
+                  </a:schemeClr>
+                </a:solidFill>
+              </a:defRPr>
+            </a:lvl1pPr>
+          </a:lstStyle>
+          <a:p>
+            <a:fld id="{C35BB1C6-BF8F-4481-8AB2-603A1C8A906A}" type="datetimeFigureOut">
               <a:rPr lang="en-US" dirty="0"/>
-              <a:t>Click to edit Master text styles</a:t>
-            </a:r>
-          </a:p>
-          <a:p>
-            <a:pPr lvl="1"/>
-            <a:r>
+              <a:t>6/5/2026</a:t>
+            </a:fld>
+            <a:endParaRPr lang="en-US" dirty="0"/>
+          </a:p>
+        </p:txBody>
+      </p:sp>
+      <p:sp>
+        <p:nvSpPr>
+          <p:cNvPr id="5" name="Footer Placeholder 4"/>
+          <p:cNvSpPr>
+            <a:spLocks noGrp="1"/>
+          </p:cNvSpPr>
+          <p:nvPr>
+            <p:ph type="ftr" sz="quarter" idx="3"/>
+          </p:nvPr>
+        </p:nvSpPr>
+        <p:spPr>
+          <a:xfrm>
+            <a:off x="685801" y="5757334"/>
+            <a:ext cx="5499719" cy="498470"/>
+          </a:xfrm>
+          <a:prstGeom prst="rect">
+            <a:avLst/>
+          </a:prstGeom>
+        </p:spPr>
+        <p:txBody>
+          <a:bodyPr vert="horz" lIns="91440" tIns="45720" rIns="91440" bIns="45720" rtlCol="0" anchor="ctr"/>
+          <a:lstStyle>
+            <a:lvl1pPr algn="l">
+              <a:defRPr sz="3200" cap="all" baseline="0">
+                <a:solidFill>
+                  <a:schemeClr val="accent1">
+                    <a:lumMod val="50000"/>
+                  </a:schemeClr>
+                </a:solidFill>
+              </a:defRPr>
+            </a:lvl1pPr>
+          </a:lstStyle>
+          <a:p>
+            <a:endParaRPr lang="en-US" dirty="0"/>
+          </a:p>
+        </p:txBody>
+      </p:sp>
+      <p:sp>
+        <p:nvSpPr>
+          <p:cNvPr id="6" name="Slide Number Placeholder 5"/>
+          <p:cNvSpPr>
+            <a:spLocks noGrp="1"/>
+          </p:cNvSpPr>
+          <p:nvPr>
+            <p:ph type="sldNum" sz="quarter" idx="4"/>
+          </p:nvPr>
+        </p:nvSpPr>
+        <p:spPr>
+          <a:xfrm>
+            <a:off x="6287121" y="5757334"/>
+            <a:ext cx="907186" cy="498470"/>
+          </a:xfrm>
+          <a:prstGeom prst="rect">
+            <a:avLst/>
+          </a:prstGeom>
+        </p:spPr>
+        <p:txBody>
+          <a:bodyPr vert="horz" lIns="91440" tIns="45720" rIns="91440" bIns="45720" rtlCol="0" anchor="ctr"/>
+          <a:lstStyle>
+            <a:lvl1pPr algn="ctr">
+              <a:defRPr sz="3200" cap="all" baseline="0">
+                <a:solidFill>
+                  <a:schemeClr val="accent1">
+                    <a:lumMod val="50000"/>
+                  </a:schemeClr>
+                </a:solidFill>
+              </a:defRPr>
+            </a:lvl1pPr>
+          </a:lstStyle>
+          <a:p>
+            <a:fld id="{6D22F896-40B5-4ADD-8801-0D06FADFA095}" type="slidenum">
               <a:rPr lang="en-US" dirty="0"/>
-              <a:t>Second level</a:t>
-            </a:r>
-          </a:p>
-          <a:p>
-            <a:pPr lvl="2"/>
-            <a:r>
-              <a:rPr lang="en-US" dirty="0"/>
-              <a:t>Third level</a:t>
-            </a:r>
-          </a:p>
-          <a:p>
-            <a:pPr lvl="3"/>
-            <a:r>
-              <a:rPr lang="en-US" dirty="0"/>
-              <a:t>Fourth level</a:t>
-            </a:r>
-          </a:p>
-          <a:p>
-            <a:pPr lvl="4"/>
-            <a:r>
-              <a:rPr lang="en-US" dirty="0"/>
-              <a:t>Fifth level</a:t>
-            </a:r>
-            <a:endParaRPr lang="en-GB" dirty="0"/>
+              <a:pPr/>
+              <a:t>‹#›</a:t>
+            </a:fld>
+            <a:endParaRPr lang="en-US" dirty="0"/>
           </a:p>
         </p:txBody>
       </p:sp>
     </p:spTree>
     <p:extLst>
       <p:ext uri="{BB962C8B-B14F-4D97-AF65-F5344CB8AC3E}">
-        <p14:creationId xmlns:p14="http://schemas.microsoft.com/office/powerpoint/2010/main" val="3097362788"/>
+        <p14:creationId xmlns:p14="http://schemas.microsoft.com/office/powerpoint/2010/main" val="381872456"/>
       </p:ext>
     </p:extLst>
   </p:cSld>
   <p:clrMap bg1="lt1" tx1="dk1" bg2="lt2" tx2="dk2" accent1="accent1" accent2="accent2" accent3="accent3" accent4="accent4" accent5="accent5" accent6="accent6" hlink="hlink" folHlink="folHlink"/>
   <p:sldLayoutIdLst>
-    <p:sldLayoutId id="2147483649" r:id="rId1"/>
-    <p:sldLayoutId id="2147483650" r:id="rId2"/>
-    <p:sldLayoutId id="2147483651" r:id="rId3"/>
+    <p:sldLayoutId id="2147483653" r:id="rId1"/>
+    <p:sldLayoutId id="2147483654" r:id="rId2"/>
+    <p:sldLayoutId id="2147483655" r:id="rId3"/>
+    <p:sldLayoutId id="2147483656" r:id="rId4"/>
+    <p:sldLayoutId id="2147483657" r:id="rId5"/>
+    <p:sldLayoutId id="2147483658" r:id="rId6"/>
+    <p:sldLayoutId id="2147483659" r:id="rId7"/>
+    <p:sldLayoutId id="2147483660" r:id="rId8"/>
+    <p:sldLayoutId id="2147483661" r:id="rId9"/>
+    <p:sldLayoutId id="2147483662" r:id="rId10"/>
+    <p:sldLayoutId id="2147483663" r:id="rId11"/>
+    <p:sldLayoutId id="2147483664" r:id="rId12"/>
+    <p:sldLayoutId id="2147483665" r:id="rId13"/>
+    <p:sldLayoutId id="2147483666" r:id="rId14"/>
+    <p:sldLayoutId id="2147483667" r:id="rId15"/>
+    <p:sldLayoutId id="2147483668" r:id="rId16"/>
+    <p:sldLayoutId id="2147483669" r:id="rId17"/>
+    <p:sldLayoutId id="2147483670" r:id="rId18"/>
   </p:sldLayoutIdLst>
   <p:txStyles>
     <p:titleStyle>
@@ -639,10 +5922,11 @@
           <a:spcPct val="0"/>
         </a:spcBef>
         <a:buNone/>
-        <a:defRPr sz="4400" kern="1200">
+        <a:defRPr sz="5400" kern="1200" cap="all" baseline="0">
           <a:solidFill>
-            <a:schemeClr val="tx1"/>
+            <a:schemeClr val="accent1"/>
           </a:solidFill>
+          <a:effectLst/>
           <a:latin typeface="+mj-lt"/>
           <a:ea typeface="+mj-ea"/>
           <a:cs typeface="+mj-cs"/>
@@ -652,17 +5936,22 @@
     <p:bodyStyle>
       <a:lvl1pPr marL="228600" indent="-228600" algn="l" defTabSz="914400" rtl="0" eaLnBrk="1" latinLnBrk="0" hangingPunct="1">
         <a:lnSpc>
-          <a:spcPct val="90000"/>
+          <a:spcPct val="120000"/>
         </a:lnSpc>
         <a:spcBef>
           <a:spcPts val="1000"/>
         </a:spcBef>
+        <a:buClr>
+          <a:schemeClr val="accent1"/>
+        </a:buClr>
+        <a:buSzPct val="160000"/>
         <a:buFont typeface="Arial" panose="020B0604020202020204" pitchFamily="34" charset="0"/>
         <a:buChar char="•"/>
-        <a:defRPr sz="2800" kern="1200">
+        <a:defRPr sz="2000" kern="1200" cap="all" baseline="0">
           <a:solidFill>
             <a:schemeClr val="tx1"/>
           </a:solidFill>
+          <a:effectLst/>
           <a:latin typeface="+mn-lt"/>
           <a:ea typeface="+mn-ea"/>
           <a:cs typeface="+mn-cs"/>
@@ -670,17 +5959,22 @@
       </a:lvl1pPr>
       <a:lvl2pPr marL="685800" indent="-228600" algn="l" defTabSz="914400" rtl="0" eaLnBrk="1" latinLnBrk="0" hangingPunct="1">
         <a:lnSpc>
-          <a:spcPct val="90000"/>
+          <a:spcPct val="120000"/>
         </a:lnSpc>
         <a:spcBef>
           <a:spcPts val="500"/>
         </a:spcBef>
+        <a:buClr>
+          <a:schemeClr val="accent1"/>
+        </a:buClr>
+        <a:buSzPct val="160000"/>
         <a:buFont typeface="Arial" panose="020B0604020202020204" pitchFamily="34" charset="0"/>
         <a:buChar char="•"/>
-        <a:defRPr sz="2400" kern="1200">
+        <a:defRPr sz="1800" kern="1200" cap="all" baseline="0">
           <a:solidFill>
             <a:schemeClr val="tx1"/>
           </a:solidFill>
+          <a:effectLst/>
           <a:latin typeface="+mn-lt"/>
           <a:ea typeface="+mn-ea"/>
           <a:cs typeface="+mn-cs"/>
@@ -688,17 +5982,22 @@
       </a:lvl2pPr>
       <a:lvl3pPr marL="1143000" indent="-228600" algn="l" defTabSz="914400" rtl="0" eaLnBrk="1" latinLnBrk="0" hangingPunct="1">
         <a:lnSpc>
-          <a:spcPct val="90000"/>
+          <a:spcPct val="120000"/>
         </a:lnSpc>
         <a:spcBef>
           <a:spcPts val="500"/>
         </a:spcBef>
+        <a:buClr>
+          <a:schemeClr val="accent1"/>
+        </a:buClr>
+        <a:buSzPct val="160000"/>
         <a:buFont typeface="Arial" panose="020B0604020202020204" pitchFamily="34" charset="0"/>
         <a:buChar char="•"/>
-        <a:defRPr sz="2000" kern="1200">
+        <a:defRPr sz="1600" kern="1200" cap="all" baseline="0">
           <a:solidFill>
             <a:schemeClr val="tx1"/>
           </a:solidFill>
+          <a:effectLst/>
           <a:latin typeface="+mn-lt"/>
           <a:ea typeface="+mn-ea"/>
           <a:cs typeface="+mn-cs"/>
@@ -706,17 +6005,22 @@
       </a:lvl3pPr>
       <a:lvl4pPr marL="1600200" indent="-228600" algn="l" defTabSz="914400" rtl="0" eaLnBrk="1" latinLnBrk="0" hangingPunct="1">
         <a:lnSpc>
-          <a:spcPct val="90000"/>
+          <a:spcPct val="120000"/>
         </a:lnSpc>
         <a:spcBef>
           <a:spcPts val="500"/>
         </a:spcBef>
+        <a:buClr>
+          <a:schemeClr val="accent1"/>
+        </a:buClr>
+        <a:buSzPct val="160000"/>
         <a:buFont typeface="Arial" panose="020B0604020202020204" pitchFamily="34" charset="0"/>
         <a:buChar char="•"/>
-        <a:defRPr sz="1800" kern="1200">
+        <a:defRPr sz="1400" kern="1200" cap="all" baseline="0">
           <a:solidFill>
             <a:schemeClr val="tx1"/>
           </a:solidFill>
+          <a:effectLst/>
           <a:latin typeface="+mn-lt"/>
           <a:ea typeface="+mn-ea"/>
           <a:cs typeface="+mn-cs"/>
@@ -724,17 +6028,22 @@
       </a:lvl4pPr>
       <a:lvl5pPr marL="2057400" indent="-228600" algn="l" defTabSz="914400" rtl="0" eaLnBrk="1" latinLnBrk="0" hangingPunct="1">
         <a:lnSpc>
-          <a:spcPct val="90000"/>
+          <a:spcPct val="120000"/>
         </a:lnSpc>
         <a:spcBef>
           <a:spcPts val="500"/>
         </a:spcBef>
+        <a:buClr>
+          <a:schemeClr val="accent1"/>
+        </a:buClr>
+        <a:buSzPct val="160000"/>
         <a:buFont typeface="Arial" panose="020B0604020202020204" pitchFamily="34" charset="0"/>
         <a:buChar char="•"/>
-        <a:defRPr sz="1800" kern="1200">
+        <a:defRPr sz="1400" kern="1200" cap="all" baseline="0">
           <a:solidFill>
             <a:schemeClr val="tx1"/>
           </a:solidFill>
+          <a:effectLst/>
           <a:latin typeface="+mn-lt"/>
           <a:ea typeface="+mn-ea"/>
           <a:cs typeface="+mn-cs"/>
@@ -742,17 +6051,22 @@
       </a:lvl5pPr>
       <a:lvl6pPr marL="2514600" indent="-228600" algn="l" defTabSz="914400" rtl="0" eaLnBrk="1" latinLnBrk="0" hangingPunct="1">
         <a:lnSpc>
-          <a:spcPct val="90000"/>
+          <a:spcPct val="120000"/>
         </a:lnSpc>
         <a:spcBef>
           <a:spcPts val="500"/>
         </a:spcBef>
+        <a:buClr>
+          <a:schemeClr val="accent1"/>
+        </a:buClr>
+        <a:buSzPct val="160000"/>
         <a:buFont typeface="Arial" panose="020B0604020202020204" pitchFamily="34" charset="0"/>
         <a:buChar char="•"/>
-        <a:defRPr sz="1800" kern="1200">
+        <a:defRPr sz="1400" kern="1200" cap="all" baseline="0">
           <a:solidFill>
             <a:schemeClr val="tx1"/>
           </a:solidFill>
+          <a:effectLst/>
           <a:latin typeface="+mn-lt"/>
           <a:ea typeface="+mn-ea"/>
           <a:cs typeface="+mn-cs"/>
@@ -760,17 +6074,22 @@
       </a:lvl6pPr>
       <a:lvl7pPr marL="2971800" indent="-228600" algn="l" defTabSz="914400" rtl="0" eaLnBrk="1" latinLnBrk="0" hangingPunct="1">
         <a:lnSpc>
-          <a:spcPct val="90000"/>
+          <a:spcPct val="120000"/>
         </a:lnSpc>
         <a:spcBef>
           <a:spcPts val="500"/>
         </a:spcBef>
+        <a:buClr>
+          <a:schemeClr val="accent1"/>
+        </a:buClr>
+        <a:buSzPct val="160000"/>
         <a:buFont typeface="Arial" panose="020B0604020202020204" pitchFamily="34" charset="0"/>
         <a:buChar char="•"/>
-        <a:defRPr sz="1800" kern="1200">
+        <a:defRPr sz="1400" kern="1200" cap="all" baseline="0">
           <a:solidFill>
             <a:schemeClr val="tx1"/>
           </a:solidFill>
+          <a:effectLst/>
           <a:latin typeface="+mn-lt"/>
           <a:ea typeface="+mn-ea"/>
           <a:cs typeface="+mn-cs"/>
@@ -778,17 +6097,22 @@
       </a:lvl7pPr>
       <a:lvl8pPr marL="3429000" indent="-228600" algn="l" defTabSz="914400" rtl="0" eaLnBrk="1" latinLnBrk="0" hangingPunct="1">
         <a:lnSpc>
-          <a:spcPct val="90000"/>
+          <a:spcPct val="120000"/>
         </a:lnSpc>
         <a:spcBef>
           <a:spcPts val="500"/>
         </a:spcBef>
+        <a:buClr>
+          <a:schemeClr val="accent1"/>
+        </a:buClr>
+        <a:buSzPct val="160000"/>
         <a:buFont typeface="Arial" panose="020B0604020202020204" pitchFamily="34" charset="0"/>
         <a:buChar char="•"/>
-        <a:defRPr sz="1800" kern="1200">
+        <a:defRPr sz="1400" kern="1200" cap="all" baseline="0">
           <a:solidFill>
             <a:schemeClr val="tx1"/>
           </a:solidFill>
+          <a:effectLst/>
           <a:latin typeface="+mn-lt"/>
           <a:ea typeface="+mn-ea"/>
           <a:cs typeface="+mn-cs"/>
@@ -796,17 +6120,22 @@
       </a:lvl8pPr>
       <a:lvl9pPr marL="3886200" indent="-228600" algn="l" defTabSz="914400" rtl="0" eaLnBrk="1" latinLnBrk="0" hangingPunct="1">
         <a:lnSpc>
-          <a:spcPct val="90000"/>
+          <a:spcPct val="120000"/>
         </a:lnSpc>
         <a:spcBef>
           <a:spcPts val="500"/>
         </a:spcBef>
+        <a:buClr>
+          <a:schemeClr val="accent1"/>
+        </a:buClr>
+        <a:buSzPct val="160000"/>
         <a:buFont typeface="Arial" panose="020B0604020202020204" pitchFamily="34" charset="0"/>
         <a:buChar char="•"/>
-        <a:defRPr sz="1800" kern="1200">
+        <a:defRPr sz="1400" kern="1200" cap="all" baseline="0">
           <a:solidFill>
             <a:schemeClr val="tx1"/>
           </a:solidFill>
+          <a:effectLst/>
           <a:latin typeface="+mn-lt"/>
           <a:ea typeface="+mn-ea"/>
           <a:cs typeface="+mn-cs"/>
@@ -1153,9 +6482,9 @@
 </file>
 
 <file path=ppt/theme/theme1.xml><?xml version="1.0" encoding="utf-8"?>
-<a:theme xmlns:a="http://schemas.openxmlformats.org/drawingml/2006/main" name="Office Theme">
+<a:theme xmlns:a="http://schemas.openxmlformats.org/drawingml/2006/main" name="Main Event">
   <a:themeElements>
-    <a:clrScheme name="Office">
+    <a:clrScheme name="Main Event">
       <a:dk1>
         <a:sysClr val="windowText" lastClr="000000"/>
       </a:dk1>
@@ -1163,44 +6492,44 @@
         <a:sysClr val="window" lastClr="FFFFFF"/>
       </a:lt1>
       <a:dk2>
-        <a:srgbClr val="44546A"/>
+        <a:srgbClr val="424242"/>
       </a:dk2>
       <a:lt2>
-        <a:srgbClr val="E7E6E6"/>
+        <a:srgbClr val="C8C8C8"/>
       </a:lt2>
       <a:accent1>
-        <a:srgbClr val="4472C4"/>
+        <a:srgbClr val="B80E0F"/>
       </a:accent1>
       <a:accent2>
-        <a:srgbClr val="ED7D31"/>
+        <a:srgbClr val="A6987D"/>
       </a:accent2>
       <a:accent3>
-        <a:srgbClr val="A5A5A5"/>
+        <a:srgbClr val="7F9A71"/>
       </a:accent3>
       <a:accent4>
-        <a:srgbClr val="FFC000"/>
+        <a:srgbClr val="64969F"/>
       </a:accent4>
       <a:accent5>
-        <a:srgbClr val="5B9BD5"/>
+        <a:srgbClr val="9B75B2"/>
       </a:accent5>
       <a:accent6>
-        <a:srgbClr val="70AD47"/>
+        <a:srgbClr val="80737A"/>
       </a:accent6>
       <a:hlink>
-        <a:srgbClr val="0563C1"/>
+        <a:srgbClr val="F21213"/>
       </a:hlink>
       <a:folHlink>
-        <a:srgbClr val="954F72"/>
+        <a:srgbClr val="B6A394"/>
       </a:folHlink>
     </a:clrScheme>
-    <a:fontScheme name="Office">
+    <a:fontScheme name="Main Event">
       <a:majorFont>
-        <a:latin typeface="Calibri Light" panose="020F0302020204030204"/>
+        <a:latin typeface="Impact" panose="020B0806030902050204"/>
         <a:ea typeface=""/>
         <a:cs typeface=""/>
-        <a:font script="Jpan" typeface="游ゴシック Light"/>
+        <a:font script="Jpan" typeface="ＭＳ Ｐゴシック"/>
         <a:font script="Hang" typeface="맑은 고딕"/>
-        <a:font script="Hans" typeface="等线 Light"/>
+        <a:font script="Hans" typeface="宋体"/>
         <a:font script="Hant" typeface="新細明體"/>
         <a:font script="Arab" typeface="Times New Roman"/>
         <a:font script="Hebr" typeface="Times New Roman"/>
@@ -1228,31 +6557,14 @@
         <a:font script="Viet" typeface="Times New Roman"/>
         <a:font script="Uigh" typeface="Microsoft Uighur"/>
         <a:font script="Geor" typeface="Sylfaen"/>
-        <a:font script="Armn" typeface="Arial"/>
-        <a:font script="Bugi" typeface="Leelawadee UI"/>
-        <a:font script="Bopo" typeface="Microsoft JhengHei"/>
-        <a:font script="Java" typeface="Javanese Text"/>
-        <a:font script="Lisu" typeface="Segoe UI"/>
-        <a:font script="Mymr" typeface="Myanmar Text"/>
-        <a:font script="Nkoo" typeface="Ebrima"/>
-        <a:font script="Olck" typeface="Nirmala UI"/>
-        <a:font script="Osma" typeface="Ebrima"/>
-        <a:font script="Phag" typeface="Phagspa"/>
-        <a:font script="Syrn" typeface="Estrangelo Edessa"/>
-        <a:font script="Syrj" typeface="Estrangelo Edessa"/>
-        <a:font script="Syre" typeface="Estrangelo Edessa"/>
-        <a:font script="Sora" typeface="Nirmala UI"/>
-        <a:font script="Tale" typeface="Microsoft Tai Le"/>
-        <a:font script="Talu" typeface="Microsoft New Tai Lue"/>
-        <a:font script="Tfng" typeface="Ebrima"/>
       </a:majorFont>
       <a:minorFont>
-        <a:latin typeface="Calibri" panose="020F0502020204030204"/>
+        <a:latin typeface="Impact" panose="020B0806030902050204"/>
         <a:ea typeface=""/>
         <a:cs typeface=""/>
-        <a:font script="Jpan" typeface="游ゴシック"/>
+        <a:font script="Jpan" typeface="ＭＳ Ｐゴシック"/>
         <a:font script="Hang" typeface="맑은 고딕"/>
-        <a:font script="Hans" typeface="等线"/>
+        <a:font script="Hans" typeface="宋体"/>
         <a:font script="Hant" typeface="新細明體"/>
         <a:font script="Arab" typeface="Arial"/>
         <a:font script="Hebr" typeface="Arial"/>
@@ -1280,104 +6592,53 @@
         <a:font script="Viet" typeface="Arial"/>
         <a:font script="Uigh" typeface="Microsoft Uighur"/>
         <a:font script="Geor" typeface="Sylfaen"/>
-        <a:font script="Armn" typeface="Arial"/>
-        <a:font script="Bugi" typeface="Leelawadee UI"/>
-        <a:font script="Bopo" typeface="Microsoft JhengHei"/>
-        <a:font script="Java" typeface="Javanese Text"/>
-        <a:font script="Lisu" typeface="Segoe UI"/>
-        <a:font script="Mymr" typeface="Myanmar Text"/>
-        <a:font script="Nkoo" typeface="Ebrima"/>
-        <a:font script="Olck" typeface="Nirmala UI"/>
-        <a:font script="Osma" typeface="Ebrima"/>
-        <a:font script="Phag" typeface="Phagspa"/>
-        <a:font script="Syrn" typeface="Estrangelo Edessa"/>
-        <a:font script="Syrj" typeface="Estrangelo Edessa"/>
-        <a:font script="Syre" typeface="Estrangelo Edessa"/>
-        <a:font script="Sora" typeface="Nirmala UI"/>
-        <a:font script="Tale" typeface="Microsoft Tai Le"/>
-        <a:font script="Talu" typeface="Microsoft New Tai Lue"/>
-        <a:font script="Tfng" typeface="Ebrima"/>
       </a:minorFont>
     </a:fontScheme>
-    <a:fmtScheme name="Office">
+    <a:fmtScheme name="Main Event">
       <a:fillStyleLst>
         <a:solidFill>
           <a:schemeClr val="phClr"/>
         </a:solidFill>
-        <a:gradFill rotWithShape="1">
-          <a:gsLst>
-            <a:gs pos="0">
+        <a:solidFill>
+          <a:schemeClr val="phClr">
+            <a:tint val="69000"/>
+            <a:satMod val="105000"/>
+            <a:lumMod val="110000"/>
+          </a:schemeClr>
+        </a:solidFill>
+        <a:blipFill>
+          <a:blip xmlns:r="http://schemas.openxmlformats.org/officeDocument/2006/relationships" r:embed="rId1">
+            <a:duotone>
               <a:schemeClr val="phClr">
-                <a:lumMod val="110000"/>
-                <a:satMod val="105000"/>
-                <a:tint val="67000"/>
+                <a:shade val="88000"/>
+                <a:lumMod val="88000"/>
               </a:schemeClr>
-            </a:gs>
-            <a:gs pos="50000">
-              <a:schemeClr val="phClr">
-                <a:lumMod val="105000"/>
-                <a:satMod val="103000"/>
-                <a:tint val="73000"/>
-              </a:schemeClr>
-            </a:gs>
-            <a:gs pos="100000">
-              <a:schemeClr val="phClr">
-                <a:lumMod val="105000"/>
-                <a:satMod val="109000"/>
-                <a:tint val="81000"/>
-              </a:schemeClr>
-            </a:gs>
-          </a:gsLst>
-          <a:lin ang="5400000" scaled="0"/>
-        </a:gradFill>
-        <a:gradFill rotWithShape="1">
-          <a:gsLst>
-            <a:gs pos="0">
-              <a:schemeClr val="phClr">
-                <a:satMod val="103000"/>
-                <a:lumMod val="102000"/>
-                <a:tint val="94000"/>
-              </a:schemeClr>
-            </a:gs>
-            <a:gs pos="50000">
-              <a:schemeClr val="phClr">
-                <a:satMod val="110000"/>
-                <a:lumMod val="100000"/>
-                <a:shade val="100000"/>
-              </a:schemeClr>
-            </a:gs>
-            <a:gs pos="100000">
-              <a:schemeClr val="phClr">
-                <a:lumMod val="99000"/>
-                <a:satMod val="120000"/>
-                <a:shade val="78000"/>
-              </a:schemeClr>
-            </a:gs>
-          </a:gsLst>
-          <a:lin ang="5400000" scaled="0"/>
-        </a:gradFill>
+              <a:schemeClr val="phClr"/>
+            </a:duotone>
+          </a:blip>
+          <a:tile tx="0" ty="0" sx="100000" sy="100000" flip="none" algn="tl"/>
+        </a:blipFill>
       </a:fillStyleLst>
       <a:lnStyleLst>
-        <a:ln w="6350" cap="flat" cmpd="sng" algn="ctr">
+        <a:ln w="9525" cap="flat" cmpd="sng" algn="ctr">
           <a:solidFill>
-            <a:schemeClr val="phClr"/>
+            <a:schemeClr val="phClr">
+              <a:shade val="60000"/>
+            </a:schemeClr>
           </a:solidFill>
           <a:prstDash val="solid"/>
-          <a:miter lim="800000"/>
-        </a:ln>
-        <a:ln w="12700" cap="flat" cmpd="sng" algn="ctr">
-          <a:solidFill>
-            <a:schemeClr val="phClr"/>
-          </a:solidFill>
-          <a:prstDash val="solid"/>
-          <a:miter lim="800000"/>
         </a:ln>
         <a:ln w="19050" cap="flat" cmpd="sng" algn="ctr">
           <a:solidFill>
             <a:schemeClr val="phClr"/>
           </a:solidFill>
           <a:prstDash val="solid"/>
-          <a:miter lim="800000"/>
+        </a:ln>
+        <a:ln w="25400" cap="flat" cmpd="sng" algn="ctr">
+          <a:solidFill>
+            <a:schemeClr val="phClr"/>
+          </a:solidFill>
+          <a:prstDash val="solid"/>
         </a:ln>
       </a:lnStyleLst>
       <a:effectStyleLst>
@@ -1389,9 +6650,9 @@
         </a:effectStyle>
         <a:effectStyle>
           <a:effectLst>
-            <a:outerShdw blurRad="57150" dist="19050" dir="5400000" algn="ctr" rotWithShape="0">
+            <a:outerShdw blurRad="25400" dist="12700" dir="5400000" rotWithShape="0">
               <a:srgbClr val="000000">
-                <a:alpha val="63000"/>
+                <a:alpha val="60000"/>
               </a:srgbClr>
             </a:outerShdw>
           </a:effectLst>
@@ -1401,39 +6662,39 @@
         <a:solidFill>
           <a:schemeClr val="phClr"/>
         </a:solidFill>
-        <a:solidFill>
-          <a:schemeClr val="phClr">
-            <a:tint val="95000"/>
-            <a:satMod val="170000"/>
-          </a:schemeClr>
-        </a:solidFill>
         <a:gradFill rotWithShape="1">
           <a:gsLst>
             <a:gs pos="0">
               <a:schemeClr val="phClr">
-                <a:tint val="93000"/>
-                <a:satMod val="150000"/>
-                <a:shade val="98000"/>
-                <a:lumMod val="102000"/>
-              </a:schemeClr>
-            </a:gs>
-            <a:gs pos="50000">
-              <a:schemeClr val="phClr">
-                <a:tint val="98000"/>
-                <a:satMod val="130000"/>
-                <a:shade val="90000"/>
-                <a:lumMod val="103000"/>
+                <a:tint val="90000"/>
+                <a:lumMod val="110000"/>
               </a:schemeClr>
             </a:gs>
             <a:gs pos="100000">
               <a:schemeClr val="phClr">
-                <a:shade val="63000"/>
-                <a:satMod val="120000"/>
+                <a:shade val="88000"/>
+                <a:lumMod val="88000"/>
               </a:schemeClr>
             </a:gs>
           </a:gsLst>
           <a:lin ang="5400000" scaled="0"/>
         </a:gradFill>
+        <a:blipFill>
+          <a:blip xmlns:r="http://schemas.openxmlformats.org/officeDocument/2006/relationships" r:embed="rId2">
+            <a:duotone>
+              <a:schemeClr val="phClr">
+                <a:shade val="48000"/>
+                <a:satMod val="110000"/>
+                <a:lumMod val="40000"/>
+              </a:schemeClr>
+              <a:schemeClr val="phClr">
+                <a:tint val="90000"/>
+                <a:lumMod val="106000"/>
+              </a:schemeClr>
+            </a:duotone>
+          </a:blip>
+          <a:stretch/>
+        </a:blipFill>
       </a:bgFillStyleLst>
     </a:fmtScheme>
   </a:themeElements>
@@ -1441,7 +6702,7 @@
   <a:extraClrSchemeLst/>
   <a:extLst>
     <a:ext uri="{05A4C25C-085E-4340-85A3-A5531E510DB2}">
-      <thm15:themeFamily xmlns:thm15="http://schemas.microsoft.com/office/thememl/2012/main" name="Office Theme" id="{62F939B6-93AF-4DB8-9C6B-D6C7DFDC589F}" vid="{4A3C46E8-61CC-4603-A589-7422A47A8E4A}"/>
+      <thm15:themeFamily xmlns:thm15="http://schemas.microsoft.com/office/thememl/2012/main" name="Main Event" id="{AC372BB4-D83D-411E-B849-B641926BA760}" vid="{F1EFBDE3-1A95-4E3D-81AD-1F53D65BEA01}"/>
     </a:ext>
   </a:extLst>
 </a:theme>
